--- a/broker-only/docs/presentation/Only-Broker-presentation.pptx
+++ b/broker-only/docs/presentation/Only-Broker-presentation.pptx
@@ -25,9 +25,11 @@
     <p:sldId id="273" r:id="rId19"/>
     <p:sldId id="274" r:id="rId20"/>
     <p:sldId id="275" r:id="rId21"/>
+    <p:sldId id="276" r:id="rId22"/>
+    <p:sldId id="277" r:id="rId23"/>
   </p:sldIdLst>
   <p:notesMasterIdLst>
-    <p:notesMasterId r:id="rId22"/>
+    <p:notesMasterId r:id="rId24"/>
   </p:notesMasterIdLst>
   <p:sldSz cx="9144000" cy="5143500"/>
   <p:notesSz cx="5143500" cy="9144000"/>
@@ -961,7 +963,7 @@
           <a:p>
             <a:r>
               <a:rPr lang="en-US" dirty="0"/>
-              <a:t>Once brokers depend on the app, we switch on the marketplace. A customer posts one enquiry and every relevant broker nearby gets it — like a ride request. Brokers compete on terms, rating and response time. The pieces are already built; we switch them on after the pilot.</a:t>
+              <a:t>In the meeting, brokers told us ready inventory moves three ways: through fellow brokers, through walk-in customers, and by blasting the whole customer list. All three now live in one app. Co-broking uses the broker’s own list of fellow brokers and the flat’s location, so the right brokers nearby hear first. Nothing that lets anyone go around the listing broker ever leaves: no flat number, no owner, no customer, no commission. The owner is not asked; it is a trade agreement between brokers.</a:t>
             </a:r>
             <a:endParaRPr lang="en-US" dirty="0"/>
           </a:p>
@@ -1049,7 +1051,7 @@
           <a:p>
             <a:r>
               <a:rPr lang="en-US" dirty="0"/>
-              <a:t>Brokers will only put their business on a platform they trust. Isolation between brokers is enforced by the database, not just the app, and it is tested automatically. Every change is audited in a tamper-evident log. Consent and encryption keep us ready for the DPDP Act.</a:t>
+              <a:t>The foundation is a correct list of every flat in every building. That has to come from official records, not from brokers, whose lists are fragmentary. TMC has no public API, so we are requesting the register formally, under RTI and a data-sharing letter. MahaRERA covers the newer towers. Once a wing’s list is loaded, the system works out its layout and refuses any flat number that does not exist. This is slow, careful work — which is exactly why it is hard to copy.</a:t>
             </a:r>
             <a:endParaRPr lang="en-US" dirty="0"/>
           </a:p>
@@ -1137,7 +1139,7 @@
           <a:p>
             <a:r>
               <a:rPr lang="en-US" dirty="0"/>
-              <a:t>Five moats. Clean data that compounds with use. Lock-in, because brokers' flats and customers live here. Owner trust through the tick and reviews. A growth loop through WhatsApp links and broadcasts. And trust built in from the start — isolation, audit and consent — which is expensive for anyone else to retrofit.</a:t>
+              <a:t>Once brokers depend on the app, we switch on the marketplace. A customer posts one enquiry and every relevant broker nearby gets it — like a ride request. Brokers compete on terms, rating and response time. The pieces are already built; we switch them on after the pilot.</a:t>
             </a:r>
             <a:endParaRPr lang="en-US" dirty="0"/>
           </a:p>
@@ -1225,7 +1227,7 @@
           <a:p>
             <a:r>
               <a:rPr lang="en-US" dirty="0"/>
-              <a:t>Brokers pay because the app saves them time and makes them money. Subscription is the core; broadcasts and messages are a natural usage-based add-on; marketplace leads come later. Pricing is still to be decided — the pilot is free and will tell us willingness to pay.</a:t>
+              <a:t>Brokers will only put their business on a platform they trust. Isolation between brokers is enforced by the database, not just the app, and it is tested automatically. Every change is audited in a tamper-evident log. Consent and encryption keep us ready for the DPDP Act.</a:t>
             </a:r>
             <a:endParaRPr lang="en-US" dirty="0"/>
           </a:p>
@@ -1313,7 +1315,7 @@
           <a:p>
             <a:r>
               <a:rPr lang="en-US" dirty="0"/>
-              <a:t>The core is built and tested: broker, field staff, owner and customer modes, the link pages, the ops console and the data checks. We are now cleaning Thane West data with the pilot broker. Next, the pilot broker moves onto the real app on a server with real SMS and WhatsApp.</a:t>
+              <a:t>Five moats. Clean data that compounds with use. Lock-in, because brokers' flats and customers live here. Owner trust through the tick and reviews. A growth loop through WhatsApp links and broadcasts. And trust built in from the start — isolation, audit and consent — which is expensive for anyone else to retrofit.</a:t>
             </a:r>
             <a:endParaRPr lang="en-US" dirty="0"/>
           </a:p>
@@ -1401,7 +1403,7 @@
           <a:p>
             <a:r>
               <a:rPr lang="en-US" dirty="0"/>
-              <a:t>Four workstreams for the next 90 days: clean Thane West data, put the pilot broker on the live app, switch on real SMS and WhatsApp, and measure the pilot so we can set pricing.</a:t>
+              <a:t>Brokers pay because the app saves them time and makes them money. Subscription is the core; broadcasts and messages are a natural usage-based add-on; marketplace leads come later. Pricing is still to be decided — the pilot is free and will tell us willingness to pay.</a:t>
             </a:r>
             <a:endParaRPr lang="en-US" dirty="0"/>
           </a:p>
@@ -1577,7 +1579,7 @@
           <a:p>
             <a:r>
               <a:rPr lang="en-US" dirty="0"/>
-              <a:t>Now let me show you the app itself. Every login uses OTP 123456 in the demo. I'll start as the broker, then switch to the owner and the customer.</a:t>
+              <a:t>The core is built and tested: broker, field staff, owner and customer modes, the link pages, the ops console and the data checks. We are now cleaning Thane West data with the pilot broker. Next, the pilot broker moves onto the real app on a server with real SMS and WhatsApp.</a:t>
             </a:r>
             <a:endParaRPr lang="en-US" dirty="0"/>
           </a:p>
@@ -1601,6 +1603,182 @@
             <a:fld id="{F7021451-1387-4CA6-816F-3879F97B5CBC}" type="slidenum">
               <a:rPr lang="en-US"/>
               <a:t>20</a:t>
+            </a:fld>
+            <a:endParaRPr lang="en-US"/>
+          </a:p>
+        </p:txBody>
+      </p:sp>
+    </p:spTree>
+    <p:extLst>
+      <p:ext uri="{BB962C8B-B14F-4D97-AF65-F5344CB8AC3E}">
+        <p14:creationId xmlns:p14="http://schemas.microsoft.com/office/powerpoint/2010/main" val="1024086991"/>
+      </p:ext>
+    </p:extLst>
+  </p:cSld>
+  <p:clrMapOvr>
+    <a:masterClrMapping/>
+  </p:clrMapOvr>
+</p:notes>
+</file>
+
+<file path=ppt/notesSlides/notesSlide21.xml><?xml version="1.0" encoding="utf-8"?>
+<p:notes xmlns:a="http://schemas.openxmlformats.org/drawingml/2006/main" xmlns:r="http://schemas.openxmlformats.org/officeDocument/2006/relationships" xmlns:p="http://schemas.openxmlformats.org/presentationml/2006/main">
+  <p:cSld>
+    <p:spTree>
+      <p:nvGrpSpPr>
+        <p:cNvPr id="1" name=""/>
+        <p:cNvGrpSpPr/>
+        <p:nvPr/>
+      </p:nvGrpSpPr>
+      <p:grpSpPr>
+        <a:xfrm>
+          <a:off x="0" y="0"/>
+          <a:ext cx="0" cy="0"/>
+          <a:chOff x="0" y="0"/>
+          <a:chExt cx="0" cy="0"/>
+        </a:xfrm>
+      </p:grpSpPr>
+      <p:sp>
+        <p:nvSpPr>
+          <p:cNvPr id="2" name="Slide Image Placeholder 1"/>
+          <p:cNvSpPr>
+            <a:spLocks noGrp="1" noRot="1" noChangeAspect="1"/>
+          </p:cNvSpPr>
+          <p:nvPr>
+            <p:ph type="sldImg"/>
+          </p:nvPr>
+        </p:nvSpPr>
+        <p:spPr/>
+      </p:sp>
+      <p:sp>
+        <p:nvSpPr>
+          <p:cNvPr id="3" name="Notes Placeholder 2"/>
+          <p:cNvSpPr>
+            <a:spLocks noGrp="1"/>
+          </p:cNvSpPr>
+          <p:nvPr>
+            <p:ph type="body" idx="1"/>
+          </p:nvPr>
+        </p:nvSpPr>
+        <p:spPr/>
+        <p:txBody>
+          <a:bodyPr/>
+          <a:lstStyle/>
+          <a:p>
+            <a:r>
+              <a:rPr lang="en-US" dirty="0"/>
+              <a:t>Four workstreams for the next 90 days: clean Thane West data, put the pilot broker on the live app, switch on real SMS and WhatsApp, and measure the pilot so we can set pricing.</a:t>
+            </a:r>
+            <a:endParaRPr lang="en-US" dirty="0"/>
+          </a:p>
+        </p:txBody>
+      </p:sp>
+      <p:sp>
+        <p:nvSpPr>
+          <p:cNvPr id="4" name="Slide Number Placeholder 3"/>
+          <p:cNvSpPr>
+            <a:spLocks noGrp="1"/>
+          </p:cNvSpPr>
+          <p:nvPr>
+            <p:ph type="sldNum" sz="quarter" idx="10"/>
+          </p:nvPr>
+        </p:nvSpPr>
+        <p:spPr/>
+        <p:txBody>
+          <a:bodyPr/>
+          <a:lstStyle/>
+          <a:p>
+            <a:fld id="{F7021451-1387-4CA6-816F-3879F97B5CBC}" type="slidenum">
+              <a:rPr lang="en-US"/>
+              <a:t>21</a:t>
+            </a:fld>
+            <a:endParaRPr lang="en-US"/>
+          </a:p>
+        </p:txBody>
+      </p:sp>
+    </p:spTree>
+    <p:extLst>
+      <p:ext uri="{BB962C8B-B14F-4D97-AF65-F5344CB8AC3E}">
+        <p14:creationId xmlns:p14="http://schemas.microsoft.com/office/powerpoint/2010/main" val="1024086991"/>
+      </p:ext>
+    </p:extLst>
+  </p:cSld>
+  <p:clrMapOvr>
+    <a:masterClrMapping/>
+  </p:clrMapOvr>
+</p:notes>
+</file>
+
+<file path=ppt/notesSlides/notesSlide22.xml><?xml version="1.0" encoding="utf-8"?>
+<p:notes xmlns:a="http://schemas.openxmlformats.org/drawingml/2006/main" xmlns:r="http://schemas.openxmlformats.org/officeDocument/2006/relationships" xmlns:p="http://schemas.openxmlformats.org/presentationml/2006/main">
+  <p:cSld>
+    <p:spTree>
+      <p:nvGrpSpPr>
+        <p:cNvPr id="1" name=""/>
+        <p:cNvGrpSpPr/>
+        <p:nvPr/>
+      </p:nvGrpSpPr>
+      <p:grpSpPr>
+        <a:xfrm>
+          <a:off x="0" y="0"/>
+          <a:ext cx="0" cy="0"/>
+          <a:chOff x="0" y="0"/>
+          <a:chExt cx="0" cy="0"/>
+        </a:xfrm>
+      </p:grpSpPr>
+      <p:sp>
+        <p:nvSpPr>
+          <p:cNvPr id="2" name="Slide Image Placeholder 1"/>
+          <p:cNvSpPr>
+            <a:spLocks noGrp="1" noRot="1" noChangeAspect="1"/>
+          </p:cNvSpPr>
+          <p:nvPr>
+            <p:ph type="sldImg"/>
+          </p:nvPr>
+        </p:nvSpPr>
+        <p:spPr/>
+      </p:sp>
+      <p:sp>
+        <p:nvSpPr>
+          <p:cNvPr id="3" name="Notes Placeholder 2"/>
+          <p:cNvSpPr>
+            <a:spLocks noGrp="1"/>
+          </p:cNvSpPr>
+          <p:nvPr>
+            <p:ph type="body" idx="1"/>
+          </p:nvPr>
+        </p:nvSpPr>
+        <p:spPr/>
+        <p:txBody>
+          <a:bodyPr/>
+          <a:lstStyle/>
+          <a:p>
+            <a:r>
+              <a:rPr lang="en-US" dirty="0"/>
+              <a:t>Now let me show you the app itself. Every login uses OTP 123456 in the demo. I'll start as the broker, then switch to the owner and the customer.</a:t>
+            </a:r>
+            <a:endParaRPr lang="en-US" dirty="0"/>
+          </a:p>
+        </p:txBody>
+      </p:sp>
+      <p:sp>
+        <p:nvSpPr>
+          <p:cNvPr id="4" name="Slide Number Placeholder 3"/>
+          <p:cNvSpPr>
+            <a:spLocks noGrp="1"/>
+          </p:cNvSpPr>
+          <p:nvPr>
+            <p:ph type="sldNum" sz="quarter" idx="10"/>
+          </p:nvPr>
+        </p:nvSpPr>
+        <p:spPr/>
+        <p:txBody>
+          <a:bodyPr/>
+          <a:lstStyle/>
+          <a:p>
+            <a:fld id="{F7021451-1387-4CA6-816F-3879F97B5CBC}" type="slidenum">
+              <a:rPr lang="en-US"/>
+              <a:t>22</a:t>
             </a:fld>
             <a:endParaRPr lang="en-US"/>
           </a:p>
@@ -5234,7 +5412,7 @@
                 <a:ea typeface="Cambria" pitchFamily="34" charset="-122"/>
                 <a:cs typeface="Cambria" pitchFamily="34" charset="-120"/>
               </a:rPr>
-              <a:t>Next: one enquiry, every relevant broker</a:t>
+              <a:t>Selling ready flats: all three routes, one app</a:t>
             </a:r>
             <a:endParaRPr lang="en-US" sz="2500" dirty="0"/>
           </a:p>
@@ -5257,7 +5435,7 @@
             </a:avLst>
           </a:prstGeom>
           <a:solidFill>
-            <a:srgbClr val="E8A33D"/>
+            <a:srgbClr val="0E3B43"/>
           </a:solidFill>
           <a:ln/>
         </p:spPr>
@@ -5289,13 +5467,13 @@
             <a:r>
               <a:rPr lang="en-US" sz="1100" b="1" spc="200" kern="0" dirty="0">
                 <a:solidFill>
-                  <a:srgbClr val="15201F"/>
-                </a:solidFill>
-                <a:latin typeface="Calibri" pitchFamily="34" charset="0"/>
-                <a:ea typeface="Calibri" pitchFamily="34" charset="-122"/>
-                <a:cs typeface="Calibri" pitchFamily="34" charset="-120"/>
-              </a:rPr>
-              <a:t>MOAT</a:t>
+                  <a:srgbClr val="FFFFFF"/>
+                </a:solidFill>
+                <a:latin typeface="Calibri" pitchFamily="34" charset="0"/>
+                <a:ea typeface="Calibri" pitchFamily="34" charset="-122"/>
+                <a:cs typeface="Calibri" pitchFamily="34" charset="-120"/>
+              </a:rPr>
+              <a:t>USP</a:t>
             </a:r>
             <a:endParaRPr lang="en-US" sz="1100" dirty="0"/>
           </a:p>
@@ -5332,7 +5510,7 @@
       </p:sp>
       <p:pic>
         <p:nvPicPr>
-          <p:cNvPr id="6" name="Image 0" descr="/tmp/claude-0/-home-user-SocietyManagement/f8f5daac-a2c6-5a71-ae45-d4f3c625db39/scratchpad/deck/img/leads.jpg">    </p:cNvPr>
+          <p:cNvPr id="6" name="Image 0" descr="/tmp/claude-0/-home-user-SocietyManagement/f8f5daac-a2c6-5a71-ae45-d4f3c625db39/scratchpad/deck/img/thub.jpg">    </p:cNvPr>
           <p:cNvPicPr>
             <a:picLocks noChangeAspect="1"/>
           </p:cNvPicPr>
@@ -5387,7 +5565,7 @@
                 <a:ea typeface="Calibri" pitchFamily="34" charset="-122"/>
                 <a:cs typeface="Calibri" pitchFamily="34" charset="-120"/>
               </a:rPr>
-              <a:t>Broker’s leads</a:t>
+              <a:t>Offers from brokers</a:t>
             </a:r>
             <a:endParaRPr lang="en-US" sz="1050" dirty="0"/>
           </a:p>
@@ -5395,14 +5573,106 @@
       </p:sp>
       <p:sp>
         <p:nvSpPr>
-          <p:cNvPr id="8" name="Text 5"/>
-          <p:cNvSpPr txBox="1"/>
-          <p:nvPr/>
-        </p:nvSpPr>
-        <p:spPr>
-          <a:xfrm>
-            <a:off x="2743200" y="1188720"/>
-            <a:ext cx="5943600" cy="3611880"/>
+          <p:cNvPr id="8" name="Shape 5"/>
+          <p:cNvSpPr/>
+          <p:nvPr/>
+        </p:nvSpPr>
+        <p:spPr>
+          <a:xfrm>
+            <a:off x="2459736" y="1042416"/>
+            <a:ext cx="1824228" cy="3538728"/>
+          </a:xfrm>
+          <a:prstGeom prst="roundRect">
+            <a:avLst>
+              <a:gd name="adj" fmla="val 7018"/>
+            </a:avLst>
+          </a:prstGeom>
+          <a:solidFill>
+            <a:srgbClr val="15201F"/>
+          </a:solidFill>
+          <a:ln/>
+          <a:effectLst>
+            <a:outerShdw sx="100000" sy="100000" kx="0" ky="0" algn="bl" rotWithShape="0" blurRad="101600" dist="38100" dir="5400000">
+              <a:srgbClr val="000000">
+                <a:alpha val="25000"/>
+              </a:srgbClr>
+            </a:outerShdw>
+          </a:effectLst>
+        </p:spPr>
+      </p:sp>
+      <p:pic>
+        <p:nvPicPr>
+          <p:cNvPr id="9" name="Image 1" descr="/tmp/claude-0/-home-user-SocietyManagement/f8f5daac-a2c6-5a71-ae45-d4f3c625db39/scratchpad/deck/img/tblast.jpg">    </p:cNvPr>
+          <p:cNvPicPr>
+            <a:picLocks noChangeAspect="1"/>
+          </p:cNvPicPr>
+          <p:nvPr/>
+        </p:nvPicPr>
+        <p:blipFill>
+          <a:blip r:embed="rId2"/>
+          <a:stretch>
+            <a:fillRect/>
+          </a:stretch>
+        </p:blipFill>
+        <p:spPr>
+          <a:xfrm>
+            <a:off x="2514600" y="1097280"/>
+            <a:ext cx="1714500" cy="3429000"/>
+          </a:xfrm>
+          <a:prstGeom prst="rect">
+            <a:avLst/>
+          </a:prstGeom>
+        </p:spPr>
+      </p:pic>
+      <p:sp>
+        <p:nvSpPr>
+          <p:cNvPr id="10" name="Text 6"/>
+          <p:cNvSpPr txBox="1"/>
+          <p:nvPr/>
+        </p:nvSpPr>
+        <p:spPr>
+          <a:xfrm>
+            <a:off x="2240280" y="4617720"/>
+            <a:ext cx="2263140" cy="274320"/>
+          </a:xfrm>
+          <a:prstGeom prst="rect">
+            <a:avLst/>
+          </a:prstGeom>
+          <a:noFill/>
+          <a:ln/>
+        </p:spPr>
+        <p:txBody>
+          <a:bodyPr wrap="square" lIns="0" tIns="0" rIns="0" bIns="0" rtlCol="0" anchor="ctr"/>
+          <a:lstStyle/>
+          <a:p>
+            <a:pPr algn="ctr" indent="0" marL="0">
+              <a:buNone/>
+            </a:pPr>
+            <a:r>
+              <a:rPr lang="en-US" sz="1050" dirty="0">
+                <a:solidFill>
+                  <a:srgbClr val="5B6866"/>
+                </a:solidFill>
+                <a:latin typeface="Calibri" pitchFamily="34" charset="0"/>
+                <a:ea typeface="Calibri" pitchFamily="34" charset="-122"/>
+                <a:cs typeface="Calibri" pitchFamily="34" charset="-120"/>
+              </a:rPr>
+              <a:t>Share with brokers nearby</a:t>
+            </a:r>
+            <a:endParaRPr lang="en-US" sz="1050" dirty="0"/>
+          </a:p>
+        </p:txBody>
+      </p:sp>
+      <p:sp>
+        <p:nvSpPr>
+          <p:cNvPr id="11" name="Text 7"/>
+          <p:cNvSpPr txBox="1"/>
+          <p:nvPr/>
+        </p:nvSpPr>
+        <p:spPr>
+          <a:xfrm>
+            <a:off x="4617720" y="1143000"/>
+            <a:ext cx="4114800" cy="3749040"/>
           </a:xfrm>
           <a:prstGeom prst="rect">
             <a:avLst/>
@@ -5416,13 +5686,13 @@
           <a:p>
             <a:pPr marL="177800" indent="-177800">
               <a:spcAft>
-                <a:spcPts val="600"/>
+                <a:spcPts val="500"/>
               </a:spcAft>
               <a:buSzPct val="100000"/>
               <a:buChar char="•"/>
             </a:pPr>
             <a:r>
-              <a:rPr lang="en-US" sz="1300" b="1" dirty="0">
+              <a:rPr lang="en-US" sz="1200" b="1" dirty="0">
                 <a:solidFill>
                   <a:srgbClr val="15201F"/>
                 </a:solidFill>
@@ -5430,13 +5700,13 @@
                 <a:ea typeface="Calibri" pitchFamily="34" charset="-122"/>
                 <a:cs typeface="Calibri" pitchFamily="34" charset="-120"/>
               </a:rPr>
-              <a:t>One enquiry, every nearby broker: </a:t>
+              <a:t>A. Fellow brokers (co-broking): </a:t>
             </a:r>
             <a:pPr indent="0" marL="0">
               <a:buNone/>
             </a:pPr>
             <a:r>
-              <a:rPr lang="en-US" sz="1300" dirty="0">
+              <a:rPr lang="en-US" sz="1200" dirty="0">
                 <a:solidFill>
                   <a:srgbClr val="5B6866"/>
                 </a:solidFill>
@@ -5444,20 +5714,20 @@
                 <a:ea typeface="Calibri" pitchFamily="34" charset="-122"/>
                 <a:cs typeface="Calibri" pitchFamily="34" charset="-120"/>
               </a:rPr>
-              <a:t>the customer posts once; brokers who work in that area get it instantly.</a:t>
-            </a:r>
-            <a:endParaRPr lang="en-US" sz="1300" dirty="0"/>
+              <a:t>the broker’s own list of channel partners, imported from Excel or phone contacts. Blast ready flats to brokers in and around the flat — widen the distance, send to all, or tick names.</a:t>
+            </a:r>
+            <a:endParaRPr lang="en-US" sz="1200" dirty="0"/>
           </a:p>
           <a:p>
             <a:pPr marL="177800" indent="-177800">
               <a:spcAft>
-                <a:spcPts val="600"/>
+                <a:spcPts val="500"/>
               </a:spcAft>
               <a:buSzPct val="100000"/>
               <a:buChar char="•"/>
             </a:pPr>
             <a:r>
-              <a:rPr lang="en-US" sz="1300" b="1" dirty="0">
+              <a:rPr lang="en-US" sz="1200" b="1" dirty="0">
                 <a:solidFill>
                   <a:srgbClr val="15201F"/>
                 </a:solidFill>
@@ -5465,13 +5735,13 @@
                 <a:ea typeface="Calibri" pitchFamily="34" charset="-122"/>
                 <a:cs typeface="Calibri" pitchFamily="34" charset="-120"/>
               </a:rPr>
-              <a:t>Brokers see how many of THEIR flats match </a:t>
+              <a:t>B. Walk-ins and customers we send: </a:t>
             </a:r>
             <a:pPr indent="0" marL="0">
               <a:buNone/>
             </a:pPr>
             <a:r>
-              <a:rPr lang="en-US" sz="1300" dirty="0">
+              <a:rPr lang="en-US" sz="1200" dirty="0">
                 <a:solidFill>
                   <a:srgbClr val="5B6866"/>
                 </a:solidFill>
@@ -5479,20 +5749,20 @@
                 <a:ea typeface="Calibri" pitchFamily="34" charset="-122"/>
                 <a:cs typeface="Calibri" pitchFamily="34" charset="-120"/>
               </a:rPr>
-              <a:t>before they respond — and reply with their terms and rating.</a:t>
-            </a:r>
-            <a:endParaRPr lang="en-US" sz="1300" dirty="0"/>
+              <a:t>matching against the broker’s own flats, visit plans, field staff.</a:t>
+            </a:r>
+            <a:endParaRPr lang="en-US" sz="1200" dirty="0"/>
           </a:p>
           <a:p>
             <a:pPr marL="177800" indent="-177800">
               <a:spcAft>
-                <a:spcPts val="600"/>
+                <a:spcPts val="500"/>
               </a:spcAft>
               <a:buSzPct val="100000"/>
               <a:buChar char="•"/>
             </a:pPr>
             <a:r>
-              <a:rPr lang="en-US" sz="1300" b="1" dirty="0">
+              <a:rPr lang="en-US" sz="1200" b="1" dirty="0">
                 <a:solidFill>
                   <a:srgbClr val="15201F"/>
                 </a:solidFill>
@@ -5500,13 +5770,13 @@
                 <a:ea typeface="Calibri" pitchFamily="34" charset="-122"/>
                 <a:cs typeface="Calibri" pitchFamily="34" charset="-120"/>
               </a:rPr>
-              <a:t>Owners invite brokers </a:t>
+              <a:t>C. The whole customer list: </a:t>
             </a:r>
             <a:pPr indent="0" marL="0">
               <a:buNone/>
             </a:pPr>
             <a:r>
-              <a:rPr lang="en-US" sz="1300" dirty="0">
+              <a:rPr lang="en-US" sz="1200" dirty="0">
                 <a:solidFill>
                   <a:srgbClr val="5B6866"/>
                 </a:solidFill>
@@ -5514,20 +5784,20 @@
                 <a:ea typeface="Calibri" pitchFamily="34" charset="-122"/>
                 <a:cs typeface="Calibri" pitchFamily="34" charset="-120"/>
               </a:rPr>
-              <a:t>from a list of verified brokers near their flat, ranked by rating.</a:t>
-            </a:r>
-            <a:endParaRPr lang="en-US" sz="1300" dirty="0"/>
+              <a:t>import it once, then one message with several new flats reaches everyone — in the app, or a one-tap WhatsApp.</a:t>
+            </a:r>
+            <a:endParaRPr lang="en-US" sz="1200" dirty="0"/>
           </a:p>
           <a:p>
             <a:pPr marL="177800" indent="-177800">
               <a:spcAft>
-                <a:spcPts val="600"/>
+                <a:spcPts val="500"/>
               </a:spcAft>
               <a:buSzPct val="100000"/>
               <a:buChar char="•"/>
             </a:pPr>
             <a:r>
-              <a:rPr lang="en-US" sz="1300" b="1" dirty="0">
+              <a:rPr lang="en-US" sz="1200" b="1" dirty="0">
                 <a:solidFill>
                   <a:srgbClr val="15201F"/>
                 </a:solidFill>
@@ -5535,13 +5805,13 @@
                 <a:ea typeface="Calibri" pitchFamily="34" charset="-122"/>
                 <a:cs typeface="Calibri" pitchFamily="34" charset="-120"/>
               </a:rPr>
-              <a:t>Anonymous supply map: </a:t>
+              <a:t>Trade-level only: </a:t>
             </a:r>
             <a:pPr indent="0" marL="0">
               <a:buNone/>
             </a:pPr>
             <a:r>
-              <a:rPr lang="en-US" sz="1300" dirty="0">
+              <a:rPr lang="en-US" sz="1200" dirty="0">
                 <a:solidFill>
                   <a:srgbClr val="5B6866"/>
                 </a:solidFill>
@@ -5549,44 +5819,9 @@
                 <a:ea typeface="Calibri" pitchFamily="34" charset="-122"/>
                 <a:cs typeface="Calibri" pitchFamily="34" charset="-120"/>
               </a:rPr>
-              <a:t>customers see where flats are, never whose — small clusters are hidden.</a:t>
-            </a:r>
-            <a:endParaRPr lang="en-US" sz="1300" dirty="0"/>
-          </a:p>
-          <a:p>
-            <a:pPr marL="177800" indent="-177800">
-              <a:spcAft>
-                <a:spcPts val="600"/>
-              </a:spcAft>
-              <a:buSzPct val="100000"/>
-              <a:buChar char="•"/>
-            </a:pPr>
-            <a:r>
-              <a:rPr lang="en-US" sz="1300" b="1" dirty="0">
-                <a:solidFill>
-                  <a:srgbClr val="15201F"/>
-                </a:solidFill>
-                <a:latin typeface="Calibri" pitchFamily="34" charset="0"/>
-                <a:ea typeface="Calibri" pitchFamily="34" charset="-122"/>
-                <a:cs typeface="Calibri" pitchFamily="34" charset="-120"/>
-              </a:rPr>
-              <a:t>Status: </a:t>
-            </a:r>
-            <a:pPr indent="0" marL="0">
-              <a:buNone/>
-            </a:pPr>
-            <a:r>
-              <a:rPr lang="en-US" sz="1300" dirty="0">
-                <a:solidFill>
-                  <a:srgbClr val="5B6866"/>
-                </a:solidFill>
-                <a:latin typeface="Calibri" pitchFamily="34" charset="0"/>
-                <a:ea typeface="Calibri" pitchFamily="34" charset="-122"/>
-                <a:cs typeface="Calibri" pitchFamily="34" charset="-120"/>
-              </a:rPr>
-              <a:t>built and tested in the backend; switched on after the pilot proves the broker app.</a:t>
-            </a:r>
-            <a:endParaRPr lang="en-US" sz="1300" dirty="0"/>
+              <a:t>society, area, BHK, price. Never the flat number, owner, customer or commission.</a:t>
+            </a:r>
+            <a:endParaRPr lang="en-US" sz="1200" dirty="0"/>
           </a:p>
         </p:txBody>
       </p:sp>
@@ -5655,7 +5890,7 @@
                 <a:ea typeface="Cambria" pitchFamily="34" charset="-122"/>
                 <a:cs typeface="Cambria" pitchFamily="34" charset="-120"/>
               </a:rPr>
-              <a:t>Trust by design: privacy, audit, compliance</a:t>
+              <a:t>Every building, floor by floor — officially</a:t>
             </a:r>
             <a:endParaRPr lang="en-US" sz="2500" dirty="0"/>
           </a:p>
@@ -5722,9 +5957,38 @@
           </a:p>
         </p:txBody>
       </p:sp>
+      <p:sp>
+        <p:nvSpPr>
+          <p:cNvPr id="5" name="Shape 3"/>
+          <p:cNvSpPr/>
+          <p:nvPr/>
+        </p:nvSpPr>
+        <p:spPr>
+          <a:xfrm>
+            <a:off x="493776" y="1042416"/>
+            <a:ext cx="1824228" cy="3538728"/>
+          </a:xfrm>
+          <a:prstGeom prst="roundRect">
+            <a:avLst>
+              <a:gd name="adj" fmla="val 7018"/>
+            </a:avLst>
+          </a:prstGeom>
+          <a:solidFill>
+            <a:srgbClr val="15201F"/>
+          </a:solidFill>
+          <a:ln/>
+          <a:effectLst>
+            <a:outerShdw sx="100000" sy="100000" kx="0" ky="0" algn="bl" rotWithShape="0" blurRad="101600" dist="38100" dir="5400000">
+              <a:srgbClr val="000000">
+                <a:alpha val="25000"/>
+              </a:srgbClr>
+            </a:outerShdw>
+          </a:effectLst>
+        </p:spPr>
+      </p:sp>
       <p:pic>
         <p:nvPicPr>
-          <p:cNvPr id="5" name="Image 0" descr="/tmp/claude-0/-home-user-SocietyManagement/f8f5daac-a2c6-5a71-ae45-d4f3c625db39/scratchpad/deck/img/ops_brokers.jpg">    </p:cNvPr>
+          <p:cNvPr id="6" name="Image 0" descr="/tmp/claude-0/-home-user-SocietyManagement/f8f5daac-a2c6-5a71-ae45-d4f3c625db39/scratchpad/deck/img/struct.jpg">    </p:cNvPr>
           <p:cNvPicPr>
             <a:picLocks noChangeAspect="1"/>
           </p:cNvPicPr>
@@ -5738,8 +6002,8 @@
         </p:blipFill>
         <p:spPr>
           <a:xfrm>
-            <a:off x="457200" y="1188720"/>
-            <a:ext cx="4023360" cy="1307592"/>
+            <a:off x="548640" y="1097280"/>
+            <a:ext cx="1714500" cy="3429000"/>
           </a:xfrm>
           <a:prstGeom prst="rect">
             <a:avLst/>
@@ -5748,82 +6012,14 @@
       </p:pic>
       <p:sp>
         <p:nvSpPr>
-          <p:cNvPr id="6" name="Shape 3"/>
-          <p:cNvSpPr/>
-          <p:nvPr/>
-        </p:nvSpPr>
-        <p:spPr>
-          <a:xfrm>
-            <a:off x="457200" y="1188720"/>
-            <a:ext cx="4023360" cy="1307592"/>
-          </a:xfrm>
-          <a:prstGeom prst="rect">
-            <a:avLst/>
-          </a:prstGeom>
-          <a:ln w="9525">
-            <a:solidFill>
-              <a:srgbClr val="C9D2CF"/>
-            </a:solidFill>
-            <a:prstDash val="solid"/>
-          </a:ln>
-        </p:spPr>
-      </p:sp>
-      <p:pic>
-        <p:nvPicPr>
-          <p:cNvPr id="7" name="Image 1" descr="/tmp/claude-0/-home-user-SocietyManagement/f8f5daac-a2c6-5a71-ae45-d4f3c625db39/scratchpad/deck/img/ops_audit.jpg">    </p:cNvPr>
-          <p:cNvPicPr>
-            <a:picLocks noChangeAspect="1"/>
-          </p:cNvPicPr>
-          <p:nvPr/>
-        </p:nvPicPr>
-        <p:blipFill>
-          <a:blip r:embed="rId2"/>
-          <a:stretch>
-            <a:fillRect/>
-          </a:stretch>
-        </p:blipFill>
-        <p:spPr>
-          <a:xfrm>
-            <a:off x="457200" y="2743200"/>
-            <a:ext cx="4023360" cy="1307592"/>
-          </a:xfrm>
-          <a:prstGeom prst="rect">
-            <a:avLst/>
-          </a:prstGeom>
-        </p:spPr>
-      </p:pic>
-      <p:sp>
-        <p:nvSpPr>
-          <p:cNvPr id="8" name="Shape 4"/>
-          <p:cNvSpPr/>
-          <p:nvPr/>
-        </p:nvSpPr>
-        <p:spPr>
-          <a:xfrm>
-            <a:off x="457200" y="2743200"/>
-            <a:ext cx="4023360" cy="1307592"/>
-          </a:xfrm>
-          <a:prstGeom prst="rect">
-            <a:avLst/>
-          </a:prstGeom>
-          <a:ln w="9525">
-            <a:solidFill>
-              <a:srgbClr val="C9D2CF"/>
-            </a:solidFill>
-            <a:prstDash val="solid"/>
-          </a:ln>
-        </p:spPr>
-      </p:sp>
-      <p:sp>
-        <p:nvSpPr>
-          <p:cNvPr id="9" name="Text 5"/>
-          <p:cNvSpPr txBox="1"/>
-          <p:nvPr/>
-        </p:nvSpPr>
-        <p:spPr>
-          <a:xfrm>
-            <a:off x="457200" y="4114800"/>
-            <a:ext cx="4023360" cy="274320"/>
+          <p:cNvPr id="7" name="Text 4"/>
+          <p:cNvSpPr txBox="1"/>
+          <p:nvPr/>
+        </p:nvSpPr>
+        <p:spPr>
+          <a:xfrm>
+            <a:off x="274320" y="4617720"/>
+            <a:ext cx="2263140" cy="274320"/>
           </a:xfrm>
           <a:prstGeom prst="rect">
             <a:avLst/>
@@ -5835,7 +6031,7 @@
           <a:bodyPr wrap="square" lIns="0" tIns="0" rIns="0" bIns="0" rtlCol="0" anchor="ctr"/>
           <a:lstStyle/>
           <a:p>
-            <a:pPr indent="0" marL="0">
+            <a:pPr algn="ctr" indent="0" marL="0">
               <a:buNone/>
             </a:pPr>
             <a:r>
@@ -5847,7 +6043,7 @@
                 <a:ea typeface="Calibri" pitchFamily="34" charset="-122"/>
                 <a:cs typeface="Calibri" pitchFamily="34" charset="-120"/>
               </a:rPr>
-              <a:t>Ops console: broker verification (RERA) and tamper check</a:t>
+              <a:t>The building picture: my flats marked</a:t>
             </a:r>
             <a:endParaRPr lang="en-US" sz="1050" dirty="0"/>
           </a:p>
@@ -5855,14 +6051,14 @@
       </p:sp>
       <p:sp>
         <p:nvSpPr>
-          <p:cNvPr id="10" name="Text 6"/>
-          <p:cNvSpPr txBox="1"/>
-          <p:nvPr/>
-        </p:nvSpPr>
-        <p:spPr>
-          <a:xfrm>
-            <a:off x="4754880" y="1188720"/>
-            <a:ext cx="3931920" cy="3611880"/>
+          <p:cNvPr id="8" name="Text 5"/>
+          <p:cNvSpPr txBox="1"/>
+          <p:nvPr/>
+        </p:nvSpPr>
+        <p:spPr>
+          <a:xfrm>
+            <a:off x="2743200" y="1143000"/>
+            <a:ext cx="5943600" cy="3749040"/>
           </a:xfrm>
           <a:prstGeom prst="rect">
             <a:avLst/>
@@ -5876,13 +6072,13 @@
           <a:p>
             <a:pPr marL="177800" indent="-177800">
               <a:spcAft>
-                <a:spcPts val="500"/>
+                <a:spcPts val="600"/>
               </a:spcAft>
               <a:buSzPct val="100000"/>
               <a:buChar char="•"/>
             </a:pPr>
             <a:r>
-              <a:rPr lang="en-US" sz="1200" b="1" dirty="0">
+              <a:rPr lang="en-US" sz="1250" b="1" dirty="0">
                 <a:solidFill>
                   <a:srgbClr val="15201F"/>
                 </a:solidFill>
@@ -5890,13 +6086,13 @@
                 <a:ea typeface="Calibri" pitchFamily="34" charset="-122"/>
                 <a:cs typeface="Calibri" pitchFamily="34" charset="-120"/>
               </a:rPr>
-              <a:t>Each broker’s data is walled off by the database itself </a:t>
+              <a:t>Our own source, never brokers: </a:t>
             </a:r>
             <a:pPr indent="0" marL="0">
               <a:buNone/>
             </a:pPr>
             <a:r>
-              <a:rPr lang="en-US" sz="1200" dirty="0">
+              <a:rPr lang="en-US" sz="1250" dirty="0">
                 <a:solidFill>
                   <a:srgbClr val="5B6866"/>
                 </a:solidFill>
@@ -5904,20 +6100,20 @@
                 <a:ea typeface="Calibri" pitchFamily="34" charset="-122"/>
                 <a:cs typeface="Calibri" pitchFamily="34" charset="-120"/>
               </a:rPr>
-              <a:t>— checked by automated tests on every change.</a:t>
-            </a:r>
-            <a:endParaRPr lang="en-US" sz="1200" dirty="0"/>
+              <a:t>TMC property-tax register (requested formally — there is no public API), MahaRERA for newer towers, IGR registrations to fill gaps.</a:t>
+            </a:r>
+            <a:endParaRPr lang="en-US" sz="1250" dirty="0"/>
           </a:p>
           <a:p>
             <a:pPr marL="177800" indent="-177800">
               <a:spcAft>
-                <a:spcPts val="500"/>
+                <a:spcPts val="600"/>
               </a:spcAft>
               <a:buSzPct val="100000"/>
               <a:buChar char="•"/>
             </a:pPr>
             <a:r>
-              <a:rPr lang="en-US" sz="1200" b="1" dirty="0">
+              <a:rPr lang="en-US" sz="1250" b="1" dirty="0">
                 <a:solidFill>
                   <a:srgbClr val="15201F"/>
                 </a:solidFill>
@@ -5925,13 +6121,13 @@
                 <a:ea typeface="Calibri" pitchFamily="34" charset="-122"/>
                 <a:cs typeface="Calibri" pitchFamily="34" charset="-120"/>
               </a:rPr>
-              <a:t>Tamper-evident audit trail </a:t>
+              <a:t>From each wing’s flat list we work out the layout: </a:t>
             </a:r>
             <a:pPr indent="0" marL="0">
               <a:buNone/>
             </a:pPr>
             <a:r>
-              <a:rPr lang="en-US" sz="1200" dirty="0">
+              <a:rPr lang="en-US" sz="1250" dirty="0">
                 <a:solidFill>
                   <a:srgbClr val="5B6866"/>
                 </a:solidFill>
@@ -5939,20 +6135,20 @@
                 <a:ea typeface="Calibri" pitchFamily="34" charset="-122"/>
                 <a:cs typeface="Calibri" pitchFamily="34" charset="-120"/>
               </a:rPr>
-              <a:t>and flat-status history: any altered record is detected.</a:t>
-            </a:r>
-            <a:endParaRPr lang="en-US" sz="1200" dirty="0"/>
+              <a:t>floors, flats per floor, refuge floors, odd flats like 2001A.</a:t>
+            </a:r>
+            <a:endParaRPr lang="en-US" sz="1250" dirty="0"/>
           </a:p>
           <a:p>
             <a:pPr marL="177800" indent="-177800">
               <a:spcAft>
-                <a:spcPts val="500"/>
+                <a:spcPts val="600"/>
               </a:spcAft>
               <a:buSzPct val="100000"/>
               <a:buChar char="•"/>
             </a:pPr>
             <a:r>
-              <a:rPr lang="en-US" sz="1200" b="1" dirty="0">
+              <a:rPr lang="en-US" sz="1250" b="1" dirty="0">
                 <a:solidFill>
                   <a:srgbClr val="15201F"/>
                 </a:solidFill>
@@ -5960,13 +6156,13 @@
                 <a:ea typeface="Calibri" pitchFamily="34" charset="-122"/>
                 <a:cs typeface="Calibri" pitchFamily="34" charset="-120"/>
               </a:rPr>
-              <a:t>Phone numbers encrypted; </a:t>
+              <a:t>A flat that isn’t on the list cannot be added — </a:t>
             </a:r>
             <a:pPr indent="0" marL="0">
               <a:buNone/>
             </a:pPr>
             <a:r>
-              <a:rPr lang="en-US" sz="1200" dirty="0">
+              <a:rPr lang="en-US" sz="1250" dirty="0">
                 <a:solidFill>
                   <a:srgbClr val="5B6866"/>
                 </a:solidFill>
@@ -5974,20 +6170,20 @@
                 <a:ea typeface="Calibri" pitchFamily="34" charset="-122"/>
                 <a:cs typeface="Calibri" pitchFamily="34" charset="-120"/>
               </a:rPr>
-              <a:t>owner numbers never reach customers or field staff.</a:t>
-            </a:r>
-            <a:endParaRPr lang="en-US" sz="1200" dirty="0"/>
+              <a:t>by any broker or owner. The universe is closed down to the flat.</a:t>
+            </a:r>
+            <a:endParaRPr lang="en-US" sz="1250" dirty="0"/>
           </a:p>
           <a:p>
             <a:pPr marL="177800" indent="-177800">
               <a:spcAft>
-                <a:spcPts val="500"/>
+                <a:spcPts val="600"/>
               </a:spcAft>
               <a:buSzPct val="100000"/>
               <a:buChar char="•"/>
             </a:pPr>
             <a:r>
-              <a:rPr lang="en-US" sz="1200" b="1" dirty="0">
+              <a:rPr lang="en-US" sz="1250" b="1" dirty="0">
                 <a:solidFill>
                   <a:srgbClr val="15201F"/>
                 </a:solidFill>
@@ -5995,13 +6191,13 @@
                 <a:ea typeface="Calibri" pitchFamily="34" charset="-122"/>
                 <a:cs typeface="Calibri" pitchFamily="34" charset="-120"/>
               </a:rPr>
-              <a:t>Customer consent recorded </a:t>
+              <a:t>Owner names are never stored, </a:t>
             </a:r>
             <a:pPr indent="0" marL="0">
               <a:buNone/>
             </a:pPr>
             <a:r>
-              <a:rPr lang="en-US" sz="1200" dirty="0">
+              <a:rPr lang="en-US" sz="1250" dirty="0">
                 <a:solidFill>
                   <a:srgbClr val="5B6866"/>
                 </a:solidFill>
@@ -6009,20 +6205,20 @@
                 <a:ea typeface="Calibri" pitchFamily="34" charset="-122"/>
                 <a:cs typeface="Calibri" pitchFamily="34" charset="-120"/>
               </a:rPr>
-              <a:t>(OTP, link or verbal) — ready for India’s DPDP Act.</a:t>
-            </a:r>
-            <a:endParaRPr lang="en-US" sz="1200" dirty="0"/>
+              <a:t>even when the source file has them.</a:t>
+            </a:r>
+            <a:endParaRPr lang="en-US" sz="1250" dirty="0"/>
           </a:p>
           <a:p>
             <a:pPr marL="177800" indent="-177800">
               <a:spcAft>
-                <a:spcPts val="500"/>
+                <a:spcPts val="600"/>
               </a:spcAft>
               <a:buSzPct val="100000"/>
               <a:buChar char="•"/>
             </a:pPr>
             <a:r>
-              <a:rPr lang="en-US" sz="1200" b="1" dirty="0">
+              <a:rPr lang="en-US" sz="1250" b="1" dirty="0">
                 <a:solidFill>
                   <a:srgbClr val="15201F"/>
                 </a:solidFill>
@@ -6030,13 +6226,13 @@
                 <a:ea typeface="Calibri" pitchFamily="34" charset="-122"/>
                 <a:cs typeface="Calibri" pitchFamily="34" charset="-120"/>
               </a:rPr>
-              <a:t>Brokers verified </a:t>
+              <a:t>Built and ready: </a:t>
             </a:r>
             <a:pPr indent="0" marL="0">
               <a:buNone/>
             </a:pPr>
             <a:r>
-              <a:rPr lang="en-US" sz="1200" dirty="0">
+              <a:rPr lang="en-US" sz="1250" dirty="0">
                 <a:solidFill>
                   <a:srgbClr val="5B6866"/>
                 </a:solidFill>
@@ -6044,9 +6240,9 @@
                 <a:ea typeface="Calibri" pitchFamily="34" charset="-122"/>
                 <a:cs typeface="Calibri" pitchFamily="34" charset="-120"/>
               </a:rPr>
-              <a:t>by our team, with MahaRERA number check.</a:t>
-            </a:r>
-            <a:endParaRPr lang="en-US" sz="1200" dirty="0"/>
+              <a:t>upload page in the ops console; waiting on the TMC data request.</a:t>
+            </a:r>
+            <a:endParaRPr lang="en-US" sz="1250" dirty="0"/>
           </a:p>
         </p:txBody>
       </p:sp>
@@ -6064,7 +6260,7 @@
     <p:bg>
       <p:bgPr>
         <a:solidFill>
-          <a:srgbClr val="0E3B43"/>
+          <a:srgbClr val="F4F6F5"/>
         </a:solidFill>
       </p:bgPr>
     </p:bg>
@@ -6091,7 +6287,7 @@
         <p:spPr>
           <a:xfrm>
             <a:off x="457200" y="292608"/>
-            <a:ext cx="8229600" cy="685800"/>
+            <a:ext cx="6949440" cy="685800"/>
           </a:xfrm>
           <a:prstGeom prst="rect">
             <a:avLst/>
@@ -6109,13 +6305,13 @@
             <a:r>
               <a:rPr lang="en-US" sz="2500" b="1" dirty="0">
                 <a:solidFill>
-                  <a:srgbClr val="FFFFFF"/>
+                  <a:srgbClr val="15201F"/>
                 </a:solidFill>
                 <a:latin typeface="Cambria" pitchFamily="34" charset="0"/>
                 <a:ea typeface="Cambria" pitchFamily="34" charset="-122"/>
                 <a:cs typeface="Cambria" pitchFamily="34" charset="-120"/>
               </a:rPr>
-              <a:t>Why this is hard to copy</a:t>
+              <a:t>Next: one enquiry, every relevant broker</a:t>
             </a:r>
             <a:endParaRPr lang="en-US" sz="2500" dirty="0"/>
           </a:p>
@@ -6129,33 +6325,13 @@
         </p:nvSpPr>
         <p:spPr>
           <a:xfrm>
-            <a:off x="457200" y="1234440"/>
-            <a:ext cx="1554480" cy="3383280"/>
+            <a:off x="7635240" y="310896"/>
+            <a:ext cx="1051560" cy="310896"/>
           </a:xfrm>
           <a:prstGeom prst="roundRect">
             <a:avLst>
-              <a:gd name="adj" fmla="val 4706"/>
+              <a:gd name="adj" fmla="val 50000"/>
             </a:avLst>
-          </a:prstGeom>
-          <a:solidFill>
-            <a:srgbClr val="15505A"/>
-          </a:solidFill>
-          <a:ln/>
-        </p:spPr>
-      </p:sp>
-      <p:sp>
-        <p:nvSpPr>
-          <p:cNvPr id="4" name="Shape 2"/>
-          <p:cNvSpPr/>
-          <p:nvPr/>
-        </p:nvSpPr>
-        <p:spPr>
-          <a:xfrm>
-            <a:off x="960120" y="1463040"/>
-            <a:ext cx="548640" cy="548640"/>
-          </a:xfrm>
-          <a:prstGeom prst="ellipse">
-            <a:avLst/>
           </a:prstGeom>
           <a:solidFill>
             <a:srgbClr val="E8A33D"/>
@@ -6163,9 +6339,77 @@
           <a:ln/>
         </p:spPr>
       </p:sp>
+      <p:sp>
+        <p:nvSpPr>
+          <p:cNvPr id="4" name="Text 2"/>
+          <p:cNvSpPr txBox="1"/>
+          <p:nvPr/>
+        </p:nvSpPr>
+        <p:spPr>
+          <a:xfrm>
+            <a:off x="7635240" y="310896"/>
+            <a:ext cx="1051560" cy="310896"/>
+          </a:xfrm>
+          <a:prstGeom prst="rect">
+            <a:avLst/>
+          </a:prstGeom>
+          <a:noFill/>
+          <a:ln/>
+        </p:spPr>
+        <p:txBody>
+          <a:bodyPr wrap="square" lIns="0" tIns="0" rIns="0" bIns="0" rtlCol="0" anchor="ctr"/>
+          <a:lstStyle/>
+          <a:p>
+            <a:pPr algn="ctr" indent="0" marL="0">
+              <a:buNone/>
+            </a:pPr>
+            <a:r>
+              <a:rPr lang="en-US" sz="1100" b="1" spc="200" kern="0" dirty="0">
+                <a:solidFill>
+                  <a:srgbClr val="15201F"/>
+                </a:solidFill>
+                <a:latin typeface="Calibri" pitchFamily="34" charset="0"/>
+                <a:ea typeface="Calibri" pitchFamily="34" charset="-122"/>
+                <a:cs typeface="Calibri" pitchFamily="34" charset="-120"/>
+              </a:rPr>
+              <a:t>MOAT</a:t>
+            </a:r>
+            <a:endParaRPr lang="en-US" sz="1100" dirty="0"/>
+          </a:p>
+        </p:txBody>
+      </p:sp>
+      <p:sp>
+        <p:nvSpPr>
+          <p:cNvPr id="5" name="Shape 3"/>
+          <p:cNvSpPr/>
+          <p:nvPr/>
+        </p:nvSpPr>
+        <p:spPr>
+          <a:xfrm>
+            <a:off x="493776" y="1042416"/>
+            <a:ext cx="1824228" cy="3538728"/>
+          </a:xfrm>
+          <a:prstGeom prst="roundRect">
+            <a:avLst>
+              <a:gd name="adj" fmla="val 7018"/>
+            </a:avLst>
+          </a:prstGeom>
+          <a:solidFill>
+            <a:srgbClr val="15201F"/>
+          </a:solidFill>
+          <a:ln/>
+          <a:effectLst>
+            <a:outerShdw sx="100000" sy="100000" kx="0" ky="0" algn="bl" rotWithShape="0" blurRad="101600" dist="38100" dir="5400000">
+              <a:srgbClr val="000000">
+                <a:alpha val="25000"/>
+              </a:srgbClr>
+            </a:outerShdw>
+          </a:effectLst>
+        </p:spPr>
+      </p:sp>
       <p:pic>
         <p:nvPicPr>
-          <p:cNvPr id="5" name="Image 0" descr="preencoded.png">    </p:cNvPr>
+          <p:cNvPr id="6" name="Image 0" descr="/tmp/claude-0/-home-user-SocietyManagement/f8f5daac-a2c6-5a71-ae45-d4f3c625db39/scratchpad/deck/img/leads.jpg">    </p:cNvPr>
           <p:cNvPicPr>
             <a:picLocks noChangeAspect="1"/>
           </p:cNvPicPr>
@@ -6179,8 +6423,8 @@
         </p:blipFill>
         <p:spPr>
           <a:xfrm>
-            <a:off x="1091794" y="1594714"/>
-            <a:ext cx="285293" cy="285293"/>
+            <a:off x="548640" y="1097280"/>
+            <a:ext cx="1714500" cy="3429000"/>
           </a:xfrm>
           <a:prstGeom prst="rect">
             <a:avLst/>
@@ -6189,14 +6433,53 @@
       </p:pic>
       <p:sp>
         <p:nvSpPr>
-          <p:cNvPr id="6" name="Text 3"/>
-          <p:cNvSpPr txBox="1"/>
-          <p:nvPr/>
-        </p:nvSpPr>
-        <p:spPr>
-          <a:xfrm>
-            <a:off x="566928" y="2194560"/>
-            <a:ext cx="1335024" cy="685800"/>
+          <p:cNvPr id="7" name="Text 4"/>
+          <p:cNvSpPr txBox="1"/>
+          <p:nvPr/>
+        </p:nvSpPr>
+        <p:spPr>
+          <a:xfrm>
+            <a:off x="274320" y="4617720"/>
+            <a:ext cx="2263140" cy="274320"/>
+          </a:xfrm>
+          <a:prstGeom prst="rect">
+            <a:avLst/>
+          </a:prstGeom>
+          <a:noFill/>
+          <a:ln/>
+        </p:spPr>
+        <p:txBody>
+          <a:bodyPr wrap="square" lIns="0" tIns="0" rIns="0" bIns="0" rtlCol="0" anchor="ctr"/>
+          <a:lstStyle/>
+          <a:p>
+            <a:pPr algn="ctr" indent="0" marL="0">
+              <a:buNone/>
+            </a:pPr>
+            <a:r>
+              <a:rPr lang="en-US" sz="1050" dirty="0">
+                <a:solidFill>
+                  <a:srgbClr val="5B6866"/>
+                </a:solidFill>
+                <a:latin typeface="Calibri" pitchFamily="34" charset="0"/>
+                <a:ea typeface="Calibri" pitchFamily="34" charset="-122"/>
+                <a:cs typeface="Calibri" pitchFamily="34" charset="-120"/>
+              </a:rPr>
+              <a:t>Broker’s leads</a:t>
+            </a:r>
+            <a:endParaRPr lang="en-US" sz="1050" dirty="0"/>
+          </a:p>
+        </p:txBody>
+      </p:sp>
+      <p:sp>
+        <p:nvSpPr>
+          <p:cNvPr id="8" name="Text 5"/>
+          <p:cNvSpPr txBox="1"/>
+          <p:nvPr/>
+        </p:nvSpPr>
+        <p:spPr>
+          <a:xfrm>
+            <a:off x="2743200" y="1188720"/>
+            <a:ext cx="5943600" cy="3611880"/>
           </a:xfrm>
           <a:prstGeom prst="rect">
             <a:avLst/>
@@ -6208,636 +6491,179 @@
           <a:bodyPr wrap="square" lIns="0" tIns="0" rIns="0" bIns="0" rtlCol="0" anchor="t"/>
           <a:lstStyle/>
           <a:p>
-            <a:pPr algn="ctr" indent="0" marL="0">
-              <a:buNone/>
+            <a:pPr marL="177800" indent="-177800">
+              <a:spcAft>
+                <a:spcPts val="600"/>
+              </a:spcAft>
+              <a:buSzPct val="100000"/>
+              <a:buChar char="•"/>
             </a:pPr>
             <a:r>
               <a:rPr lang="en-US" sz="1300" b="1" dirty="0">
                 <a:solidFill>
-                  <a:srgbClr val="FFFFFF"/>
-                </a:solidFill>
-                <a:latin typeface="Calibri" pitchFamily="34" charset="0"/>
-                <a:ea typeface="Calibri" pitchFamily="34" charset="-122"/>
-                <a:cs typeface="Calibri" pitchFamily="34" charset="-120"/>
-              </a:rPr>
-              <a:t>Data that gets cleaner with use</a:t>
+                  <a:srgbClr val="15201F"/>
+                </a:solidFill>
+                <a:latin typeface="Calibri" pitchFamily="34" charset="0"/>
+                <a:ea typeface="Calibri" pitchFamily="34" charset="-122"/>
+                <a:cs typeface="Calibri" pitchFamily="34" charset="-120"/>
+              </a:rPr>
+              <a:t>One enquiry, every nearby broker: </a:t>
+            </a:r>
+            <a:pPr indent="0" marL="0">
+              <a:buNone/>
+            </a:pPr>
+            <a:r>
+              <a:rPr lang="en-US" sz="1300" dirty="0">
+                <a:solidFill>
+                  <a:srgbClr val="5B6866"/>
+                </a:solidFill>
+                <a:latin typeface="Calibri" pitchFamily="34" charset="0"/>
+                <a:ea typeface="Calibri" pitchFamily="34" charset="-122"/>
+                <a:cs typeface="Calibri" pitchFamily="34" charset="-120"/>
+              </a:rPr>
+              <a:t>the customer posts once; brokers who work in that area get it instantly.</a:t>
             </a:r>
             <a:endParaRPr lang="en-US" sz="1300" dirty="0"/>
           </a:p>
-        </p:txBody>
-      </p:sp>
-      <p:sp>
-        <p:nvSpPr>
-          <p:cNvPr id="7" name="Text 4"/>
-          <p:cNvSpPr txBox="1"/>
-          <p:nvPr/>
-        </p:nvSpPr>
-        <p:spPr>
-          <a:xfrm>
-            <a:off x="566928" y="2926080"/>
-            <a:ext cx="1335024" cy="1600200"/>
-          </a:xfrm>
-          <a:prstGeom prst="rect">
-            <a:avLst/>
-          </a:prstGeom>
-          <a:noFill/>
-          <a:ln/>
-        </p:spPr>
-        <p:txBody>
-          <a:bodyPr wrap="square" lIns="0" tIns="0" rIns="0" bIns="0" rtlCol="0" anchor="t"/>
-          <a:lstStyle/>
-          <a:p>
-            <a:pPr algn="ctr" indent="0" marL="0">
-              <a:buNone/>
-            </a:pPr>
-            <a:r>
-              <a:rPr lang="en-US" sz="1100" dirty="0">
-                <a:solidFill>
-                  <a:srgbClr val="DCEBE8"/>
-                </a:solidFill>
-                <a:latin typeface="Calibri" pitchFamily="34" charset="0"/>
-                <a:ea typeface="Calibri" pitchFamily="34" charset="-122"/>
-                <a:cs typeface="Calibri" pitchFamily="34" charset="-120"/>
-              </a:rPr>
-              <a:t>Closed universe of buildings, learned spellings and wing layouts — every upload improves it.</a:t>
-            </a:r>
-            <a:endParaRPr lang="en-US" sz="1100" dirty="0"/>
-          </a:p>
-        </p:txBody>
-      </p:sp>
-      <p:sp>
-        <p:nvSpPr>
-          <p:cNvPr id="8" name="Shape 5"/>
-          <p:cNvSpPr/>
-          <p:nvPr/>
-        </p:nvSpPr>
-        <p:spPr>
-          <a:xfrm>
-            <a:off x="2139696" y="1234440"/>
-            <a:ext cx="1554480" cy="3383280"/>
-          </a:xfrm>
-          <a:prstGeom prst="roundRect">
-            <a:avLst>
-              <a:gd name="adj" fmla="val 4706"/>
-            </a:avLst>
-          </a:prstGeom>
-          <a:solidFill>
-            <a:srgbClr val="15505A"/>
-          </a:solidFill>
-          <a:ln/>
-        </p:spPr>
-      </p:sp>
-      <p:sp>
-        <p:nvSpPr>
-          <p:cNvPr id="9" name="Shape 6"/>
-          <p:cNvSpPr/>
-          <p:nvPr/>
-        </p:nvSpPr>
-        <p:spPr>
-          <a:xfrm>
-            <a:off x="2642616" y="1463040"/>
-            <a:ext cx="548640" cy="548640"/>
-          </a:xfrm>
-          <a:prstGeom prst="ellipse">
-            <a:avLst/>
-          </a:prstGeom>
-          <a:solidFill>
-            <a:srgbClr val="E8A33D"/>
-          </a:solidFill>
-          <a:ln/>
-        </p:spPr>
-      </p:sp>
-      <p:pic>
-        <p:nvPicPr>
-          <p:cNvPr id="10" name="Image 1" descr="preencoded.png">    </p:cNvPr>
-          <p:cNvPicPr>
-            <a:picLocks noChangeAspect="1"/>
-          </p:cNvPicPr>
-          <p:nvPr/>
-        </p:nvPicPr>
-        <p:blipFill>
-          <a:blip r:embed="rId2"/>
-          <a:stretch>
-            <a:fillRect/>
-          </a:stretch>
-        </p:blipFill>
-        <p:spPr>
-          <a:xfrm>
-            <a:off x="2774290" y="1594714"/>
-            <a:ext cx="285293" cy="285293"/>
-          </a:xfrm>
-          <a:prstGeom prst="rect">
-            <a:avLst/>
-          </a:prstGeom>
-        </p:spPr>
-      </p:pic>
-      <p:sp>
-        <p:nvSpPr>
-          <p:cNvPr id="11" name="Text 7"/>
-          <p:cNvSpPr txBox="1"/>
-          <p:nvPr/>
-        </p:nvSpPr>
-        <p:spPr>
-          <a:xfrm>
-            <a:off x="2249424" y="2194560"/>
-            <a:ext cx="1335024" cy="685800"/>
-          </a:xfrm>
-          <a:prstGeom prst="rect">
-            <a:avLst/>
-          </a:prstGeom>
-          <a:noFill/>
-          <a:ln/>
-        </p:spPr>
-        <p:txBody>
-          <a:bodyPr wrap="square" lIns="0" tIns="0" rIns="0" bIns="0" rtlCol="0" anchor="t"/>
-          <a:lstStyle/>
-          <a:p>
-            <a:pPr algn="ctr" indent="0" marL="0">
-              <a:buNone/>
+          <a:p>
+            <a:pPr marL="177800" indent="-177800">
+              <a:spcAft>
+                <a:spcPts val="600"/>
+              </a:spcAft>
+              <a:buSzPct val="100000"/>
+              <a:buChar char="•"/>
             </a:pPr>
             <a:r>
               <a:rPr lang="en-US" sz="1300" b="1" dirty="0">
                 <a:solidFill>
-                  <a:srgbClr val="FFFFFF"/>
-                </a:solidFill>
-                <a:latin typeface="Calibri" pitchFamily="34" charset="0"/>
-                <a:ea typeface="Calibri" pitchFamily="34" charset="-122"/>
-                <a:cs typeface="Calibri" pitchFamily="34" charset="-120"/>
-              </a:rPr>
-              <a:t>Brokers’ two assets live here</a:t>
+                  <a:srgbClr val="15201F"/>
+                </a:solidFill>
+                <a:latin typeface="Calibri" pitchFamily="34" charset="0"/>
+                <a:ea typeface="Calibri" pitchFamily="34" charset="-122"/>
+                <a:cs typeface="Calibri" pitchFamily="34" charset="-120"/>
+              </a:rPr>
+              <a:t>Brokers see how many of THEIR flats match </a:t>
+            </a:r>
+            <a:pPr indent="0" marL="0">
+              <a:buNone/>
+            </a:pPr>
+            <a:r>
+              <a:rPr lang="en-US" sz="1300" dirty="0">
+                <a:solidFill>
+                  <a:srgbClr val="5B6866"/>
+                </a:solidFill>
+                <a:latin typeface="Calibri" pitchFamily="34" charset="0"/>
+                <a:ea typeface="Calibri" pitchFamily="34" charset="-122"/>
+                <a:cs typeface="Calibri" pitchFamily="34" charset="-120"/>
+              </a:rPr>
+              <a:t>before they respond — and reply with their terms and rating.</a:t>
             </a:r>
             <a:endParaRPr lang="en-US" sz="1300" dirty="0"/>
           </a:p>
-        </p:txBody>
-      </p:sp>
-      <p:sp>
-        <p:nvSpPr>
-          <p:cNvPr id="12" name="Text 8"/>
-          <p:cNvSpPr txBox="1"/>
-          <p:nvPr/>
-        </p:nvSpPr>
-        <p:spPr>
-          <a:xfrm>
-            <a:off x="2249424" y="2926080"/>
-            <a:ext cx="1335024" cy="1600200"/>
-          </a:xfrm>
-          <a:prstGeom prst="rect">
-            <a:avLst/>
-          </a:prstGeom>
-          <a:noFill/>
-          <a:ln/>
-        </p:spPr>
-        <p:txBody>
-          <a:bodyPr wrap="square" lIns="0" tIns="0" rIns="0" bIns="0" rtlCol="0" anchor="t"/>
-          <a:lstStyle/>
-          <a:p>
-            <a:pPr algn="ctr" indent="0" marL="0">
-              <a:buNone/>
-            </a:pPr>
-            <a:r>
-              <a:rPr lang="en-US" sz="1100" dirty="0">
-                <a:solidFill>
-                  <a:srgbClr val="DCEBE8"/>
-                </a:solidFill>
-                <a:latin typeface="Calibri" pitchFamily="34" charset="0"/>
-                <a:ea typeface="Calibri" pitchFamily="34" charset="-122"/>
-                <a:cs typeface="Calibri" pitchFamily="34" charset="-120"/>
-              </a:rPr>
-              <a:t>Flats and customers, with their full history — switching away means leaving the business behind.</a:t>
-            </a:r>
-            <a:endParaRPr lang="en-US" sz="1100" dirty="0"/>
-          </a:p>
-        </p:txBody>
-      </p:sp>
-      <p:sp>
-        <p:nvSpPr>
-          <p:cNvPr id="13" name="Shape 9"/>
-          <p:cNvSpPr/>
-          <p:nvPr/>
-        </p:nvSpPr>
-        <p:spPr>
-          <a:xfrm>
-            <a:off x="3822192" y="1234440"/>
-            <a:ext cx="1554480" cy="3383280"/>
-          </a:xfrm>
-          <a:prstGeom prst="roundRect">
-            <a:avLst>
-              <a:gd name="adj" fmla="val 4706"/>
-            </a:avLst>
-          </a:prstGeom>
-          <a:solidFill>
-            <a:srgbClr val="15505A"/>
-          </a:solidFill>
-          <a:ln/>
-        </p:spPr>
-      </p:sp>
-      <p:sp>
-        <p:nvSpPr>
-          <p:cNvPr id="14" name="Shape 10"/>
-          <p:cNvSpPr/>
-          <p:nvPr/>
-        </p:nvSpPr>
-        <p:spPr>
-          <a:xfrm>
-            <a:off x="4325112" y="1463040"/>
-            <a:ext cx="548640" cy="548640"/>
-          </a:xfrm>
-          <a:prstGeom prst="ellipse">
-            <a:avLst/>
-          </a:prstGeom>
-          <a:solidFill>
-            <a:srgbClr val="E8A33D"/>
-          </a:solidFill>
-          <a:ln/>
-        </p:spPr>
-      </p:sp>
-      <p:pic>
-        <p:nvPicPr>
-          <p:cNvPr id="15" name="Image 2" descr="preencoded.png">    </p:cNvPr>
-          <p:cNvPicPr>
-            <a:picLocks noChangeAspect="1"/>
-          </p:cNvPicPr>
-          <p:nvPr/>
-        </p:nvPicPr>
-        <p:blipFill>
-          <a:blip r:embed="rId3"/>
-          <a:stretch>
-            <a:fillRect/>
-          </a:stretch>
-        </p:blipFill>
-        <p:spPr>
-          <a:xfrm>
-            <a:off x="4456786" y="1594714"/>
-            <a:ext cx="285293" cy="285293"/>
-          </a:xfrm>
-          <a:prstGeom prst="rect">
-            <a:avLst/>
-          </a:prstGeom>
-        </p:spPr>
-      </p:pic>
-      <p:sp>
-        <p:nvSpPr>
-          <p:cNvPr id="16" name="Text 11"/>
-          <p:cNvSpPr txBox="1"/>
-          <p:nvPr/>
-        </p:nvSpPr>
-        <p:spPr>
-          <a:xfrm>
-            <a:off x="3931920" y="2194560"/>
-            <a:ext cx="1335024" cy="685800"/>
-          </a:xfrm>
-          <a:prstGeom prst="rect">
-            <a:avLst/>
-          </a:prstGeom>
-          <a:noFill/>
-          <a:ln/>
-        </p:spPr>
-        <p:txBody>
-          <a:bodyPr wrap="square" lIns="0" tIns="0" rIns="0" bIns="0" rtlCol="0" anchor="t"/>
-          <a:lstStyle/>
-          <a:p>
-            <a:pPr algn="ctr" indent="0" marL="0">
-              <a:buNone/>
+          <a:p>
+            <a:pPr marL="177800" indent="-177800">
+              <a:spcAft>
+                <a:spcPts val="600"/>
+              </a:spcAft>
+              <a:buSzPct val="100000"/>
+              <a:buChar char="•"/>
             </a:pPr>
             <a:r>
               <a:rPr lang="en-US" sz="1300" b="1" dirty="0">
                 <a:solidFill>
-                  <a:srgbClr val="FFFFFF"/>
-                </a:solidFill>
-                <a:latin typeface="Calibri" pitchFamily="34" charset="0"/>
-                <a:ea typeface="Calibri" pitchFamily="34" charset="-122"/>
-                <a:cs typeface="Calibri" pitchFamily="34" charset="-120"/>
-              </a:rPr>
-              <a:t>Owners trust the tick</a:t>
+                  <a:srgbClr val="15201F"/>
+                </a:solidFill>
+                <a:latin typeface="Calibri" pitchFamily="34" charset="0"/>
+                <a:ea typeface="Calibri" pitchFamily="34" charset="-122"/>
+                <a:cs typeface="Calibri" pitchFamily="34" charset="-120"/>
+              </a:rPr>
+              <a:t>Owners invite brokers </a:t>
+            </a:r>
+            <a:pPr indent="0" marL="0">
+              <a:buNone/>
+            </a:pPr>
+            <a:r>
+              <a:rPr lang="en-US" sz="1300" dirty="0">
+                <a:solidFill>
+                  <a:srgbClr val="5B6866"/>
+                </a:solidFill>
+                <a:latin typeface="Calibri" pitchFamily="34" charset="0"/>
+                <a:ea typeface="Calibri" pitchFamily="34" charset="-122"/>
+                <a:cs typeface="Calibri" pitchFamily="34" charset="-120"/>
+              </a:rPr>
+              <a:t>from a list of verified brokers near their flat, ranked by rating.</a:t>
             </a:r>
             <a:endParaRPr lang="en-US" sz="1300" dirty="0"/>
           </a:p>
-        </p:txBody>
-      </p:sp>
-      <p:sp>
-        <p:nvSpPr>
-          <p:cNvPr id="17" name="Text 12"/>
-          <p:cNvSpPr txBox="1"/>
-          <p:nvPr/>
-        </p:nvSpPr>
-        <p:spPr>
-          <a:xfrm>
-            <a:off x="3931920" y="2926080"/>
-            <a:ext cx="1335024" cy="1600200"/>
-          </a:xfrm>
-          <a:prstGeom prst="rect">
-            <a:avLst/>
-          </a:prstGeom>
-          <a:noFill/>
-          <a:ln/>
-        </p:spPr>
-        <p:txBody>
-          <a:bodyPr wrap="square" lIns="0" tIns="0" rIns="0" bIns="0" rtlCol="0" anchor="t"/>
-          <a:lstStyle/>
-          <a:p>
-            <a:pPr algn="ctr" indent="0" marL="0">
-              <a:buNone/>
-            </a:pPr>
-            <a:r>
-              <a:rPr lang="en-US" sz="1100" dirty="0">
-                <a:solidFill>
-                  <a:srgbClr val="DCEBE8"/>
-                </a:solidFill>
-                <a:latin typeface="Calibri" pitchFamily="34" charset="0"/>
-                <a:ea typeface="Calibri" pitchFamily="34" charset="-122"/>
-                <a:cs typeface="Calibri" pitchFamily="34" charset="-120"/>
-              </a:rPr>
-              <a:t>Owner control and reviews make owners send flats to brokers through us.</a:t>
-            </a:r>
-            <a:endParaRPr lang="en-US" sz="1100" dirty="0"/>
-          </a:p>
-        </p:txBody>
-      </p:sp>
-      <p:sp>
-        <p:nvSpPr>
-          <p:cNvPr id="18" name="Shape 13"/>
-          <p:cNvSpPr/>
-          <p:nvPr/>
-        </p:nvSpPr>
-        <p:spPr>
-          <a:xfrm>
-            <a:off x="5504688" y="1234440"/>
-            <a:ext cx="1554480" cy="3383280"/>
-          </a:xfrm>
-          <a:prstGeom prst="roundRect">
-            <a:avLst>
-              <a:gd name="adj" fmla="val 4706"/>
-            </a:avLst>
-          </a:prstGeom>
-          <a:solidFill>
-            <a:srgbClr val="15505A"/>
-          </a:solidFill>
-          <a:ln/>
-        </p:spPr>
-      </p:sp>
-      <p:sp>
-        <p:nvSpPr>
-          <p:cNvPr id="19" name="Shape 14"/>
-          <p:cNvSpPr/>
-          <p:nvPr/>
-        </p:nvSpPr>
-        <p:spPr>
-          <a:xfrm>
-            <a:off x="6007608" y="1463040"/>
-            <a:ext cx="548640" cy="548640"/>
-          </a:xfrm>
-          <a:prstGeom prst="ellipse">
-            <a:avLst/>
-          </a:prstGeom>
-          <a:solidFill>
-            <a:srgbClr val="E8A33D"/>
-          </a:solidFill>
-          <a:ln/>
-        </p:spPr>
-      </p:sp>
-      <p:pic>
-        <p:nvPicPr>
-          <p:cNvPr id="20" name="Image 3" descr="preencoded.png">    </p:cNvPr>
-          <p:cNvPicPr>
-            <a:picLocks noChangeAspect="1"/>
-          </p:cNvPicPr>
-          <p:nvPr/>
-        </p:nvPicPr>
-        <p:blipFill>
-          <a:blip r:embed="rId4"/>
-          <a:stretch>
-            <a:fillRect/>
-          </a:stretch>
-        </p:blipFill>
-        <p:spPr>
-          <a:xfrm>
-            <a:off x="6139282" y="1594714"/>
-            <a:ext cx="285293" cy="285293"/>
-          </a:xfrm>
-          <a:prstGeom prst="rect">
-            <a:avLst/>
-          </a:prstGeom>
-        </p:spPr>
-      </p:pic>
-      <p:sp>
-        <p:nvSpPr>
-          <p:cNvPr id="21" name="Text 15"/>
-          <p:cNvSpPr txBox="1"/>
-          <p:nvPr/>
-        </p:nvSpPr>
-        <p:spPr>
-          <a:xfrm>
-            <a:off x="5614416" y="2194560"/>
-            <a:ext cx="1335024" cy="685800"/>
-          </a:xfrm>
-          <a:prstGeom prst="rect">
-            <a:avLst/>
-          </a:prstGeom>
-          <a:noFill/>
-          <a:ln/>
-        </p:spPr>
-        <p:txBody>
-          <a:bodyPr wrap="square" lIns="0" tIns="0" rIns="0" bIns="0" rtlCol="0" anchor="t"/>
-          <a:lstStyle/>
-          <a:p>
-            <a:pPr algn="ctr" indent="0" marL="0">
-              <a:buNone/>
+          <a:p>
+            <a:pPr marL="177800" indent="-177800">
+              <a:spcAft>
+                <a:spcPts val="600"/>
+              </a:spcAft>
+              <a:buSzPct val="100000"/>
+              <a:buChar char="•"/>
             </a:pPr>
             <a:r>
               <a:rPr lang="en-US" sz="1300" b="1" dirty="0">
                 <a:solidFill>
-                  <a:srgbClr val="FFFFFF"/>
-                </a:solidFill>
-                <a:latin typeface="Calibri" pitchFamily="34" charset="0"/>
-                <a:ea typeface="Calibri" pitchFamily="34" charset="-122"/>
-                <a:cs typeface="Calibri" pitchFamily="34" charset="-120"/>
-              </a:rPr>
-              <a:t>Offline reach loop</a:t>
+                  <a:srgbClr val="15201F"/>
+                </a:solidFill>
+                <a:latin typeface="Calibri" pitchFamily="34" charset="0"/>
+                <a:ea typeface="Calibri" pitchFamily="34" charset="-122"/>
+                <a:cs typeface="Calibri" pitchFamily="34" charset="-120"/>
+              </a:rPr>
+              <a:t>Anonymous supply map: </a:t>
+            </a:r>
+            <a:pPr indent="0" marL="0">
+              <a:buNone/>
+            </a:pPr>
+            <a:r>
+              <a:rPr lang="en-US" sz="1300" dirty="0">
+                <a:solidFill>
+                  <a:srgbClr val="5B6866"/>
+                </a:solidFill>
+                <a:latin typeface="Calibri" pitchFamily="34" charset="0"/>
+                <a:ea typeface="Calibri" pitchFamily="34" charset="-122"/>
+                <a:cs typeface="Calibri" pitchFamily="34" charset="-120"/>
+              </a:rPr>
+              <a:t>customers see where flats are, never whose — small clusters are hidden.</a:t>
             </a:r>
             <a:endParaRPr lang="en-US" sz="1300" dirty="0"/>
           </a:p>
-        </p:txBody>
-      </p:sp>
-      <p:sp>
-        <p:nvSpPr>
-          <p:cNvPr id="22" name="Text 16"/>
-          <p:cNvSpPr txBox="1"/>
-          <p:nvPr/>
-        </p:nvSpPr>
-        <p:spPr>
-          <a:xfrm>
-            <a:off x="5614416" y="2926080"/>
-            <a:ext cx="1335024" cy="1600200"/>
-          </a:xfrm>
-          <a:prstGeom prst="rect">
-            <a:avLst/>
-          </a:prstGeom>
-          <a:noFill/>
-          <a:ln/>
-        </p:spPr>
-        <p:txBody>
-          <a:bodyPr wrap="square" lIns="0" tIns="0" rIns="0" bIns="0" rtlCol="0" anchor="t"/>
-          <a:lstStyle/>
-          <a:p>
-            <a:pPr algn="ctr" indent="0" marL="0">
-              <a:buNone/>
-            </a:pPr>
-            <a:r>
-              <a:rPr lang="en-US" sz="1100" dirty="0">
-                <a:solidFill>
-                  <a:srgbClr val="DCEBE8"/>
-                </a:solidFill>
-                <a:latin typeface="Calibri" pitchFamily="34" charset="0"/>
-                <a:ea typeface="Calibri" pitchFamily="34" charset="-122"/>
-                <a:cs typeface="Calibri" pitchFamily="34" charset="-120"/>
-              </a:rPr>
-              <a:t>Links and broadcasts pull walk-in customers onto the platform, broker by broker.</a:t>
-            </a:r>
-            <a:endParaRPr lang="en-US" sz="1100" dirty="0"/>
-          </a:p>
-        </p:txBody>
-      </p:sp>
-      <p:sp>
-        <p:nvSpPr>
-          <p:cNvPr id="23" name="Shape 17"/>
-          <p:cNvSpPr/>
-          <p:nvPr/>
-        </p:nvSpPr>
-        <p:spPr>
-          <a:xfrm>
-            <a:off x="7187184" y="1234440"/>
-            <a:ext cx="1554480" cy="3383280"/>
-          </a:xfrm>
-          <a:prstGeom prst="roundRect">
-            <a:avLst>
-              <a:gd name="adj" fmla="val 4706"/>
-            </a:avLst>
-          </a:prstGeom>
-          <a:solidFill>
-            <a:srgbClr val="15505A"/>
-          </a:solidFill>
-          <a:ln/>
-        </p:spPr>
-      </p:sp>
-      <p:sp>
-        <p:nvSpPr>
-          <p:cNvPr id="24" name="Shape 18"/>
-          <p:cNvSpPr/>
-          <p:nvPr/>
-        </p:nvSpPr>
-        <p:spPr>
-          <a:xfrm>
-            <a:off x="7690104" y="1463040"/>
-            <a:ext cx="548640" cy="548640"/>
-          </a:xfrm>
-          <a:prstGeom prst="ellipse">
-            <a:avLst/>
-          </a:prstGeom>
-          <a:solidFill>
-            <a:srgbClr val="E8A33D"/>
-          </a:solidFill>
-          <a:ln/>
-        </p:spPr>
-      </p:sp>
-      <p:pic>
-        <p:nvPicPr>
-          <p:cNvPr id="25" name="Image 4" descr="preencoded.png">    </p:cNvPr>
-          <p:cNvPicPr>
-            <a:picLocks noChangeAspect="1"/>
-          </p:cNvPicPr>
-          <p:nvPr/>
-        </p:nvPicPr>
-        <p:blipFill>
-          <a:blip r:embed="rId5"/>
-          <a:stretch>
-            <a:fillRect/>
-          </a:stretch>
-        </p:blipFill>
-        <p:spPr>
-          <a:xfrm>
-            <a:off x="7821778" y="1594714"/>
-            <a:ext cx="285293" cy="285293"/>
-          </a:xfrm>
-          <a:prstGeom prst="rect">
-            <a:avLst/>
-          </a:prstGeom>
-        </p:spPr>
-      </p:pic>
-      <p:sp>
-        <p:nvSpPr>
-          <p:cNvPr id="26" name="Text 19"/>
-          <p:cNvSpPr txBox="1"/>
-          <p:nvPr/>
-        </p:nvSpPr>
-        <p:spPr>
-          <a:xfrm>
-            <a:off x="7296912" y="2194560"/>
-            <a:ext cx="1335024" cy="685800"/>
-          </a:xfrm>
-          <a:prstGeom prst="rect">
-            <a:avLst/>
-          </a:prstGeom>
-          <a:noFill/>
-          <a:ln/>
-        </p:spPr>
-        <p:txBody>
-          <a:bodyPr wrap="square" lIns="0" tIns="0" rIns="0" bIns="0" rtlCol="0" anchor="t"/>
-          <a:lstStyle/>
-          <a:p>
-            <a:pPr algn="ctr" indent="0" marL="0">
-              <a:buNone/>
+          <a:p>
+            <a:pPr marL="177800" indent="-177800">
+              <a:spcAft>
+                <a:spcPts val="600"/>
+              </a:spcAft>
+              <a:buSzPct val="100000"/>
+              <a:buChar char="•"/>
             </a:pPr>
             <a:r>
               <a:rPr lang="en-US" sz="1300" b="1" dirty="0">
                 <a:solidFill>
-                  <a:srgbClr val="FFFFFF"/>
-                </a:solidFill>
-                <a:latin typeface="Calibri" pitchFamily="34" charset="0"/>
-                <a:ea typeface="Calibri" pitchFamily="34" charset="-122"/>
-                <a:cs typeface="Calibri" pitchFamily="34" charset="-120"/>
-              </a:rPr>
-              <a:t>Trust by design</a:t>
+                  <a:srgbClr val="15201F"/>
+                </a:solidFill>
+                <a:latin typeface="Calibri" pitchFamily="34" charset="0"/>
+                <a:ea typeface="Calibri" pitchFamily="34" charset="-122"/>
+                <a:cs typeface="Calibri" pitchFamily="34" charset="-120"/>
+              </a:rPr>
+              <a:t>Status: </a:t>
+            </a:r>
+            <a:pPr indent="0" marL="0">
+              <a:buNone/>
+            </a:pPr>
+            <a:r>
+              <a:rPr lang="en-US" sz="1300" dirty="0">
+                <a:solidFill>
+                  <a:srgbClr val="5B6866"/>
+                </a:solidFill>
+                <a:latin typeface="Calibri" pitchFamily="34" charset="0"/>
+                <a:ea typeface="Calibri" pitchFamily="34" charset="-122"/>
+                <a:cs typeface="Calibri" pitchFamily="34" charset="-120"/>
+              </a:rPr>
+              <a:t>built and tested in the backend; switched on after the pilot proves the broker app.</a:t>
             </a:r>
             <a:endParaRPr lang="en-US" sz="1300" dirty="0"/>
-          </a:p>
-        </p:txBody>
-      </p:sp>
-      <p:sp>
-        <p:nvSpPr>
-          <p:cNvPr id="27" name="Text 20"/>
-          <p:cNvSpPr txBox="1"/>
-          <p:nvPr/>
-        </p:nvSpPr>
-        <p:spPr>
-          <a:xfrm>
-            <a:off x="7296912" y="2926080"/>
-            <a:ext cx="1335024" cy="1600200"/>
-          </a:xfrm>
-          <a:prstGeom prst="rect">
-            <a:avLst/>
-          </a:prstGeom>
-          <a:noFill/>
-          <a:ln/>
-        </p:spPr>
-        <p:txBody>
-          <a:bodyPr wrap="square" lIns="0" tIns="0" rIns="0" bIns="0" rtlCol="0" anchor="t"/>
-          <a:lstStyle/>
-          <a:p>
-            <a:pPr algn="ctr" indent="0" marL="0">
-              <a:buNone/>
-            </a:pPr>
-            <a:r>
-              <a:rPr lang="en-US" sz="1100" dirty="0">
-                <a:solidFill>
-                  <a:srgbClr val="DCEBE8"/>
-                </a:solidFill>
-                <a:latin typeface="Calibri" pitchFamily="34" charset="0"/>
-                <a:ea typeface="Calibri" pitchFamily="34" charset="-122"/>
-                <a:cs typeface="Calibri" pitchFamily="34" charset="-120"/>
-              </a:rPr>
-              <a:t>Isolation, audit and consent built in from day one — slow and costly to retrofit.</a:t>
-            </a:r>
-            <a:endParaRPr lang="en-US" sz="1100" dirty="0"/>
           </a:p>
         </p:txBody>
       </p:sp>
@@ -6882,7 +6708,7 @@
         <p:spPr>
           <a:xfrm>
             <a:off x="457200" y="292608"/>
-            <a:ext cx="7772400" cy="685800"/>
+            <a:ext cx="6949440" cy="685800"/>
           </a:xfrm>
           <a:prstGeom prst="rect">
             <a:avLst/>
@@ -6906,7 +6732,7 @@
                 <a:ea typeface="Cambria" pitchFamily="34" charset="-122"/>
                 <a:cs typeface="Cambria" pitchFamily="34" charset="-120"/>
               </a:rPr>
-              <a:t>How we make money (to be tested in the pilot)</a:t>
+              <a:t>Trust by design: privacy, audit, compliance</a:t>
             </a:r>
             <a:endParaRPr lang="en-US" sz="2500" dirty="0"/>
           </a:p>
@@ -6920,48 +6746,62 @@
         </p:nvSpPr>
         <p:spPr>
           <a:xfrm>
-            <a:off x="457200" y="1234440"/>
-            <a:ext cx="2606040" cy="2651760"/>
+            <a:off x="7635240" y="310896"/>
+            <a:ext cx="1051560" cy="310896"/>
           </a:xfrm>
           <a:prstGeom prst="roundRect">
             <a:avLst>
-              <a:gd name="adj" fmla="val 2807"/>
+              <a:gd name="adj" fmla="val 50000"/>
             </a:avLst>
           </a:prstGeom>
           <a:solidFill>
-            <a:srgbClr val="FFFFFF"/>
+            <a:srgbClr val="E8A33D"/>
           </a:solidFill>
-          <a:ln w="9525">
-            <a:solidFill>
-              <a:srgbClr val="DCE2DF"/>
-            </a:solidFill>
-            <a:prstDash val="solid"/>
-          </a:ln>
-        </p:spPr>
-      </p:sp>
-      <p:sp>
-        <p:nvSpPr>
-          <p:cNvPr id="4" name="Shape 2"/>
-          <p:cNvSpPr/>
-          <p:nvPr/>
-        </p:nvSpPr>
-        <p:spPr>
-          <a:xfrm>
-            <a:off x="685800" y="1463040"/>
-            <a:ext cx="548640" cy="548640"/>
-          </a:xfrm>
-          <a:prstGeom prst="ellipse">
-            <a:avLst/>
-          </a:prstGeom>
-          <a:solidFill>
-            <a:srgbClr val="0E3B43"/>
-          </a:solidFill>
-          <a:ln/>
-        </p:spPr>
+          <a:ln/>
+        </p:spPr>
+      </p:sp>
+      <p:sp>
+        <p:nvSpPr>
+          <p:cNvPr id="4" name="Text 2"/>
+          <p:cNvSpPr txBox="1"/>
+          <p:nvPr/>
+        </p:nvSpPr>
+        <p:spPr>
+          <a:xfrm>
+            <a:off x="7635240" y="310896"/>
+            <a:ext cx="1051560" cy="310896"/>
+          </a:xfrm>
+          <a:prstGeom prst="rect">
+            <a:avLst/>
+          </a:prstGeom>
+          <a:noFill/>
+          <a:ln/>
+        </p:spPr>
+        <p:txBody>
+          <a:bodyPr wrap="square" lIns="0" tIns="0" rIns="0" bIns="0" rtlCol="0" anchor="ctr"/>
+          <a:lstStyle/>
+          <a:p>
+            <a:pPr algn="ctr" indent="0" marL="0">
+              <a:buNone/>
+            </a:pPr>
+            <a:r>
+              <a:rPr lang="en-US" sz="1100" b="1" spc="200" kern="0" dirty="0">
+                <a:solidFill>
+                  <a:srgbClr val="15201F"/>
+                </a:solidFill>
+                <a:latin typeface="Calibri" pitchFamily="34" charset="0"/>
+                <a:ea typeface="Calibri" pitchFamily="34" charset="-122"/>
+                <a:cs typeface="Calibri" pitchFamily="34" charset="-120"/>
+              </a:rPr>
+              <a:t>MOAT</a:t>
+            </a:r>
+            <a:endParaRPr lang="en-US" sz="1100" dirty="0"/>
+          </a:p>
+        </p:txBody>
       </p:sp>
       <p:pic>
         <p:nvPicPr>
-          <p:cNvPr id="5" name="Image 0" descr="preencoded.png">    </p:cNvPr>
+          <p:cNvPr id="5" name="Image 0" descr="/tmp/claude-0/-home-user-SocietyManagement/f8f5daac-a2c6-5a71-ae45-d4f3c625db39/scratchpad/deck/img/ops_brokers.jpg">    </p:cNvPr>
           <p:cNvPicPr>
             <a:picLocks noChangeAspect="1"/>
           </p:cNvPicPr>
@@ -6975,8 +6815,8 @@
         </p:blipFill>
         <p:spPr>
           <a:xfrm>
-            <a:off x="817474" y="1594714"/>
-            <a:ext cx="285293" cy="285293"/>
+            <a:off x="457200" y="1188720"/>
+            <a:ext cx="4023360" cy="1307592"/>
           </a:xfrm>
           <a:prstGeom prst="rect">
             <a:avLst/>
@@ -6985,132 +6825,29 @@
       </p:pic>
       <p:sp>
         <p:nvSpPr>
-          <p:cNvPr id="6" name="Text 3"/>
-          <p:cNvSpPr txBox="1"/>
-          <p:nvPr/>
-        </p:nvSpPr>
-        <p:spPr>
-          <a:xfrm>
-            <a:off x="685800" y="2148840"/>
-            <a:ext cx="2194560" cy="411480"/>
-          </a:xfrm>
-          <a:prstGeom prst="rect">
-            <a:avLst/>
-          </a:prstGeom>
-          <a:noFill/>
-          <a:ln/>
-        </p:spPr>
-        <p:txBody>
-          <a:bodyPr wrap="square" lIns="0" tIns="0" rIns="0" bIns="0" rtlCol="0" anchor="ctr"/>
-          <a:lstStyle/>
-          <a:p>
-            <a:pPr indent="0" marL="0">
-              <a:buNone/>
-            </a:pPr>
-            <a:r>
-              <a:rPr lang="en-US" sz="1500" b="1" dirty="0">
-                <a:solidFill>
-                  <a:srgbClr val="15201F"/>
-                </a:solidFill>
-                <a:latin typeface="Calibri" pitchFamily="34" charset="0"/>
-                <a:ea typeface="Calibri" pitchFamily="34" charset="-122"/>
-                <a:cs typeface="Calibri" pitchFamily="34" charset="-120"/>
-              </a:rPr>
-              <a:t>Broker subscription</a:t>
-            </a:r>
-            <a:endParaRPr lang="en-US" sz="1500" dirty="0"/>
-          </a:p>
-        </p:txBody>
-      </p:sp>
-      <p:sp>
-        <p:nvSpPr>
-          <p:cNvPr id="7" name="Text 4"/>
-          <p:cNvSpPr txBox="1"/>
-          <p:nvPr/>
-        </p:nvSpPr>
-        <p:spPr>
-          <a:xfrm>
-            <a:off x="685800" y="2606040"/>
-            <a:ext cx="2194560" cy="1188720"/>
-          </a:xfrm>
-          <a:prstGeom prst="rect">
-            <a:avLst/>
-          </a:prstGeom>
-          <a:noFill/>
-          <a:ln/>
-        </p:spPr>
-        <p:txBody>
-          <a:bodyPr wrap="square" lIns="0" tIns="0" rIns="0" bIns="0" rtlCol="0" anchor="t"/>
-          <a:lstStyle/>
-          <a:p>
-            <a:pPr indent="0" marL="0">
-              <a:buNone/>
-            </a:pPr>
-            <a:r>
-              <a:rPr lang="en-US" sz="1200" dirty="0">
-                <a:solidFill>
-                  <a:srgbClr val="5B6866"/>
-                </a:solidFill>
-                <a:latin typeface="Calibri" pitchFamily="34" charset="0"/>
-                <a:ea typeface="Calibri" pitchFamily="34" charset="-122"/>
-                <a:cs typeface="Calibri" pitchFamily="34" charset="-120"/>
-              </a:rPr>
-              <a:t>Monthly plan per firm, with seats for managers and field staff. The core revenue line.</a:t>
-            </a:r>
-            <a:endParaRPr lang="en-US" sz="1200" dirty="0"/>
-          </a:p>
-        </p:txBody>
-      </p:sp>
-      <p:sp>
-        <p:nvSpPr>
-          <p:cNvPr id="8" name="Shape 5"/>
+          <p:cNvPr id="6" name="Shape 3"/>
           <p:cNvSpPr/>
           <p:nvPr/>
         </p:nvSpPr>
         <p:spPr>
           <a:xfrm>
-            <a:off x="3246120" y="1234440"/>
-            <a:ext cx="2606040" cy="2651760"/>
-          </a:xfrm>
-          <a:prstGeom prst="roundRect">
-            <a:avLst>
-              <a:gd name="adj" fmla="val 2807"/>
-            </a:avLst>
-          </a:prstGeom>
-          <a:solidFill>
-            <a:srgbClr val="FFFFFF"/>
-          </a:solidFill>
+            <a:off x="457200" y="1188720"/>
+            <a:ext cx="4023360" cy="1307592"/>
+          </a:xfrm>
+          <a:prstGeom prst="rect">
+            <a:avLst/>
+          </a:prstGeom>
           <a:ln w="9525">
             <a:solidFill>
-              <a:srgbClr val="DCE2DF"/>
+              <a:srgbClr val="C9D2CF"/>
             </a:solidFill>
             <a:prstDash val="solid"/>
           </a:ln>
         </p:spPr>
       </p:sp>
-      <p:sp>
-        <p:nvSpPr>
-          <p:cNvPr id="9" name="Shape 6"/>
-          <p:cNvSpPr/>
-          <p:nvPr/>
-        </p:nvSpPr>
-        <p:spPr>
-          <a:xfrm>
-            <a:off x="3474720" y="1463040"/>
-            <a:ext cx="548640" cy="548640"/>
-          </a:xfrm>
-          <a:prstGeom prst="ellipse">
-            <a:avLst/>
-          </a:prstGeom>
-          <a:solidFill>
-            <a:srgbClr val="0E3B43"/>
-          </a:solidFill>
-          <a:ln/>
-        </p:spPr>
-      </p:sp>
       <p:pic>
         <p:nvPicPr>
-          <p:cNvPr id="10" name="Image 1" descr="preencoded.png">    </p:cNvPr>
+          <p:cNvPr id="7" name="Image 1" descr="/tmp/claude-0/-home-user-SocietyManagement/f8f5daac-a2c6-5a71-ae45-d4f3c625db39/scratchpad/deck/img/ops_audit.jpg">    </p:cNvPr>
           <p:cNvPicPr>
             <a:picLocks noChangeAspect="1"/>
           </p:cNvPicPr>
@@ -7124,8 +6861,8 @@
         </p:blipFill>
         <p:spPr>
           <a:xfrm>
-            <a:off x="3606394" y="1594714"/>
-            <a:ext cx="285293" cy="285293"/>
+            <a:off x="457200" y="2743200"/>
+            <a:ext cx="4023360" cy="1307592"/>
           </a:xfrm>
           <a:prstGeom prst="rect">
             <a:avLst/>
@@ -7134,104 +6871,21 @@
       </p:pic>
       <p:sp>
         <p:nvSpPr>
-          <p:cNvPr id="11" name="Text 7"/>
-          <p:cNvSpPr txBox="1"/>
-          <p:nvPr/>
-        </p:nvSpPr>
-        <p:spPr>
-          <a:xfrm>
-            <a:off x="3474720" y="2148840"/>
-            <a:ext cx="2194560" cy="411480"/>
-          </a:xfrm>
-          <a:prstGeom prst="rect">
-            <a:avLst/>
-          </a:prstGeom>
-          <a:noFill/>
-          <a:ln/>
-        </p:spPr>
-        <p:txBody>
-          <a:bodyPr wrap="square" lIns="0" tIns="0" rIns="0" bIns="0" rtlCol="0" anchor="ctr"/>
-          <a:lstStyle/>
-          <a:p>
-            <a:pPr indent="0" marL="0">
-              <a:buNone/>
-            </a:pPr>
-            <a:r>
-              <a:rPr lang="en-US" sz="1500" b="1" dirty="0">
-                <a:solidFill>
-                  <a:srgbClr val="15201F"/>
-                </a:solidFill>
-                <a:latin typeface="Calibri" pitchFamily="34" charset="0"/>
-                <a:ea typeface="Calibri" pitchFamily="34" charset="-122"/>
-                <a:cs typeface="Calibri" pitchFamily="34" charset="-120"/>
-              </a:rPr>
-              <a:t>Message credits</a:t>
-            </a:r>
-            <a:endParaRPr lang="en-US" sz="1500" dirty="0"/>
-          </a:p>
-        </p:txBody>
-      </p:sp>
-      <p:sp>
-        <p:nvSpPr>
-          <p:cNvPr id="12" name="Text 8"/>
-          <p:cNvSpPr txBox="1"/>
-          <p:nvPr/>
-        </p:nvSpPr>
-        <p:spPr>
-          <a:xfrm>
-            <a:off x="3474720" y="2606040"/>
-            <a:ext cx="2194560" cy="1188720"/>
-          </a:xfrm>
-          <a:prstGeom prst="rect">
-            <a:avLst/>
-          </a:prstGeom>
-          <a:noFill/>
-          <a:ln/>
-        </p:spPr>
-        <p:txBody>
-          <a:bodyPr wrap="square" lIns="0" tIns="0" rIns="0" bIns="0" rtlCol="0" anchor="t"/>
-          <a:lstStyle/>
-          <a:p>
-            <a:pPr indent="0" marL="0">
-              <a:buNone/>
-            </a:pPr>
-            <a:r>
-              <a:rPr lang="en-US" sz="1200" dirty="0">
-                <a:solidFill>
-                  <a:srgbClr val="5B6866"/>
-                </a:solidFill>
-                <a:latin typeface="Calibri" pitchFamily="34" charset="0"/>
-                <a:ea typeface="Calibri" pitchFamily="34" charset="-122"/>
-                <a:cs typeface="Calibri" pitchFamily="34" charset="-120"/>
-              </a:rPr>
-              <a:t>Plans include a number of broadcasts and WhatsApp messages; brokers top up. Free in the pilot.</a:t>
-            </a:r>
-            <a:endParaRPr lang="en-US" sz="1200" dirty="0"/>
-          </a:p>
-        </p:txBody>
-      </p:sp>
-      <p:sp>
-        <p:nvSpPr>
-          <p:cNvPr id="13" name="Shape 9"/>
+          <p:cNvPr id="8" name="Shape 4"/>
           <p:cNvSpPr/>
           <p:nvPr/>
         </p:nvSpPr>
         <p:spPr>
           <a:xfrm>
-            <a:off x="6035040" y="1234440"/>
-            <a:ext cx="2606040" cy="2651760"/>
-          </a:xfrm>
-          <a:prstGeom prst="roundRect">
-            <a:avLst>
-              <a:gd name="adj" fmla="val 2807"/>
-            </a:avLst>
-          </a:prstGeom>
-          <a:solidFill>
-            <a:srgbClr val="FFFFFF"/>
-          </a:solidFill>
+            <a:off x="457200" y="2743200"/>
+            <a:ext cx="4023360" cy="1307592"/>
+          </a:xfrm>
+          <a:prstGeom prst="rect">
+            <a:avLst/>
+          </a:prstGeom>
           <a:ln w="9525">
             <a:solidFill>
-              <a:srgbClr val="DCE2DF"/>
+              <a:srgbClr val="C9D2CF"/>
             </a:solidFill>
             <a:prstDash val="solid"/>
           </a:ln>
@@ -7239,58 +6893,14 @@
       </p:sp>
       <p:sp>
         <p:nvSpPr>
-          <p:cNvPr id="14" name="Shape 10"/>
-          <p:cNvSpPr/>
-          <p:nvPr/>
-        </p:nvSpPr>
-        <p:spPr>
-          <a:xfrm>
-            <a:off x="6263640" y="1463040"/>
-            <a:ext cx="548640" cy="548640"/>
-          </a:xfrm>
-          <a:prstGeom prst="ellipse">
-            <a:avLst/>
-          </a:prstGeom>
-          <a:solidFill>
-            <a:srgbClr val="0E3B43"/>
-          </a:solidFill>
-          <a:ln/>
-        </p:spPr>
-      </p:sp>
-      <p:pic>
-        <p:nvPicPr>
-          <p:cNvPr id="15" name="Image 2" descr="preencoded.png">    </p:cNvPr>
-          <p:cNvPicPr>
-            <a:picLocks noChangeAspect="1"/>
-          </p:cNvPicPr>
-          <p:nvPr/>
-        </p:nvPicPr>
-        <p:blipFill>
-          <a:blip r:embed="rId3"/>
-          <a:stretch>
-            <a:fillRect/>
-          </a:stretch>
-        </p:blipFill>
-        <p:spPr>
-          <a:xfrm>
-            <a:off x="6395314" y="1594714"/>
-            <a:ext cx="285293" cy="285293"/>
-          </a:xfrm>
-          <a:prstGeom prst="rect">
-            <a:avLst/>
-          </a:prstGeom>
-        </p:spPr>
-      </p:pic>
-      <p:sp>
-        <p:nvSpPr>
-          <p:cNvPr id="16" name="Text 11"/>
-          <p:cNvSpPr txBox="1"/>
-          <p:nvPr/>
-        </p:nvSpPr>
-        <p:spPr>
-          <a:xfrm>
-            <a:off x="6263640" y="2148840"/>
-            <a:ext cx="2194560" cy="411480"/>
+          <p:cNvPr id="9" name="Text 5"/>
+          <p:cNvSpPr txBox="1"/>
+          <p:nvPr/>
+        </p:nvSpPr>
+        <p:spPr>
+          <a:xfrm>
+            <a:off x="457200" y="4114800"/>
+            <a:ext cx="4023360" cy="274320"/>
           </a:xfrm>
           <a:prstGeom prst="rect">
             <a:avLst/>
@@ -7306,7 +6916,50 @@
               <a:buNone/>
             </a:pPr>
             <a:r>
-              <a:rPr lang="en-US" sz="1500" b="1" dirty="0">
+              <a:rPr lang="en-US" sz="1050" dirty="0">
+                <a:solidFill>
+                  <a:srgbClr val="5B6866"/>
+                </a:solidFill>
+                <a:latin typeface="Calibri" pitchFamily="34" charset="0"/>
+                <a:ea typeface="Calibri" pitchFamily="34" charset="-122"/>
+                <a:cs typeface="Calibri" pitchFamily="34" charset="-120"/>
+              </a:rPr>
+              <a:t>Ops console: broker verification (RERA) and tamper check</a:t>
+            </a:r>
+            <a:endParaRPr lang="en-US" sz="1050" dirty="0"/>
+          </a:p>
+        </p:txBody>
+      </p:sp>
+      <p:sp>
+        <p:nvSpPr>
+          <p:cNvPr id="10" name="Text 6"/>
+          <p:cNvSpPr txBox="1"/>
+          <p:nvPr/>
+        </p:nvSpPr>
+        <p:spPr>
+          <a:xfrm>
+            <a:off x="4754880" y="1188720"/>
+            <a:ext cx="3931920" cy="3611880"/>
+          </a:xfrm>
+          <a:prstGeom prst="rect">
+            <a:avLst/>
+          </a:prstGeom>
+          <a:noFill/>
+          <a:ln/>
+        </p:spPr>
+        <p:txBody>
+          <a:bodyPr wrap="square" lIns="0" tIns="0" rIns="0" bIns="0" rtlCol="0" anchor="t"/>
+          <a:lstStyle/>
+          <a:p>
+            <a:pPr marL="177800" indent="-177800">
+              <a:spcAft>
+                <a:spcPts val="500"/>
+              </a:spcAft>
+              <a:buSzPct val="100000"/>
+              <a:buChar char="•"/>
+            </a:pPr>
+            <a:r>
+              <a:rPr lang="en-US" sz="1200" b="1" dirty="0">
                 <a:solidFill>
                   <a:srgbClr val="15201F"/>
                 </a:solidFill>
@@ -7314,33 +6967,8 @@
                 <a:ea typeface="Calibri" pitchFamily="34" charset="-122"/>
                 <a:cs typeface="Calibri" pitchFamily="34" charset="-120"/>
               </a:rPr>
-              <a:t>Marketplace leads</a:t>
-            </a:r>
-            <a:endParaRPr lang="en-US" sz="1500" dirty="0"/>
-          </a:p>
-        </p:txBody>
-      </p:sp>
-      <p:sp>
-        <p:nvSpPr>
-          <p:cNvPr id="17" name="Text 12"/>
-          <p:cNvSpPr txBox="1"/>
-          <p:nvPr/>
-        </p:nvSpPr>
-        <p:spPr>
-          <a:xfrm>
-            <a:off x="6263640" y="2606040"/>
-            <a:ext cx="2194560" cy="1188720"/>
-          </a:xfrm>
-          <a:prstGeom prst="rect">
-            <a:avLst/>
-          </a:prstGeom>
-          <a:noFill/>
-          <a:ln/>
-        </p:spPr>
-        <p:txBody>
-          <a:bodyPr wrap="square" lIns="0" tIns="0" rIns="0" bIns="0" rtlCol="0" anchor="t"/>
-          <a:lstStyle/>
-          <a:p>
+              <a:t>Each broker’s data is walled off by the database itself </a:t>
+            </a:r>
             <a:pPr indent="0" marL="0">
               <a:buNone/>
             </a:pPr>
@@ -7353,70 +6981,149 @@
                 <a:ea typeface="Calibri" pitchFamily="34" charset="-122"/>
                 <a:cs typeface="Calibri" pitchFamily="34" charset="-120"/>
               </a:rPr>
-              <a:t>After the pilot: credits to respond to customer enquiries and owner invitations.</a:t>
+              <a:t>— checked by automated tests on every change.</a:t>
             </a:r>
             <a:endParaRPr lang="en-US" sz="1200" dirty="0"/>
           </a:p>
-        </p:txBody>
-      </p:sp>
-      <p:sp>
-        <p:nvSpPr>
-          <p:cNvPr id="18" name="Shape 13"/>
-          <p:cNvSpPr/>
-          <p:nvPr/>
-        </p:nvSpPr>
-        <p:spPr>
-          <a:xfrm>
-            <a:off x="457200" y="4114800"/>
-            <a:ext cx="8229600" cy="594360"/>
-          </a:xfrm>
-          <a:prstGeom prst="roundRect">
-            <a:avLst>
-              <a:gd name="adj" fmla="val 12308"/>
-            </a:avLst>
-          </a:prstGeom>
-          <a:solidFill>
-            <a:srgbClr val="DCEBE8"/>
-          </a:solidFill>
-          <a:ln/>
-        </p:spPr>
-      </p:sp>
-      <p:sp>
-        <p:nvSpPr>
-          <p:cNvPr id="19" name="Text 14"/>
-          <p:cNvSpPr txBox="1"/>
-          <p:nvPr/>
-        </p:nvSpPr>
-        <p:spPr>
-          <a:xfrm>
-            <a:off x="640080" y="4114800"/>
-            <a:ext cx="7863840" cy="594360"/>
-          </a:xfrm>
-          <a:prstGeom prst="rect">
-            <a:avLst/>
-          </a:prstGeom>
-          <a:noFill/>
-          <a:ln/>
-        </p:spPr>
-        <p:txBody>
-          <a:bodyPr wrap="square" lIns="0" tIns="0" rIns="0" bIns="0" rtlCol="0" anchor="ctr"/>
-          <a:lstStyle/>
-          <a:p>
+          <a:p>
+            <a:pPr marL="177800" indent="-177800">
+              <a:spcAft>
+                <a:spcPts val="500"/>
+              </a:spcAft>
+              <a:buSzPct val="100000"/>
+              <a:buChar char="•"/>
+            </a:pPr>
+            <a:r>
+              <a:rPr lang="en-US" sz="1200" b="1" dirty="0">
+                <a:solidFill>
+                  <a:srgbClr val="15201F"/>
+                </a:solidFill>
+                <a:latin typeface="Calibri" pitchFamily="34" charset="0"/>
+                <a:ea typeface="Calibri" pitchFamily="34" charset="-122"/>
+                <a:cs typeface="Calibri" pitchFamily="34" charset="-120"/>
+              </a:rPr>
+              <a:t>Tamper-evident audit trail </a:t>
+            </a:r>
             <a:pPr indent="0" marL="0">
               <a:buNone/>
             </a:pPr>
             <a:r>
-              <a:rPr lang="en-US" sz="1250" dirty="0">
-                <a:solidFill>
-                  <a:srgbClr val="0E3B43"/>
-                </a:solidFill>
-                <a:latin typeface="Calibri" pitchFamily="34" charset="0"/>
-                <a:ea typeface="Calibri" pitchFamily="34" charset="-122"/>
-                <a:cs typeface="Calibri" pitchFamily="34" charset="-120"/>
-              </a:rPr>
-              <a:t>Pilot: free for Thane West brokers. We measure time saved per flat, stale-listing rate, visits per customer — and what brokers would pay.</a:t>
-            </a:r>
-            <a:endParaRPr lang="en-US" sz="1250" dirty="0"/>
+              <a:rPr lang="en-US" sz="1200" dirty="0">
+                <a:solidFill>
+                  <a:srgbClr val="5B6866"/>
+                </a:solidFill>
+                <a:latin typeface="Calibri" pitchFamily="34" charset="0"/>
+                <a:ea typeface="Calibri" pitchFamily="34" charset="-122"/>
+                <a:cs typeface="Calibri" pitchFamily="34" charset="-120"/>
+              </a:rPr>
+              <a:t>and flat-status history: any altered record is detected.</a:t>
+            </a:r>
+            <a:endParaRPr lang="en-US" sz="1200" dirty="0"/>
+          </a:p>
+          <a:p>
+            <a:pPr marL="177800" indent="-177800">
+              <a:spcAft>
+                <a:spcPts val="500"/>
+              </a:spcAft>
+              <a:buSzPct val="100000"/>
+              <a:buChar char="•"/>
+            </a:pPr>
+            <a:r>
+              <a:rPr lang="en-US" sz="1200" b="1" dirty="0">
+                <a:solidFill>
+                  <a:srgbClr val="15201F"/>
+                </a:solidFill>
+                <a:latin typeface="Calibri" pitchFamily="34" charset="0"/>
+                <a:ea typeface="Calibri" pitchFamily="34" charset="-122"/>
+                <a:cs typeface="Calibri" pitchFamily="34" charset="-120"/>
+              </a:rPr>
+              <a:t>Phone numbers encrypted; </a:t>
+            </a:r>
+            <a:pPr indent="0" marL="0">
+              <a:buNone/>
+            </a:pPr>
+            <a:r>
+              <a:rPr lang="en-US" sz="1200" dirty="0">
+                <a:solidFill>
+                  <a:srgbClr val="5B6866"/>
+                </a:solidFill>
+                <a:latin typeface="Calibri" pitchFamily="34" charset="0"/>
+                <a:ea typeface="Calibri" pitchFamily="34" charset="-122"/>
+                <a:cs typeface="Calibri" pitchFamily="34" charset="-120"/>
+              </a:rPr>
+              <a:t>owner numbers never reach customers or field staff.</a:t>
+            </a:r>
+            <a:endParaRPr lang="en-US" sz="1200" dirty="0"/>
+          </a:p>
+          <a:p>
+            <a:pPr marL="177800" indent="-177800">
+              <a:spcAft>
+                <a:spcPts val="500"/>
+              </a:spcAft>
+              <a:buSzPct val="100000"/>
+              <a:buChar char="•"/>
+            </a:pPr>
+            <a:r>
+              <a:rPr lang="en-US" sz="1200" b="1" dirty="0">
+                <a:solidFill>
+                  <a:srgbClr val="15201F"/>
+                </a:solidFill>
+                <a:latin typeface="Calibri" pitchFamily="34" charset="0"/>
+                <a:ea typeface="Calibri" pitchFamily="34" charset="-122"/>
+                <a:cs typeface="Calibri" pitchFamily="34" charset="-120"/>
+              </a:rPr>
+              <a:t>Customer consent recorded </a:t>
+            </a:r>
+            <a:pPr indent="0" marL="0">
+              <a:buNone/>
+            </a:pPr>
+            <a:r>
+              <a:rPr lang="en-US" sz="1200" dirty="0">
+                <a:solidFill>
+                  <a:srgbClr val="5B6866"/>
+                </a:solidFill>
+                <a:latin typeface="Calibri" pitchFamily="34" charset="0"/>
+                <a:ea typeface="Calibri" pitchFamily="34" charset="-122"/>
+                <a:cs typeface="Calibri" pitchFamily="34" charset="-120"/>
+              </a:rPr>
+              <a:t>(OTP, link or verbal) — ready for India’s DPDP Act.</a:t>
+            </a:r>
+            <a:endParaRPr lang="en-US" sz="1200" dirty="0"/>
+          </a:p>
+          <a:p>
+            <a:pPr marL="177800" indent="-177800">
+              <a:spcAft>
+                <a:spcPts val="500"/>
+              </a:spcAft>
+              <a:buSzPct val="100000"/>
+              <a:buChar char="•"/>
+            </a:pPr>
+            <a:r>
+              <a:rPr lang="en-US" sz="1200" b="1" dirty="0">
+                <a:solidFill>
+                  <a:srgbClr val="15201F"/>
+                </a:solidFill>
+                <a:latin typeface="Calibri" pitchFamily="34" charset="0"/>
+                <a:ea typeface="Calibri" pitchFamily="34" charset="-122"/>
+                <a:cs typeface="Calibri" pitchFamily="34" charset="-120"/>
+              </a:rPr>
+              <a:t>Brokers verified </a:t>
+            </a:r>
+            <a:pPr indent="0" marL="0">
+              <a:buNone/>
+            </a:pPr>
+            <a:r>
+              <a:rPr lang="en-US" sz="1200" dirty="0">
+                <a:solidFill>
+                  <a:srgbClr val="5B6866"/>
+                </a:solidFill>
+                <a:latin typeface="Calibri" pitchFamily="34" charset="0"/>
+                <a:ea typeface="Calibri" pitchFamily="34" charset="-122"/>
+                <a:cs typeface="Calibri" pitchFamily="34" charset="-120"/>
+              </a:rPr>
+              <a:t>by our team, with MahaRERA number check.</a:t>
+            </a:r>
+            <a:endParaRPr lang="en-US" sz="1200" dirty="0"/>
           </a:p>
         </p:txBody>
       </p:sp>
@@ -7434,7 +7141,7 @@
     <p:bg>
       <p:bgPr>
         <a:solidFill>
-          <a:srgbClr val="F4F6F5"/>
+          <a:srgbClr val="0E3B43"/>
         </a:solidFill>
       </p:bgPr>
     </p:bg>
@@ -7479,13 +7186,13 @@
             <a:r>
               <a:rPr lang="en-US" sz="2500" b="1" dirty="0">
                 <a:solidFill>
-                  <a:srgbClr val="15201F"/>
+                  <a:srgbClr val="FFFFFF"/>
                 </a:solidFill>
                 <a:latin typeface="Cambria" pitchFamily="34" charset="0"/>
                 <a:ea typeface="Cambria" pitchFamily="34" charset="-122"/>
                 <a:cs typeface="Cambria" pitchFamily="34" charset="-120"/>
               </a:rPr>
-              <a:t>Where we are today</a:t>
+              <a:t>Why this is hard to copy</a:t>
             </a:r>
             <a:endParaRPr lang="en-US" sz="2500" dirty="0"/>
           </a:p>
@@ -7493,452 +7200,36 @@
       </p:sp>
       <p:sp>
         <p:nvSpPr>
-          <p:cNvPr id="3" name="Text 1"/>
-          <p:cNvSpPr txBox="1"/>
-          <p:nvPr/>
-        </p:nvSpPr>
-        <p:spPr>
-          <a:xfrm>
-            <a:off x="457200" y="1143000"/>
-            <a:ext cx="1920240" cy="777240"/>
-          </a:xfrm>
-          <a:prstGeom prst="rect">
-            <a:avLst/>
-          </a:prstGeom>
-          <a:noFill/>
-          <a:ln/>
-        </p:spPr>
-        <p:txBody>
-          <a:bodyPr wrap="square" lIns="0" tIns="0" rIns="0" bIns="0" rtlCol="0" anchor="ctr"/>
-          <a:lstStyle/>
-          <a:p>
-            <a:pPr indent="0" marL="0">
-              <a:buNone/>
-            </a:pPr>
-            <a:r>
-              <a:rPr lang="en-US" sz="4000" b="1" dirty="0">
-                <a:solidFill>
-                  <a:srgbClr val="0E3B43"/>
-                </a:solidFill>
-                <a:latin typeface="Cambria" pitchFamily="34" charset="0"/>
-                <a:ea typeface="Cambria" pitchFamily="34" charset="-122"/>
-                <a:cs typeface="Cambria" pitchFamily="34" charset="-120"/>
-              </a:rPr>
-              <a:t>190+</a:t>
-            </a:r>
-            <a:endParaRPr lang="en-US" sz="4000" dirty="0"/>
-          </a:p>
-        </p:txBody>
-      </p:sp>
-      <p:sp>
-        <p:nvSpPr>
-          <p:cNvPr id="4" name="Text 2"/>
-          <p:cNvSpPr txBox="1"/>
-          <p:nvPr/>
-        </p:nvSpPr>
-        <p:spPr>
-          <a:xfrm>
-            <a:off x="457200" y="1920240"/>
-            <a:ext cx="1920240" cy="502920"/>
-          </a:xfrm>
-          <a:prstGeom prst="rect">
-            <a:avLst/>
-          </a:prstGeom>
-          <a:noFill/>
-          <a:ln/>
-        </p:spPr>
-        <p:txBody>
-          <a:bodyPr wrap="square" lIns="0" tIns="0" rIns="0" bIns="0" rtlCol="0" anchor="t"/>
-          <a:lstStyle/>
-          <a:p>
-            <a:pPr indent="0" marL="0">
-              <a:buNone/>
-            </a:pPr>
-            <a:r>
-              <a:rPr lang="en-US" sz="1200" dirty="0">
-                <a:solidFill>
-                  <a:srgbClr val="5B6866"/>
-                </a:solidFill>
-                <a:latin typeface="Calibri" pitchFamily="34" charset="0"/>
-                <a:ea typeface="Calibri" pitchFamily="34" charset="-122"/>
-                <a:cs typeface="Calibri" pitchFamily="34" charset="-120"/>
-              </a:rPr>
-              <a:t>automated server tests, all passing</a:t>
-            </a:r>
-            <a:endParaRPr lang="en-US" sz="1200" dirty="0"/>
-          </a:p>
-        </p:txBody>
-      </p:sp>
-      <p:sp>
-        <p:nvSpPr>
-          <p:cNvPr id="5" name="Text 3"/>
-          <p:cNvSpPr txBox="1"/>
-          <p:nvPr/>
-        </p:nvSpPr>
-        <p:spPr>
-          <a:xfrm>
-            <a:off x="2560320" y="1143000"/>
-            <a:ext cx="1920240" cy="777240"/>
-          </a:xfrm>
-          <a:prstGeom prst="rect">
-            <a:avLst/>
-          </a:prstGeom>
-          <a:noFill/>
-          <a:ln/>
-        </p:spPr>
-        <p:txBody>
-          <a:bodyPr wrap="square" lIns="0" tIns="0" rIns="0" bIns="0" rtlCol="0" anchor="ctr"/>
-          <a:lstStyle/>
-          <a:p>
-            <a:pPr indent="0" marL="0">
-              <a:buNone/>
-            </a:pPr>
-            <a:r>
-              <a:rPr lang="en-US" sz="4000" b="1" dirty="0">
-                <a:solidFill>
-                  <a:srgbClr val="0E3B43"/>
-                </a:solidFill>
-                <a:latin typeface="Cambria" pitchFamily="34" charset="0"/>
-                <a:ea typeface="Cambria" pitchFamily="34" charset="-122"/>
-                <a:cs typeface="Cambria" pitchFamily="34" charset="-120"/>
-              </a:rPr>
-              <a:t>4</a:t>
-            </a:r>
-            <a:endParaRPr lang="en-US" sz="4000" dirty="0"/>
-          </a:p>
-        </p:txBody>
-      </p:sp>
-      <p:sp>
-        <p:nvSpPr>
-          <p:cNvPr id="6" name="Text 4"/>
-          <p:cNvSpPr txBox="1"/>
-          <p:nvPr/>
-        </p:nvSpPr>
-        <p:spPr>
-          <a:xfrm>
-            <a:off x="2560320" y="1920240"/>
-            <a:ext cx="1920240" cy="502920"/>
-          </a:xfrm>
-          <a:prstGeom prst="rect">
-            <a:avLst/>
-          </a:prstGeom>
-          <a:noFill/>
-          <a:ln/>
-        </p:spPr>
-        <p:txBody>
-          <a:bodyPr wrap="square" lIns="0" tIns="0" rIns="0" bIns="0" rtlCol="0" anchor="t"/>
-          <a:lstStyle/>
-          <a:p>
-            <a:pPr indent="0" marL="0">
-              <a:buNone/>
-            </a:pPr>
-            <a:r>
-              <a:rPr lang="en-US" sz="1200" dirty="0">
-                <a:solidFill>
-                  <a:srgbClr val="5B6866"/>
-                </a:solidFill>
-                <a:latin typeface="Calibri" pitchFamily="34" charset="0"/>
-                <a:ea typeface="Calibri" pitchFamily="34" charset="-122"/>
-                <a:cs typeface="Calibri" pitchFamily="34" charset="-120"/>
-              </a:rPr>
-              <a:t>app modes: broker, field staff, owner, customer</a:t>
-            </a:r>
-            <a:endParaRPr lang="en-US" sz="1200" dirty="0"/>
-          </a:p>
-        </p:txBody>
-      </p:sp>
-      <p:sp>
-        <p:nvSpPr>
-          <p:cNvPr id="7" name="Text 5"/>
-          <p:cNvSpPr txBox="1"/>
-          <p:nvPr/>
-        </p:nvSpPr>
-        <p:spPr>
-          <a:xfrm>
-            <a:off x="4663440" y="1143000"/>
-            <a:ext cx="1920240" cy="777240"/>
-          </a:xfrm>
-          <a:prstGeom prst="rect">
-            <a:avLst/>
-          </a:prstGeom>
-          <a:noFill/>
-          <a:ln/>
-        </p:spPr>
-        <p:txBody>
-          <a:bodyPr wrap="square" lIns="0" tIns="0" rIns="0" bIns="0" rtlCol="0" anchor="ctr"/>
-          <a:lstStyle/>
-          <a:p>
-            <a:pPr indent="0" marL="0">
-              <a:buNone/>
-            </a:pPr>
-            <a:r>
-              <a:rPr lang="en-US" sz="4000" b="1" dirty="0">
-                <a:solidFill>
-                  <a:srgbClr val="0E3B43"/>
-                </a:solidFill>
-                <a:latin typeface="Cambria" pitchFamily="34" charset="0"/>
-                <a:ea typeface="Cambria" pitchFamily="34" charset="-122"/>
-                <a:cs typeface="Cambria" pitchFamily="34" charset="-120"/>
-              </a:rPr>
-              <a:t>200</a:t>
-            </a:r>
-            <a:endParaRPr lang="en-US" sz="4000" dirty="0"/>
-          </a:p>
-        </p:txBody>
-      </p:sp>
-      <p:sp>
-        <p:nvSpPr>
-          <p:cNvPr id="8" name="Text 6"/>
-          <p:cNvSpPr txBox="1"/>
-          <p:nvPr/>
-        </p:nvSpPr>
-        <p:spPr>
-          <a:xfrm>
-            <a:off x="4663440" y="1920240"/>
-            <a:ext cx="1920240" cy="502920"/>
-          </a:xfrm>
-          <a:prstGeom prst="rect">
-            <a:avLst/>
-          </a:prstGeom>
-          <a:noFill/>
-          <a:ln/>
-        </p:spPr>
-        <p:txBody>
-          <a:bodyPr wrap="square" lIns="0" tIns="0" rIns="0" bIns="0" rtlCol="0" anchor="t"/>
-          <a:lstStyle/>
-          <a:p>
-            <a:pPr indent="0" marL="0">
-              <a:buNone/>
-            </a:pPr>
-            <a:r>
-              <a:rPr lang="en-US" sz="1200" dirty="0">
-                <a:solidFill>
-                  <a:srgbClr val="5B6866"/>
-                </a:solidFill>
-                <a:latin typeface="Calibri" pitchFamily="34" charset="0"/>
-                <a:ea typeface="Calibri" pitchFamily="34" charset="-122"/>
-                <a:cs typeface="Calibri" pitchFamily="34" charset="-120"/>
-              </a:rPr>
-              <a:t>flat attributes — only 17 essential</a:t>
-            </a:r>
-            <a:endParaRPr lang="en-US" sz="1200" dirty="0"/>
-          </a:p>
-        </p:txBody>
-      </p:sp>
-      <p:sp>
-        <p:nvSpPr>
-          <p:cNvPr id="9" name="Text 7"/>
-          <p:cNvSpPr txBox="1"/>
-          <p:nvPr/>
-        </p:nvSpPr>
-        <p:spPr>
-          <a:xfrm>
-            <a:off x="6766560" y="1143000"/>
-            <a:ext cx="1920240" cy="777240"/>
-          </a:xfrm>
-          <a:prstGeom prst="rect">
-            <a:avLst/>
-          </a:prstGeom>
-          <a:noFill/>
-          <a:ln/>
-        </p:spPr>
-        <p:txBody>
-          <a:bodyPr wrap="square" lIns="0" tIns="0" rIns="0" bIns="0" rtlCol="0" anchor="ctr"/>
-          <a:lstStyle/>
-          <a:p>
-            <a:pPr indent="0" marL="0">
-              <a:buNone/>
-            </a:pPr>
-            <a:r>
-              <a:rPr lang="en-US" sz="4000" b="1" dirty="0">
-                <a:solidFill>
-                  <a:srgbClr val="0E3B43"/>
-                </a:solidFill>
-                <a:latin typeface="Cambria" pitchFamily="34" charset="0"/>
-                <a:ea typeface="Cambria" pitchFamily="34" charset="-122"/>
-                <a:cs typeface="Cambria" pitchFamily="34" charset="-120"/>
-              </a:rPr>
-              <a:t>Live</a:t>
-            </a:r>
-            <a:endParaRPr lang="en-US" sz="4000" dirty="0"/>
-          </a:p>
-        </p:txBody>
-      </p:sp>
-      <p:sp>
-        <p:nvSpPr>
-          <p:cNvPr id="10" name="Text 8"/>
-          <p:cNvSpPr txBox="1"/>
-          <p:nvPr/>
-        </p:nvSpPr>
-        <p:spPr>
-          <a:xfrm>
-            <a:off x="6766560" y="1920240"/>
-            <a:ext cx="1920240" cy="502920"/>
-          </a:xfrm>
-          <a:prstGeom prst="rect">
-            <a:avLst/>
-          </a:prstGeom>
-          <a:noFill/>
-          <a:ln/>
-        </p:spPr>
-        <p:txBody>
-          <a:bodyPr wrap="square" lIns="0" tIns="0" rIns="0" bIns="0" rtlCol="0" anchor="t"/>
-          <a:lstStyle/>
-          <a:p>
-            <a:pPr indent="0" marL="0">
-              <a:buNone/>
-            </a:pPr>
-            <a:r>
-              <a:rPr lang="en-US" sz="1200" dirty="0">
-                <a:solidFill>
-                  <a:srgbClr val="5B6866"/>
-                </a:solidFill>
-                <a:latin typeface="Calibri" pitchFamily="34" charset="0"/>
-                <a:ea typeface="Calibri" pitchFamily="34" charset="-122"/>
-                <a:cs typeface="Calibri" pitchFamily="34" charset="-120"/>
-              </a:rPr>
-              <a:t>Android test app &amp; online demo</a:t>
-            </a:r>
-            <a:endParaRPr lang="en-US" sz="1200" dirty="0"/>
-          </a:p>
-        </p:txBody>
-      </p:sp>
-      <p:sp>
-        <p:nvSpPr>
-          <p:cNvPr id="11" name="Shape 9"/>
+          <p:cNvPr id="3" name="Shape 1"/>
           <p:cNvSpPr/>
           <p:nvPr/>
         </p:nvSpPr>
         <p:spPr>
           <a:xfrm>
-            <a:off x="731520" y="3246120"/>
-            <a:ext cx="7680960" cy="0"/>
-          </a:xfrm>
-          <a:prstGeom prst="line">
-            <a:avLst/>
-          </a:prstGeom>
-          <a:noFill/>
-          <a:ln w="25400">
-            <a:solidFill>
-              <a:srgbClr val="C9D2CF"/>
-            </a:solidFill>
-            <a:prstDash val="solid"/>
-          </a:ln>
-        </p:spPr>
-      </p:sp>
-      <p:sp>
-        <p:nvSpPr>
-          <p:cNvPr id="12" name="Shape 10"/>
+            <a:off x="457200" y="1234440"/>
+            <a:ext cx="1554480" cy="3383280"/>
+          </a:xfrm>
+          <a:prstGeom prst="roundRect">
+            <a:avLst>
+              <a:gd name="adj" fmla="val 4706"/>
+            </a:avLst>
+          </a:prstGeom>
+          <a:solidFill>
+            <a:srgbClr val="15505A"/>
+          </a:solidFill>
+          <a:ln/>
+        </p:spPr>
+      </p:sp>
+      <p:sp>
+        <p:nvSpPr>
+          <p:cNvPr id="4" name="Shape 2"/>
           <p:cNvSpPr/>
           <p:nvPr/>
         </p:nvSpPr>
         <p:spPr>
           <a:xfrm>
-            <a:off x="594360" y="3108960"/>
-            <a:ext cx="274320" cy="274320"/>
-          </a:xfrm>
-          <a:prstGeom prst="ellipse">
-            <a:avLst/>
-          </a:prstGeom>
-          <a:solidFill>
-            <a:srgbClr val="1E7A46"/>
-          </a:solidFill>
-          <a:ln w="25400">
-            <a:solidFill>
-              <a:srgbClr val="FFFFFF"/>
-            </a:solidFill>
-            <a:prstDash val="solid"/>
-          </a:ln>
-        </p:spPr>
-      </p:sp>
-      <p:sp>
-        <p:nvSpPr>
-          <p:cNvPr id="13" name="Text 11"/>
-          <p:cNvSpPr txBox="1"/>
-          <p:nvPr/>
-        </p:nvSpPr>
-        <p:spPr>
-          <a:xfrm>
-            <a:off x="457200" y="3474720"/>
-            <a:ext cx="1554480" cy="274320"/>
-          </a:xfrm>
-          <a:prstGeom prst="rect">
-            <a:avLst/>
-          </a:prstGeom>
-          <a:noFill/>
-          <a:ln/>
-        </p:spPr>
-        <p:txBody>
-          <a:bodyPr wrap="square" lIns="0" tIns="0" rIns="0" bIns="0" rtlCol="0" anchor="ctr"/>
-          <a:lstStyle/>
-          <a:p>
-            <a:pPr indent="0" marL="0">
-              <a:buNone/>
-            </a:pPr>
-            <a:r>
-              <a:rPr lang="en-US" sz="1100" b="1" dirty="0">
-                <a:solidFill>
-                  <a:srgbClr val="1E7A46"/>
-                </a:solidFill>
-                <a:latin typeface="Calibri" pitchFamily="34" charset="0"/>
-                <a:ea typeface="Calibri" pitchFamily="34" charset="-122"/>
-                <a:cs typeface="Calibri" pitchFamily="34" charset="-120"/>
-              </a:rPr>
-              <a:t>Done</a:t>
-            </a:r>
-            <a:endParaRPr lang="en-US" sz="1100" dirty="0"/>
-          </a:p>
-        </p:txBody>
-      </p:sp>
-      <p:sp>
-        <p:nvSpPr>
-          <p:cNvPr id="14" name="Text 12"/>
-          <p:cNvSpPr txBox="1"/>
-          <p:nvPr/>
-        </p:nvSpPr>
-        <p:spPr>
-          <a:xfrm>
-            <a:off x="457200" y="3749040"/>
-            <a:ext cx="1554480" cy="731520"/>
-          </a:xfrm>
-          <a:prstGeom prst="rect">
-            <a:avLst/>
-          </a:prstGeom>
-          <a:noFill/>
-          <a:ln/>
-        </p:spPr>
-        <p:txBody>
-          <a:bodyPr wrap="square" lIns="0" tIns="0" rIns="0" bIns="0" rtlCol="0" anchor="t"/>
-          <a:lstStyle/>
-          <a:p>
-            <a:pPr indent="0" marL="0">
-              <a:buNone/>
-            </a:pPr>
-            <a:r>
-              <a:rPr lang="en-US" sz="1250" dirty="0">
-                <a:solidFill>
-                  <a:srgbClr val="15201F"/>
-                </a:solidFill>
-                <a:latin typeface="Calibri" pitchFamily="34" charset="0"/>
-                <a:ea typeface="Calibri" pitchFamily="34" charset="-122"/>
-                <a:cs typeface="Calibri" pitchFamily="34" charset="-120"/>
-              </a:rPr>
-              <a:t>Build the core</a:t>
-            </a:r>
-            <a:endParaRPr lang="en-US" sz="1250" dirty="0"/>
-          </a:p>
-        </p:txBody>
-      </p:sp>
-      <p:sp>
-        <p:nvSpPr>
-          <p:cNvPr id="15" name="Shape 13"/>
-          <p:cNvSpPr/>
-          <p:nvPr/>
-        </p:nvSpPr>
-        <p:spPr>
-          <a:xfrm>
-            <a:off x="2240280" y="3108960"/>
-            <a:ext cx="274320" cy="274320"/>
+            <a:off x="960120" y="1463040"/>
+            <a:ext cx="548640" cy="548640"/>
           </a:xfrm>
           <a:prstGeom prst="ellipse">
             <a:avLst/>
@@ -7946,48 +7237,106 @@
           <a:solidFill>
             <a:srgbClr val="E8A33D"/>
           </a:solidFill>
-          <a:ln w="25400">
-            <a:solidFill>
-              <a:srgbClr val="FFFFFF"/>
-            </a:solidFill>
-            <a:prstDash val="solid"/>
-          </a:ln>
-        </p:spPr>
-      </p:sp>
-      <p:sp>
-        <p:nvSpPr>
-          <p:cNvPr id="16" name="Text 14"/>
-          <p:cNvSpPr txBox="1"/>
-          <p:nvPr/>
-        </p:nvSpPr>
-        <p:spPr>
-          <a:xfrm>
-            <a:off x="2103120" y="3474720"/>
-            <a:ext cx="1554480" cy="274320"/>
-          </a:xfrm>
-          <a:prstGeom prst="rect">
-            <a:avLst/>
-          </a:prstGeom>
-          <a:noFill/>
-          <a:ln/>
-        </p:spPr>
-        <p:txBody>
-          <a:bodyPr wrap="square" lIns="0" tIns="0" rIns="0" bIns="0" rtlCol="0" anchor="ctr"/>
-          <a:lstStyle/>
-          <a:p>
-            <a:pPr indent="0" marL="0">
-              <a:buNone/>
-            </a:pPr>
-            <a:r>
-              <a:rPr lang="en-US" sz="1100" b="1" dirty="0">
-                <a:solidFill>
-                  <a:srgbClr val="E8A33D"/>
-                </a:solidFill>
-                <a:latin typeface="Calibri" pitchFamily="34" charset="0"/>
-                <a:ea typeface="Calibri" pitchFamily="34" charset="-122"/>
-                <a:cs typeface="Calibri" pitchFamily="34" charset="-120"/>
-              </a:rPr>
-              <a:t>Now</a:t>
+          <a:ln/>
+        </p:spPr>
+      </p:sp>
+      <p:pic>
+        <p:nvPicPr>
+          <p:cNvPr id="5" name="Image 0" descr="preencoded.png">    </p:cNvPr>
+          <p:cNvPicPr>
+            <a:picLocks noChangeAspect="1"/>
+          </p:cNvPicPr>
+          <p:nvPr/>
+        </p:nvPicPr>
+        <p:blipFill>
+          <a:blip r:embed="rId1"/>
+          <a:stretch>
+            <a:fillRect/>
+          </a:stretch>
+        </p:blipFill>
+        <p:spPr>
+          <a:xfrm>
+            <a:off x="1091794" y="1594714"/>
+            <a:ext cx="285293" cy="285293"/>
+          </a:xfrm>
+          <a:prstGeom prst="rect">
+            <a:avLst/>
+          </a:prstGeom>
+        </p:spPr>
+      </p:pic>
+      <p:sp>
+        <p:nvSpPr>
+          <p:cNvPr id="6" name="Text 3"/>
+          <p:cNvSpPr txBox="1"/>
+          <p:nvPr/>
+        </p:nvSpPr>
+        <p:spPr>
+          <a:xfrm>
+            <a:off x="566928" y="2194560"/>
+            <a:ext cx="1335024" cy="685800"/>
+          </a:xfrm>
+          <a:prstGeom prst="rect">
+            <a:avLst/>
+          </a:prstGeom>
+          <a:noFill/>
+          <a:ln/>
+        </p:spPr>
+        <p:txBody>
+          <a:bodyPr wrap="square" lIns="0" tIns="0" rIns="0" bIns="0" rtlCol="0" anchor="t"/>
+          <a:lstStyle/>
+          <a:p>
+            <a:pPr algn="ctr" indent="0" marL="0">
+              <a:buNone/>
+            </a:pPr>
+            <a:r>
+              <a:rPr lang="en-US" sz="1300" b="1" dirty="0">
+                <a:solidFill>
+                  <a:srgbClr val="FFFFFF"/>
+                </a:solidFill>
+                <a:latin typeface="Calibri" pitchFamily="34" charset="0"/>
+                <a:ea typeface="Calibri" pitchFamily="34" charset="-122"/>
+                <a:cs typeface="Calibri" pitchFamily="34" charset="-120"/>
+              </a:rPr>
+              <a:t>Official building data</a:t>
+            </a:r>
+            <a:endParaRPr lang="en-US" sz="1300" dirty="0"/>
+          </a:p>
+        </p:txBody>
+      </p:sp>
+      <p:sp>
+        <p:nvSpPr>
+          <p:cNvPr id="7" name="Text 4"/>
+          <p:cNvSpPr txBox="1"/>
+          <p:nvPr/>
+        </p:nvSpPr>
+        <p:spPr>
+          <a:xfrm>
+            <a:off x="566928" y="2926080"/>
+            <a:ext cx="1335024" cy="1600200"/>
+          </a:xfrm>
+          <a:prstGeom prst="rect">
+            <a:avLst/>
+          </a:prstGeom>
+          <a:noFill/>
+          <a:ln/>
+        </p:spPr>
+        <p:txBody>
+          <a:bodyPr wrap="square" lIns="0" tIns="0" rIns="0" bIns="0" rtlCol="0" anchor="t"/>
+          <a:lstStyle/>
+          <a:p>
+            <a:pPr algn="ctr" indent="0" marL="0">
+              <a:buNone/>
+            </a:pPr>
+            <a:r>
+              <a:rPr lang="en-US" sz="1100" dirty="0">
+                <a:solidFill>
+                  <a:srgbClr val="DCEBE8"/>
+                </a:solidFill>
+                <a:latin typeface="Calibri" pitchFamily="34" charset="0"/>
+                <a:ea typeface="Calibri" pitchFamily="34" charset="-122"/>
+                <a:cs typeface="Calibri" pitchFamily="34" charset="-120"/>
+              </a:rPr>
+              <a:t>Every wing’s flats from TMC / MahaRERA records, plus learned spellings — the universe is closed down to the flat.</a:t>
             </a:r>
             <a:endParaRPr lang="en-US" sz="1100" dirty="0"/>
           </a:p>
@@ -7995,14 +7344,80 @@
       </p:sp>
       <p:sp>
         <p:nvSpPr>
-          <p:cNvPr id="17" name="Text 15"/>
-          <p:cNvSpPr txBox="1"/>
-          <p:nvPr/>
-        </p:nvSpPr>
-        <p:spPr>
-          <a:xfrm>
-            <a:off x="2103120" y="3749040"/>
-            <a:ext cx="1554480" cy="731520"/>
+          <p:cNvPr id="8" name="Shape 5"/>
+          <p:cNvSpPr/>
+          <p:nvPr/>
+        </p:nvSpPr>
+        <p:spPr>
+          <a:xfrm>
+            <a:off x="2139696" y="1234440"/>
+            <a:ext cx="1554480" cy="3383280"/>
+          </a:xfrm>
+          <a:prstGeom prst="roundRect">
+            <a:avLst>
+              <a:gd name="adj" fmla="val 4706"/>
+            </a:avLst>
+          </a:prstGeom>
+          <a:solidFill>
+            <a:srgbClr val="15505A"/>
+          </a:solidFill>
+          <a:ln/>
+        </p:spPr>
+      </p:sp>
+      <p:sp>
+        <p:nvSpPr>
+          <p:cNvPr id="9" name="Shape 6"/>
+          <p:cNvSpPr/>
+          <p:nvPr/>
+        </p:nvSpPr>
+        <p:spPr>
+          <a:xfrm>
+            <a:off x="2642616" y="1463040"/>
+            <a:ext cx="548640" cy="548640"/>
+          </a:xfrm>
+          <a:prstGeom prst="ellipse">
+            <a:avLst/>
+          </a:prstGeom>
+          <a:solidFill>
+            <a:srgbClr val="E8A33D"/>
+          </a:solidFill>
+          <a:ln/>
+        </p:spPr>
+      </p:sp>
+      <p:pic>
+        <p:nvPicPr>
+          <p:cNvPr id="10" name="Image 1" descr="preencoded.png">    </p:cNvPr>
+          <p:cNvPicPr>
+            <a:picLocks noChangeAspect="1"/>
+          </p:cNvPicPr>
+          <p:nvPr/>
+        </p:nvPicPr>
+        <p:blipFill>
+          <a:blip r:embed="rId2"/>
+          <a:stretch>
+            <a:fillRect/>
+          </a:stretch>
+        </p:blipFill>
+        <p:spPr>
+          <a:xfrm>
+            <a:off x="2774290" y="1594714"/>
+            <a:ext cx="285293" cy="285293"/>
+          </a:xfrm>
+          <a:prstGeom prst="rect">
+            <a:avLst/>
+          </a:prstGeom>
+        </p:spPr>
+      </p:pic>
+      <p:sp>
+        <p:nvSpPr>
+          <p:cNvPr id="11" name="Text 7"/>
+          <p:cNvSpPr txBox="1"/>
+          <p:nvPr/>
+        </p:nvSpPr>
+        <p:spPr>
+          <a:xfrm>
+            <a:off x="2249424" y="2194560"/>
+            <a:ext cx="1335024" cy="685800"/>
           </a:xfrm>
           <a:prstGeom prst="rect">
             <a:avLst/>
@@ -8014,83 +7429,202 @@
           <a:bodyPr wrap="square" lIns="0" tIns="0" rIns="0" bIns="0" rtlCol="0" anchor="t"/>
           <a:lstStyle/>
           <a:p>
-            <a:pPr indent="0" marL="0">
-              <a:buNone/>
-            </a:pPr>
-            <a:r>
-              <a:rPr lang="en-US" sz="1250" dirty="0">
-                <a:solidFill>
-                  <a:srgbClr val="15201F"/>
-                </a:solidFill>
-                <a:latin typeface="Calibri" pitchFamily="34" charset="0"/>
-                <a:ea typeface="Calibri" pitchFamily="34" charset="-122"/>
-                <a:cs typeface="Calibri" pitchFamily="34" charset="-120"/>
-              </a:rPr>
-              <a:t>Clean Thane West data</a:t>
-            </a:r>
-            <a:endParaRPr lang="en-US" sz="1250" dirty="0"/>
-          </a:p>
-        </p:txBody>
-      </p:sp>
-      <p:sp>
-        <p:nvSpPr>
-          <p:cNvPr id="18" name="Shape 16"/>
+            <a:pPr algn="ctr" indent="0" marL="0">
+              <a:buNone/>
+            </a:pPr>
+            <a:r>
+              <a:rPr lang="en-US" sz="1300" b="1" dirty="0">
+                <a:solidFill>
+                  <a:srgbClr val="FFFFFF"/>
+                </a:solidFill>
+                <a:latin typeface="Calibri" pitchFamily="34" charset="0"/>
+                <a:ea typeface="Calibri" pitchFamily="34" charset="-122"/>
+                <a:cs typeface="Calibri" pitchFamily="34" charset="-120"/>
+              </a:rPr>
+              <a:t>Brokers’ two assets live here</a:t>
+            </a:r>
+            <a:endParaRPr lang="en-US" sz="1300" dirty="0"/>
+          </a:p>
+        </p:txBody>
+      </p:sp>
+      <p:sp>
+        <p:nvSpPr>
+          <p:cNvPr id="12" name="Text 8"/>
+          <p:cNvSpPr txBox="1"/>
+          <p:nvPr/>
+        </p:nvSpPr>
+        <p:spPr>
+          <a:xfrm>
+            <a:off x="2249424" y="2926080"/>
+            <a:ext cx="1335024" cy="1600200"/>
+          </a:xfrm>
+          <a:prstGeom prst="rect">
+            <a:avLst/>
+          </a:prstGeom>
+          <a:noFill/>
+          <a:ln/>
+        </p:spPr>
+        <p:txBody>
+          <a:bodyPr wrap="square" lIns="0" tIns="0" rIns="0" bIns="0" rtlCol="0" anchor="t"/>
+          <a:lstStyle/>
+          <a:p>
+            <a:pPr algn="ctr" indent="0" marL="0">
+              <a:buNone/>
+            </a:pPr>
+            <a:r>
+              <a:rPr lang="en-US" sz="1100" dirty="0">
+                <a:solidFill>
+                  <a:srgbClr val="DCEBE8"/>
+                </a:solidFill>
+                <a:latin typeface="Calibri" pitchFamily="34" charset="0"/>
+                <a:ea typeface="Calibri" pitchFamily="34" charset="-122"/>
+                <a:cs typeface="Calibri" pitchFamily="34" charset="-120"/>
+              </a:rPr>
+              <a:t>Flats and customers, with their full history — switching away means leaving the business behind.</a:t>
+            </a:r>
+            <a:endParaRPr lang="en-US" sz="1100" dirty="0"/>
+          </a:p>
+        </p:txBody>
+      </p:sp>
+      <p:sp>
+        <p:nvSpPr>
+          <p:cNvPr id="13" name="Shape 9"/>
           <p:cNvSpPr/>
           <p:nvPr/>
         </p:nvSpPr>
         <p:spPr>
           <a:xfrm>
-            <a:off x="3886200" y="3108960"/>
-            <a:ext cx="274320" cy="274320"/>
+            <a:off x="3822192" y="1234440"/>
+            <a:ext cx="1554480" cy="3383280"/>
+          </a:xfrm>
+          <a:prstGeom prst="roundRect">
+            <a:avLst>
+              <a:gd name="adj" fmla="val 4706"/>
+            </a:avLst>
+          </a:prstGeom>
+          <a:solidFill>
+            <a:srgbClr val="15505A"/>
+          </a:solidFill>
+          <a:ln/>
+        </p:spPr>
+      </p:sp>
+      <p:sp>
+        <p:nvSpPr>
+          <p:cNvPr id="14" name="Shape 10"/>
+          <p:cNvSpPr/>
+          <p:nvPr/>
+        </p:nvSpPr>
+        <p:spPr>
+          <a:xfrm>
+            <a:off x="4325112" y="1463040"/>
+            <a:ext cx="548640" cy="548640"/>
           </a:xfrm>
           <a:prstGeom prst="ellipse">
             <a:avLst/>
           </a:prstGeom>
           <a:solidFill>
-            <a:srgbClr val="0E3B43"/>
+            <a:srgbClr val="E8A33D"/>
           </a:solidFill>
-          <a:ln w="25400">
-            <a:solidFill>
-              <a:srgbClr val="FFFFFF"/>
-            </a:solidFill>
-            <a:prstDash val="solid"/>
-          </a:ln>
-        </p:spPr>
-      </p:sp>
-      <p:sp>
-        <p:nvSpPr>
-          <p:cNvPr id="19" name="Text 17"/>
-          <p:cNvSpPr txBox="1"/>
-          <p:nvPr/>
-        </p:nvSpPr>
-        <p:spPr>
-          <a:xfrm>
-            <a:off x="3749040" y="3474720"/>
-            <a:ext cx="1554480" cy="274320"/>
-          </a:xfrm>
-          <a:prstGeom prst="rect">
-            <a:avLst/>
-          </a:prstGeom>
-          <a:noFill/>
-          <a:ln/>
-        </p:spPr>
-        <p:txBody>
-          <a:bodyPr wrap="square" lIns="0" tIns="0" rIns="0" bIns="0" rtlCol="0" anchor="ctr"/>
-          <a:lstStyle/>
-          <a:p>
-            <a:pPr indent="0" marL="0">
-              <a:buNone/>
-            </a:pPr>
-            <a:r>
-              <a:rPr lang="en-US" sz="1100" b="1" dirty="0">
-                <a:solidFill>
-                  <a:srgbClr val="0E3B43"/>
-                </a:solidFill>
-                <a:latin typeface="Calibri" pitchFamily="34" charset="0"/>
-                <a:ea typeface="Calibri" pitchFamily="34" charset="-122"/>
-                <a:cs typeface="Calibri" pitchFamily="34" charset="-120"/>
-              </a:rPr>
-              <a:t>Next</a:t>
+          <a:ln/>
+        </p:spPr>
+      </p:sp>
+      <p:pic>
+        <p:nvPicPr>
+          <p:cNvPr id="15" name="Image 2" descr="preencoded.png">    </p:cNvPr>
+          <p:cNvPicPr>
+            <a:picLocks noChangeAspect="1"/>
+          </p:cNvPicPr>
+          <p:nvPr/>
+        </p:nvPicPr>
+        <p:blipFill>
+          <a:blip r:embed="rId3"/>
+          <a:stretch>
+            <a:fillRect/>
+          </a:stretch>
+        </p:blipFill>
+        <p:spPr>
+          <a:xfrm>
+            <a:off x="4456786" y="1594714"/>
+            <a:ext cx="285293" cy="285293"/>
+          </a:xfrm>
+          <a:prstGeom prst="rect">
+            <a:avLst/>
+          </a:prstGeom>
+        </p:spPr>
+      </p:pic>
+      <p:sp>
+        <p:nvSpPr>
+          <p:cNvPr id="16" name="Text 11"/>
+          <p:cNvSpPr txBox="1"/>
+          <p:nvPr/>
+        </p:nvSpPr>
+        <p:spPr>
+          <a:xfrm>
+            <a:off x="3931920" y="2194560"/>
+            <a:ext cx="1335024" cy="685800"/>
+          </a:xfrm>
+          <a:prstGeom prst="rect">
+            <a:avLst/>
+          </a:prstGeom>
+          <a:noFill/>
+          <a:ln/>
+        </p:spPr>
+        <p:txBody>
+          <a:bodyPr wrap="square" lIns="0" tIns="0" rIns="0" bIns="0" rtlCol="0" anchor="t"/>
+          <a:lstStyle/>
+          <a:p>
+            <a:pPr algn="ctr" indent="0" marL="0">
+              <a:buNone/>
+            </a:pPr>
+            <a:r>
+              <a:rPr lang="en-US" sz="1300" b="1" dirty="0">
+                <a:solidFill>
+                  <a:srgbClr val="FFFFFF"/>
+                </a:solidFill>
+                <a:latin typeface="Calibri" pitchFamily="34" charset="0"/>
+                <a:ea typeface="Calibri" pitchFamily="34" charset="-122"/>
+                <a:cs typeface="Calibri" pitchFamily="34" charset="-120"/>
+              </a:rPr>
+              <a:t>Owners trust the tick</a:t>
+            </a:r>
+            <a:endParaRPr lang="en-US" sz="1300" dirty="0"/>
+          </a:p>
+        </p:txBody>
+      </p:sp>
+      <p:sp>
+        <p:nvSpPr>
+          <p:cNvPr id="17" name="Text 12"/>
+          <p:cNvSpPr txBox="1"/>
+          <p:nvPr/>
+        </p:nvSpPr>
+        <p:spPr>
+          <a:xfrm>
+            <a:off x="3931920" y="2926080"/>
+            <a:ext cx="1335024" cy="1600200"/>
+          </a:xfrm>
+          <a:prstGeom prst="rect">
+            <a:avLst/>
+          </a:prstGeom>
+          <a:noFill/>
+          <a:ln/>
+        </p:spPr>
+        <p:txBody>
+          <a:bodyPr wrap="square" lIns="0" tIns="0" rIns="0" bIns="0" rtlCol="0" anchor="t"/>
+          <a:lstStyle/>
+          <a:p>
+            <a:pPr algn="ctr" indent="0" marL="0">
+              <a:buNone/>
+            </a:pPr>
+            <a:r>
+              <a:rPr lang="en-US" sz="1100" dirty="0">
+                <a:solidFill>
+                  <a:srgbClr val="DCEBE8"/>
+                </a:solidFill>
+                <a:latin typeface="Calibri" pitchFamily="34" charset="0"/>
+                <a:ea typeface="Calibri" pitchFamily="34" charset="-122"/>
+                <a:cs typeface="Calibri" pitchFamily="34" charset="-120"/>
+              </a:rPr>
+              <a:t>Owner control and reviews make owners send flats to brokers through us.</a:t>
             </a:r>
             <a:endParaRPr lang="en-US" sz="1100" dirty="0"/>
           </a:p>
@@ -8098,14 +7632,80 @@
       </p:sp>
       <p:sp>
         <p:nvSpPr>
-          <p:cNvPr id="20" name="Text 18"/>
-          <p:cNvSpPr txBox="1"/>
-          <p:nvPr/>
-        </p:nvSpPr>
-        <p:spPr>
-          <a:xfrm>
-            <a:off x="3749040" y="3749040"/>
-            <a:ext cx="1554480" cy="731520"/>
+          <p:cNvPr id="18" name="Shape 13"/>
+          <p:cNvSpPr/>
+          <p:nvPr/>
+        </p:nvSpPr>
+        <p:spPr>
+          <a:xfrm>
+            <a:off x="5504688" y="1234440"/>
+            <a:ext cx="1554480" cy="3383280"/>
+          </a:xfrm>
+          <a:prstGeom prst="roundRect">
+            <a:avLst>
+              <a:gd name="adj" fmla="val 4706"/>
+            </a:avLst>
+          </a:prstGeom>
+          <a:solidFill>
+            <a:srgbClr val="15505A"/>
+          </a:solidFill>
+          <a:ln/>
+        </p:spPr>
+      </p:sp>
+      <p:sp>
+        <p:nvSpPr>
+          <p:cNvPr id="19" name="Shape 14"/>
+          <p:cNvSpPr/>
+          <p:nvPr/>
+        </p:nvSpPr>
+        <p:spPr>
+          <a:xfrm>
+            <a:off x="6007608" y="1463040"/>
+            <a:ext cx="548640" cy="548640"/>
+          </a:xfrm>
+          <a:prstGeom prst="ellipse">
+            <a:avLst/>
+          </a:prstGeom>
+          <a:solidFill>
+            <a:srgbClr val="E8A33D"/>
+          </a:solidFill>
+          <a:ln/>
+        </p:spPr>
+      </p:sp>
+      <p:pic>
+        <p:nvPicPr>
+          <p:cNvPr id="20" name="Image 3" descr="preencoded.png">    </p:cNvPr>
+          <p:cNvPicPr>
+            <a:picLocks noChangeAspect="1"/>
+          </p:cNvPicPr>
+          <p:nvPr/>
+        </p:nvPicPr>
+        <p:blipFill>
+          <a:blip r:embed="rId4"/>
+          <a:stretch>
+            <a:fillRect/>
+          </a:stretch>
+        </p:blipFill>
+        <p:spPr>
+          <a:xfrm>
+            <a:off x="6139282" y="1594714"/>
+            <a:ext cx="285293" cy="285293"/>
+          </a:xfrm>
+          <a:prstGeom prst="rect">
+            <a:avLst/>
+          </a:prstGeom>
+        </p:spPr>
+      </p:pic>
+      <p:sp>
+        <p:nvSpPr>
+          <p:cNvPr id="21" name="Text 15"/>
+          <p:cNvSpPr txBox="1"/>
+          <p:nvPr/>
+        </p:nvSpPr>
+        <p:spPr>
+          <a:xfrm>
+            <a:off x="5614416" y="2194560"/>
+            <a:ext cx="1335024" cy="685800"/>
           </a:xfrm>
           <a:prstGeom prst="rect">
             <a:avLst/>
@@ -8117,227 +7717,204 @@
           <a:bodyPr wrap="square" lIns="0" tIns="0" rIns="0" bIns="0" rtlCol="0" anchor="t"/>
           <a:lstStyle/>
           <a:p>
-            <a:pPr indent="0" marL="0">
-              <a:buNone/>
-            </a:pPr>
-            <a:r>
-              <a:rPr lang="en-US" sz="1250" dirty="0">
-                <a:solidFill>
-                  <a:srgbClr val="15201F"/>
-                </a:solidFill>
-                <a:latin typeface="Calibri" pitchFamily="34" charset="0"/>
-                <a:ea typeface="Calibri" pitchFamily="34" charset="-122"/>
-                <a:cs typeface="Calibri" pitchFamily="34" charset="-120"/>
-              </a:rPr>
-              <a:t>Pilot broker on the real app</a:t>
-            </a:r>
-            <a:endParaRPr lang="en-US" sz="1250" dirty="0"/>
-          </a:p>
-        </p:txBody>
-      </p:sp>
-      <p:sp>
-        <p:nvSpPr>
-          <p:cNvPr id="21" name="Shape 19"/>
+            <a:pPr algn="ctr" indent="0" marL="0">
+              <a:buNone/>
+            </a:pPr>
+            <a:r>
+              <a:rPr lang="en-US" sz="1300" b="1" dirty="0">
+                <a:solidFill>
+                  <a:srgbClr val="FFFFFF"/>
+                </a:solidFill>
+                <a:latin typeface="Calibri" pitchFamily="34" charset="0"/>
+                <a:ea typeface="Calibri" pitchFamily="34" charset="-122"/>
+                <a:cs typeface="Calibri" pitchFamily="34" charset="-120"/>
+              </a:rPr>
+              <a:t>Network loops</a:t>
+            </a:r>
+            <a:endParaRPr lang="en-US" sz="1300" dirty="0"/>
+          </a:p>
+        </p:txBody>
+      </p:sp>
+      <p:sp>
+        <p:nvSpPr>
+          <p:cNvPr id="22" name="Text 16"/>
+          <p:cNvSpPr txBox="1"/>
+          <p:nvPr/>
+        </p:nvSpPr>
+        <p:spPr>
+          <a:xfrm>
+            <a:off x="5614416" y="2926080"/>
+            <a:ext cx="1335024" cy="1600200"/>
+          </a:xfrm>
+          <a:prstGeom prst="rect">
+            <a:avLst/>
+          </a:prstGeom>
+          <a:noFill/>
+          <a:ln/>
+        </p:spPr>
+        <p:txBody>
+          <a:bodyPr wrap="square" lIns="0" tIns="0" rIns="0" bIns="0" rtlCol="0" anchor="t"/>
+          <a:lstStyle/>
+          <a:p>
+            <a:pPr algn="ctr" indent="0" marL="0">
+              <a:buNone/>
+            </a:pPr>
+            <a:r>
+              <a:rPr lang="en-US" sz="1100" dirty="0">
+                <a:solidFill>
+                  <a:srgbClr val="DCEBE8"/>
+                </a:solidFill>
+                <a:latin typeface="Calibri" pitchFamily="34" charset="0"/>
+                <a:ea typeface="Calibri" pitchFamily="34" charset="-122"/>
+                <a:cs typeface="Calibri" pitchFamily="34" charset="-120"/>
+              </a:rPr>
+              <a:t>Co-broking pulls fellow brokers in; broadcasts pull offline customers in — broker by broker.</a:t>
+            </a:r>
+            <a:endParaRPr lang="en-US" sz="1100" dirty="0"/>
+          </a:p>
+        </p:txBody>
+      </p:sp>
+      <p:sp>
+        <p:nvSpPr>
+          <p:cNvPr id="23" name="Shape 17"/>
           <p:cNvSpPr/>
           <p:nvPr/>
         </p:nvSpPr>
         <p:spPr>
           <a:xfrm>
-            <a:off x="5532120" y="3108960"/>
-            <a:ext cx="274320" cy="274320"/>
+            <a:off x="7187184" y="1234440"/>
+            <a:ext cx="1554480" cy="3383280"/>
+          </a:xfrm>
+          <a:prstGeom prst="roundRect">
+            <a:avLst>
+              <a:gd name="adj" fmla="val 4706"/>
+            </a:avLst>
+          </a:prstGeom>
+          <a:solidFill>
+            <a:srgbClr val="15505A"/>
+          </a:solidFill>
+          <a:ln/>
+        </p:spPr>
+      </p:sp>
+      <p:sp>
+        <p:nvSpPr>
+          <p:cNvPr id="24" name="Shape 18"/>
+          <p:cNvSpPr/>
+          <p:nvPr/>
+        </p:nvSpPr>
+        <p:spPr>
+          <a:xfrm>
+            <a:off x="7690104" y="1463040"/>
+            <a:ext cx="548640" cy="548640"/>
           </a:xfrm>
           <a:prstGeom prst="ellipse">
             <a:avLst/>
           </a:prstGeom>
           <a:solidFill>
-            <a:srgbClr val="5B6866"/>
+            <a:srgbClr val="E8A33D"/>
           </a:solidFill>
-          <a:ln w="25400">
-            <a:solidFill>
-              <a:srgbClr val="FFFFFF"/>
-            </a:solidFill>
-            <a:prstDash val="solid"/>
-          </a:ln>
-        </p:spPr>
-      </p:sp>
-      <p:sp>
-        <p:nvSpPr>
-          <p:cNvPr id="22" name="Text 20"/>
-          <p:cNvSpPr txBox="1"/>
-          <p:nvPr/>
-        </p:nvSpPr>
-        <p:spPr>
-          <a:xfrm>
-            <a:off x="5394960" y="3474720"/>
-            <a:ext cx="1554480" cy="274320"/>
-          </a:xfrm>
-          <a:prstGeom prst="rect">
-            <a:avLst/>
-          </a:prstGeom>
-          <a:noFill/>
-          <a:ln/>
-        </p:spPr>
-        <p:txBody>
-          <a:bodyPr wrap="square" lIns="0" tIns="0" rIns="0" bIns="0" rtlCol="0" anchor="ctr"/>
-          <a:lstStyle/>
-          <a:p>
-            <a:pPr indent="0" marL="0">
-              <a:buNone/>
-            </a:pPr>
-            <a:r>
-              <a:rPr lang="en-US" sz="1100" b="1" dirty="0">
-                <a:solidFill>
-                  <a:srgbClr val="5B6866"/>
-                </a:solidFill>
-                <a:latin typeface="Calibri" pitchFamily="34" charset="0"/>
-                <a:ea typeface="Calibri" pitchFamily="34" charset="-122"/>
-                <a:cs typeface="Calibri" pitchFamily="34" charset="-120"/>
-              </a:rPr>
-              <a:t>Then</a:t>
+          <a:ln/>
+        </p:spPr>
+      </p:sp>
+      <p:pic>
+        <p:nvPicPr>
+          <p:cNvPr id="25" name="Image 4" descr="preencoded.png">    </p:cNvPr>
+          <p:cNvPicPr>
+            <a:picLocks noChangeAspect="1"/>
+          </p:cNvPicPr>
+          <p:nvPr/>
+        </p:nvPicPr>
+        <p:blipFill>
+          <a:blip r:embed="rId5"/>
+          <a:stretch>
+            <a:fillRect/>
+          </a:stretch>
+        </p:blipFill>
+        <p:spPr>
+          <a:xfrm>
+            <a:off x="7821778" y="1594714"/>
+            <a:ext cx="285293" cy="285293"/>
+          </a:xfrm>
+          <a:prstGeom prst="rect">
+            <a:avLst/>
+          </a:prstGeom>
+        </p:spPr>
+      </p:pic>
+      <p:sp>
+        <p:nvSpPr>
+          <p:cNvPr id="26" name="Text 19"/>
+          <p:cNvSpPr txBox="1"/>
+          <p:nvPr/>
+        </p:nvSpPr>
+        <p:spPr>
+          <a:xfrm>
+            <a:off x="7296912" y="2194560"/>
+            <a:ext cx="1335024" cy="685800"/>
+          </a:xfrm>
+          <a:prstGeom prst="rect">
+            <a:avLst/>
+          </a:prstGeom>
+          <a:noFill/>
+          <a:ln/>
+        </p:spPr>
+        <p:txBody>
+          <a:bodyPr wrap="square" lIns="0" tIns="0" rIns="0" bIns="0" rtlCol="0" anchor="t"/>
+          <a:lstStyle/>
+          <a:p>
+            <a:pPr algn="ctr" indent="0" marL="0">
+              <a:buNone/>
+            </a:pPr>
+            <a:r>
+              <a:rPr lang="en-US" sz="1300" b="1" dirty="0">
+                <a:solidFill>
+                  <a:srgbClr val="FFFFFF"/>
+                </a:solidFill>
+                <a:latin typeface="Calibri" pitchFamily="34" charset="0"/>
+                <a:ea typeface="Calibri" pitchFamily="34" charset="-122"/>
+                <a:cs typeface="Calibri" pitchFamily="34" charset="-120"/>
+              </a:rPr>
+              <a:t>Trust by design</a:t>
+            </a:r>
+            <a:endParaRPr lang="en-US" sz="1300" dirty="0"/>
+          </a:p>
+        </p:txBody>
+      </p:sp>
+      <p:sp>
+        <p:nvSpPr>
+          <p:cNvPr id="27" name="Text 20"/>
+          <p:cNvSpPr txBox="1"/>
+          <p:nvPr/>
+        </p:nvSpPr>
+        <p:spPr>
+          <a:xfrm>
+            <a:off x="7296912" y="2926080"/>
+            <a:ext cx="1335024" cy="1600200"/>
+          </a:xfrm>
+          <a:prstGeom prst="rect">
+            <a:avLst/>
+          </a:prstGeom>
+          <a:noFill/>
+          <a:ln/>
+        </p:spPr>
+        <p:txBody>
+          <a:bodyPr wrap="square" lIns="0" tIns="0" rIns="0" bIns="0" rtlCol="0" anchor="t"/>
+          <a:lstStyle/>
+          <a:p>
+            <a:pPr algn="ctr" indent="0" marL="0">
+              <a:buNone/>
+            </a:pPr>
+            <a:r>
+              <a:rPr lang="en-US" sz="1100" dirty="0">
+                <a:solidFill>
+                  <a:srgbClr val="DCEBE8"/>
+                </a:solidFill>
+                <a:latin typeface="Calibri" pitchFamily="34" charset="0"/>
+                <a:ea typeface="Calibri" pitchFamily="34" charset="-122"/>
+                <a:cs typeface="Calibri" pitchFamily="34" charset="-120"/>
+              </a:rPr>
+              <a:t>Isolation, audit and consent built in from day one — slow and costly to retrofit.</a:t>
             </a:r>
             <a:endParaRPr lang="en-US" sz="1100" dirty="0"/>
-          </a:p>
-        </p:txBody>
-      </p:sp>
-      <p:sp>
-        <p:nvSpPr>
-          <p:cNvPr id="23" name="Text 21"/>
-          <p:cNvSpPr txBox="1"/>
-          <p:nvPr/>
-        </p:nvSpPr>
-        <p:spPr>
-          <a:xfrm>
-            <a:off x="5394960" y="3749040"/>
-            <a:ext cx="1554480" cy="731520"/>
-          </a:xfrm>
-          <a:prstGeom prst="rect">
-            <a:avLst/>
-          </a:prstGeom>
-          <a:noFill/>
-          <a:ln/>
-        </p:spPr>
-        <p:txBody>
-          <a:bodyPr wrap="square" lIns="0" tIns="0" rIns="0" bIns="0" rtlCol="0" anchor="t"/>
-          <a:lstStyle/>
-          <a:p>
-            <a:pPr indent="0" marL="0">
-              <a:buNone/>
-            </a:pPr>
-            <a:r>
-              <a:rPr lang="en-US" sz="1250" dirty="0">
-                <a:solidFill>
-                  <a:srgbClr val="15201F"/>
-                </a:solidFill>
-                <a:latin typeface="Calibri" pitchFamily="34" charset="0"/>
-                <a:ea typeface="Calibri" pitchFamily="34" charset="-122"/>
-                <a:cs typeface="Calibri" pitchFamily="34" charset="-120"/>
-              </a:rPr>
-              <a:t>Measure the pilot</a:t>
-            </a:r>
-            <a:endParaRPr lang="en-US" sz="1250" dirty="0"/>
-          </a:p>
-        </p:txBody>
-      </p:sp>
-      <p:sp>
-        <p:nvSpPr>
-          <p:cNvPr id="24" name="Shape 22"/>
-          <p:cNvSpPr/>
-          <p:nvPr/>
-        </p:nvSpPr>
-        <p:spPr>
-          <a:xfrm>
-            <a:off x="7178040" y="3108960"/>
-            <a:ext cx="274320" cy="274320"/>
-          </a:xfrm>
-          <a:prstGeom prst="ellipse">
-            <a:avLst/>
-          </a:prstGeom>
-          <a:solidFill>
-            <a:srgbClr val="5B6866"/>
-          </a:solidFill>
-          <a:ln w="25400">
-            <a:solidFill>
-              <a:srgbClr val="FFFFFF"/>
-            </a:solidFill>
-            <a:prstDash val="solid"/>
-          </a:ln>
-        </p:spPr>
-      </p:sp>
-      <p:sp>
-        <p:nvSpPr>
-          <p:cNvPr id="25" name="Text 23"/>
-          <p:cNvSpPr txBox="1"/>
-          <p:nvPr/>
-        </p:nvSpPr>
-        <p:spPr>
-          <a:xfrm>
-            <a:off x="7040880" y="3474720"/>
-            <a:ext cx="1554480" cy="274320"/>
-          </a:xfrm>
-          <a:prstGeom prst="rect">
-            <a:avLst/>
-          </a:prstGeom>
-          <a:noFill/>
-          <a:ln/>
-        </p:spPr>
-        <p:txBody>
-          <a:bodyPr wrap="square" lIns="0" tIns="0" rIns="0" bIns="0" rtlCol="0" anchor="ctr"/>
-          <a:lstStyle/>
-          <a:p>
-            <a:pPr indent="0" marL="0">
-              <a:buNone/>
-            </a:pPr>
-            <a:r>
-              <a:rPr lang="en-US" sz="1100" b="1" dirty="0">
-                <a:solidFill>
-                  <a:srgbClr val="5B6866"/>
-                </a:solidFill>
-                <a:latin typeface="Calibri" pitchFamily="34" charset="0"/>
-                <a:ea typeface="Calibri" pitchFamily="34" charset="-122"/>
-                <a:cs typeface="Calibri" pitchFamily="34" charset="-120"/>
-              </a:rPr>
-              <a:t>Later</a:t>
-            </a:r>
-            <a:endParaRPr lang="en-US" sz="1100" dirty="0"/>
-          </a:p>
-        </p:txBody>
-      </p:sp>
-      <p:sp>
-        <p:nvSpPr>
-          <p:cNvPr id="26" name="Text 24"/>
-          <p:cNvSpPr txBox="1"/>
-          <p:nvPr/>
-        </p:nvSpPr>
-        <p:spPr>
-          <a:xfrm>
-            <a:off x="7040880" y="3749040"/>
-            <a:ext cx="1554480" cy="731520"/>
-          </a:xfrm>
-          <a:prstGeom prst="rect">
-            <a:avLst/>
-          </a:prstGeom>
-          <a:noFill/>
-          <a:ln/>
-        </p:spPr>
-        <p:txBody>
-          <a:bodyPr wrap="square" lIns="0" tIns="0" rIns="0" bIns="0" rtlCol="0" anchor="t"/>
-          <a:lstStyle/>
-          <a:p>
-            <a:pPr indent="0" marL="0">
-              <a:buNone/>
-            </a:pPr>
-            <a:r>
-              <a:rPr lang="en-US" sz="1250" dirty="0">
-                <a:solidFill>
-                  <a:srgbClr val="15201F"/>
-                </a:solidFill>
-                <a:latin typeface="Calibri" pitchFamily="34" charset="0"/>
-                <a:ea typeface="Calibri" pitchFamily="34" charset="-122"/>
-                <a:cs typeface="Calibri" pitchFamily="34" charset="-120"/>
-              </a:rPr>
-              <a:t>More brokers → marketplace</a:t>
-            </a:r>
-            <a:endParaRPr lang="en-US" sz="1250" dirty="0"/>
           </a:p>
         </p:txBody>
       </p:sp>
@@ -8382,7 +7959,7 @@
         <p:spPr>
           <a:xfrm>
             <a:off x="457200" y="292608"/>
-            <a:ext cx="8229600" cy="685800"/>
+            <a:ext cx="7772400" cy="685800"/>
           </a:xfrm>
           <a:prstGeom prst="rect">
             <a:avLst/>
@@ -8406,7 +7983,7 @@
                 <a:ea typeface="Cambria" pitchFamily="34" charset="-122"/>
                 <a:cs typeface="Cambria" pitchFamily="34" charset="-120"/>
               </a:rPr>
-              <a:t>Next 90 days</a:t>
+              <a:t>How we make money (to be tested in the pilot)</a:t>
             </a:r>
             <a:endParaRPr lang="en-US" sz="2500" dirty="0"/>
           </a:p>
@@ -8421,6 +7998,33 @@
         <p:spPr>
           <a:xfrm>
             <a:off x="457200" y="1234440"/>
+            <a:ext cx="2606040" cy="2651760"/>
+          </a:xfrm>
+          <a:prstGeom prst="roundRect">
+            <a:avLst>
+              <a:gd name="adj" fmla="val 2807"/>
+            </a:avLst>
+          </a:prstGeom>
+          <a:solidFill>
+            <a:srgbClr val="FFFFFF"/>
+          </a:solidFill>
+          <a:ln w="9525">
+            <a:solidFill>
+              <a:srgbClr val="DCE2DF"/>
+            </a:solidFill>
+            <a:prstDash val="solid"/>
+          </a:ln>
+        </p:spPr>
+      </p:sp>
+      <p:sp>
+        <p:nvSpPr>
+          <p:cNvPr id="4" name="Shape 2"/>
+          <p:cNvSpPr/>
+          <p:nvPr/>
+        </p:nvSpPr>
+        <p:spPr>
+          <a:xfrm>
+            <a:off x="685800" y="1463040"/>
             <a:ext cx="548640" cy="548640"/>
           </a:xfrm>
           <a:prstGeom prst="ellipse">
@@ -8434,7 +8038,7 @@
       </p:sp>
       <p:pic>
         <p:nvPicPr>
-          <p:cNvPr id="4" name="Image 0" descr="preencoded.png">    </p:cNvPr>
+          <p:cNvPr id="5" name="Image 0" descr="preencoded.png">    </p:cNvPr>
           <p:cNvPicPr>
             <a:picLocks noChangeAspect="1"/>
           </p:cNvPicPr>
@@ -8448,7 +8052,7 @@
         </p:blipFill>
         <p:spPr>
           <a:xfrm>
-            <a:off x="588874" y="1366114"/>
+            <a:off x="817474" y="1594714"/>
             <a:ext cx="285293" cy="285293"/>
           </a:xfrm>
           <a:prstGeom prst="rect">
@@ -8458,14 +8062,14 @@
       </p:pic>
       <p:sp>
         <p:nvSpPr>
-          <p:cNvPr id="5" name="Text 2"/>
-          <p:cNvSpPr txBox="1"/>
-          <p:nvPr/>
-        </p:nvSpPr>
-        <p:spPr>
-          <a:xfrm>
-            <a:off x="1188720" y="1188720"/>
-            <a:ext cx="2377440" cy="640080"/>
+          <p:cNvPr id="6" name="Text 3"/>
+          <p:cNvSpPr txBox="1"/>
+          <p:nvPr/>
+        </p:nvSpPr>
+        <p:spPr>
+          <a:xfrm>
+            <a:off x="685800" y="2148840"/>
+            <a:ext cx="2194560" cy="411480"/>
           </a:xfrm>
           <a:prstGeom prst="rect">
             <a:avLst/>
@@ -8489,7 +8093,7 @@
                 <a:ea typeface="Calibri" pitchFamily="34" charset="-122"/>
                 <a:cs typeface="Calibri" pitchFamily="34" charset="-120"/>
               </a:rPr>
-              <a:t>Thane West data</a:t>
+              <a:t>Broker subscription</a:t>
             </a:r>
             <a:endParaRPr lang="en-US" sz="1500" dirty="0"/>
           </a:p>
@@ -8497,30 +8101,30 @@
       </p:sp>
       <p:sp>
         <p:nvSpPr>
-          <p:cNvPr id="6" name="Text 3"/>
-          <p:cNvSpPr txBox="1"/>
-          <p:nvPr/>
-        </p:nvSpPr>
-        <p:spPr>
-          <a:xfrm>
-            <a:off x="3566160" y="1188720"/>
-            <a:ext cx="5120640" cy="640080"/>
-          </a:xfrm>
-          <a:prstGeom prst="rect">
-            <a:avLst/>
-          </a:prstGeom>
-          <a:noFill/>
-          <a:ln/>
-        </p:spPr>
-        <p:txBody>
-          <a:bodyPr wrap="square" lIns="0" tIns="0" rIns="0" bIns="0" rtlCol="0" anchor="ctr"/>
+          <p:cNvPr id="7" name="Text 4"/>
+          <p:cNvSpPr txBox="1"/>
+          <p:nvPr/>
+        </p:nvSpPr>
+        <p:spPr>
+          <a:xfrm>
+            <a:off x="685800" y="2606040"/>
+            <a:ext cx="2194560" cy="1188720"/>
+          </a:xfrm>
+          <a:prstGeom prst="rect">
+            <a:avLst/>
+          </a:prstGeom>
+          <a:noFill/>
+          <a:ln/>
+        </p:spPr>
+        <p:txBody>
+          <a:bodyPr wrap="square" lIns="0" tIns="0" rIns="0" bIns="0" rtlCol="0" anchor="t"/>
           <a:lstStyle/>
           <a:p>
             <a:pPr indent="0" marL="0">
               <a:buNone/>
             </a:pPr>
             <a:r>
-              <a:rPr lang="en-US" sz="1250" dirty="0">
+              <a:rPr lang="en-US" sz="1200" dirty="0">
                 <a:solidFill>
                   <a:srgbClr val="5B6866"/>
                 </a:solidFill>
@@ -8528,21 +8132,48 @@
                 <a:ea typeface="Calibri" pitchFamily="34" charset="-122"/>
                 <a:cs typeface="Calibri" pitchFamily="34" charset="-120"/>
               </a:rPr>
-              <a:t>Pilot broker confirms map pins; wings, floors and flats per floor loaded (MahaRERA + site visits).</a:t>
-            </a:r>
-            <a:endParaRPr lang="en-US" sz="1250" dirty="0"/>
-          </a:p>
-        </p:txBody>
-      </p:sp>
-      <p:sp>
-        <p:nvSpPr>
-          <p:cNvPr id="7" name="Shape 4"/>
+              <a:t>Monthly plan per firm, with seats for managers and field staff. The core revenue line.</a:t>
+            </a:r>
+            <a:endParaRPr lang="en-US" sz="1200" dirty="0"/>
+          </a:p>
+        </p:txBody>
+      </p:sp>
+      <p:sp>
+        <p:nvSpPr>
+          <p:cNvPr id="8" name="Shape 5"/>
           <p:cNvSpPr/>
           <p:nvPr/>
         </p:nvSpPr>
         <p:spPr>
           <a:xfrm>
-            <a:off x="457200" y="2130552"/>
+            <a:off x="3246120" y="1234440"/>
+            <a:ext cx="2606040" cy="2651760"/>
+          </a:xfrm>
+          <a:prstGeom prst="roundRect">
+            <a:avLst>
+              <a:gd name="adj" fmla="val 2807"/>
+            </a:avLst>
+          </a:prstGeom>
+          <a:solidFill>
+            <a:srgbClr val="FFFFFF"/>
+          </a:solidFill>
+          <a:ln w="9525">
+            <a:solidFill>
+              <a:srgbClr val="DCE2DF"/>
+            </a:solidFill>
+            <a:prstDash val="solid"/>
+          </a:ln>
+        </p:spPr>
+      </p:sp>
+      <p:sp>
+        <p:nvSpPr>
+          <p:cNvPr id="9" name="Shape 6"/>
+          <p:cNvSpPr/>
+          <p:nvPr/>
+        </p:nvSpPr>
+        <p:spPr>
+          <a:xfrm>
+            <a:off x="3474720" y="1463040"/>
             <a:ext cx="548640" cy="548640"/>
           </a:xfrm>
           <a:prstGeom prst="ellipse">
@@ -8556,7 +8187,7 @@
       </p:sp>
       <p:pic>
         <p:nvPicPr>
-          <p:cNvPr id="8" name="Image 1" descr="preencoded.png">    </p:cNvPr>
+          <p:cNvPr id="10" name="Image 1" descr="preencoded.png">    </p:cNvPr>
           <p:cNvPicPr>
             <a:picLocks noChangeAspect="1"/>
           </p:cNvPicPr>
@@ -8570,7 +8201,7 @@
         </p:blipFill>
         <p:spPr>
           <a:xfrm>
-            <a:off x="588874" y="2262226"/>
+            <a:off x="3606394" y="1594714"/>
             <a:ext cx="285293" cy="285293"/>
           </a:xfrm>
           <a:prstGeom prst="rect">
@@ -8580,14 +8211,14 @@
       </p:pic>
       <p:sp>
         <p:nvSpPr>
-          <p:cNvPr id="9" name="Text 5"/>
-          <p:cNvSpPr txBox="1"/>
-          <p:nvPr/>
-        </p:nvSpPr>
-        <p:spPr>
-          <a:xfrm>
-            <a:off x="1188720" y="2084832"/>
-            <a:ext cx="2377440" cy="640080"/>
+          <p:cNvPr id="11" name="Text 7"/>
+          <p:cNvSpPr txBox="1"/>
+          <p:nvPr/>
+        </p:nvSpPr>
+        <p:spPr>
+          <a:xfrm>
+            <a:off x="3474720" y="2148840"/>
+            <a:ext cx="2194560" cy="411480"/>
           </a:xfrm>
           <a:prstGeom prst="rect">
             <a:avLst/>
@@ -8611,7 +8242,7 @@
                 <a:ea typeface="Calibri" pitchFamily="34" charset="-122"/>
                 <a:cs typeface="Calibri" pitchFamily="34" charset="-120"/>
               </a:rPr>
-              <a:t>Pilot broker live</a:t>
+              <a:t>Message credits</a:t>
             </a:r>
             <a:endParaRPr lang="en-US" sz="1500" dirty="0"/>
           </a:p>
@@ -8619,30 +8250,30 @@
       </p:sp>
       <p:sp>
         <p:nvSpPr>
-          <p:cNvPr id="10" name="Text 6"/>
-          <p:cNvSpPr txBox="1"/>
-          <p:nvPr/>
-        </p:nvSpPr>
-        <p:spPr>
-          <a:xfrm>
-            <a:off x="3566160" y="2084832"/>
-            <a:ext cx="5120640" cy="640080"/>
-          </a:xfrm>
-          <a:prstGeom prst="rect">
-            <a:avLst/>
-          </a:prstGeom>
-          <a:noFill/>
-          <a:ln/>
-        </p:spPr>
-        <p:txBody>
-          <a:bodyPr wrap="square" lIns="0" tIns="0" rIns="0" bIns="0" rtlCol="0" anchor="ctr"/>
+          <p:cNvPr id="12" name="Text 8"/>
+          <p:cNvSpPr txBox="1"/>
+          <p:nvPr/>
+        </p:nvSpPr>
+        <p:spPr>
+          <a:xfrm>
+            <a:off x="3474720" y="2606040"/>
+            <a:ext cx="2194560" cy="1188720"/>
+          </a:xfrm>
+          <a:prstGeom prst="rect">
+            <a:avLst/>
+          </a:prstGeom>
+          <a:noFill/>
+          <a:ln/>
+        </p:spPr>
+        <p:txBody>
+          <a:bodyPr wrap="square" lIns="0" tIns="0" rIns="0" bIns="0" rtlCol="0" anchor="t"/>
           <a:lstStyle/>
           <a:p>
             <a:pPr indent="0" marL="0">
               <a:buNone/>
             </a:pPr>
             <a:r>
-              <a:rPr lang="en-US" sz="1250" dirty="0">
+              <a:rPr lang="en-US" sz="1200" dirty="0">
                 <a:solidFill>
                   <a:srgbClr val="5B6866"/>
                 </a:solidFill>
@@ -8650,21 +8281,48 @@
                 <a:ea typeface="Calibri" pitchFamily="34" charset="-122"/>
                 <a:cs typeface="Calibri" pitchFamily="34" charset="-120"/>
               </a:rPr>
-              <a:t>Server in the cloud, real logins, Android app; iPhone via TestFlight.</a:t>
-            </a:r>
-            <a:endParaRPr lang="en-US" sz="1250" dirty="0"/>
-          </a:p>
-        </p:txBody>
-      </p:sp>
-      <p:sp>
-        <p:nvSpPr>
-          <p:cNvPr id="11" name="Shape 7"/>
+              <a:t>Plans include a number of broadcasts and WhatsApp messages; brokers top up. Free in the pilot.</a:t>
+            </a:r>
+            <a:endParaRPr lang="en-US" sz="1200" dirty="0"/>
+          </a:p>
+        </p:txBody>
+      </p:sp>
+      <p:sp>
+        <p:nvSpPr>
+          <p:cNvPr id="13" name="Shape 9"/>
           <p:cNvSpPr/>
           <p:nvPr/>
         </p:nvSpPr>
         <p:spPr>
           <a:xfrm>
-            <a:off x="457200" y="3026664"/>
+            <a:off x="6035040" y="1234440"/>
+            <a:ext cx="2606040" cy="2651760"/>
+          </a:xfrm>
+          <a:prstGeom prst="roundRect">
+            <a:avLst>
+              <a:gd name="adj" fmla="val 2807"/>
+            </a:avLst>
+          </a:prstGeom>
+          <a:solidFill>
+            <a:srgbClr val="FFFFFF"/>
+          </a:solidFill>
+          <a:ln w="9525">
+            <a:solidFill>
+              <a:srgbClr val="DCE2DF"/>
+            </a:solidFill>
+            <a:prstDash val="solid"/>
+          </a:ln>
+        </p:spPr>
+      </p:sp>
+      <p:sp>
+        <p:nvSpPr>
+          <p:cNvPr id="14" name="Shape 10"/>
+          <p:cNvSpPr/>
+          <p:nvPr/>
+        </p:nvSpPr>
+        <p:spPr>
+          <a:xfrm>
+            <a:off x="6263640" y="1463040"/>
             <a:ext cx="548640" cy="548640"/>
           </a:xfrm>
           <a:prstGeom prst="ellipse">
@@ -8678,7 +8336,7 @@
       </p:sp>
       <p:pic>
         <p:nvPicPr>
-          <p:cNvPr id="12" name="Image 2" descr="preencoded.png">    </p:cNvPr>
+          <p:cNvPr id="15" name="Image 2" descr="preencoded.png">    </p:cNvPr>
           <p:cNvPicPr>
             <a:picLocks noChangeAspect="1"/>
           </p:cNvPicPr>
@@ -8692,7 +8350,7 @@
         </p:blipFill>
         <p:spPr>
           <a:xfrm>
-            <a:off x="588874" y="3158338"/>
+            <a:off x="6395314" y="1594714"/>
             <a:ext cx="285293" cy="285293"/>
           </a:xfrm>
           <a:prstGeom prst="rect">
@@ -8702,14 +8360,14 @@
       </p:pic>
       <p:sp>
         <p:nvSpPr>
-          <p:cNvPr id="13" name="Text 8"/>
-          <p:cNvSpPr txBox="1"/>
-          <p:nvPr/>
-        </p:nvSpPr>
-        <p:spPr>
-          <a:xfrm>
-            <a:off x="1188720" y="2980944"/>
-            <a:ext cx="2377440" cy="640080"/>
+          <p:cNvPr id="16" name="Text 11"/>
+          <p:cNvSpPr txBox="1"/>
+          <p:nvPr/>
+        </p:nvSpPr>
+        <p:spPr>
+          <a:xfrm>
+            <a:off x="6263640" y="2148840"/>
+            <a:ext cx="2194560" cy="411480"/>
           </a:xfrm>
           <a:prstGeom prst="rect">
             <a:avLst/>
@@ -8733,7 +8391,7 @@
                 <a:ea typeface="Calibri" pitchFamily="34" charset="-122"/>
                 <a:cs typeface="Calibri" pitchFamily="34" charset="-120"/>
               </a:rPr>
-              <a:t>Real messages</a:t>
+              <a:t>Marketplace leads</a:t>
             </a:r>
             <a:endParaRPr lang="en-US" sz="1500" dirty="0"/>
           </a:p>
@@ -8741,14 +8399,75 @@
       </p:sp>
       <p:sp>
         <p:nvSpPr>
-          <p:cNvPr id="14" name="Text 9"/>
-          <p:cNvSpPr txBox="1"/>
-          <p:nvPr/>
-        </p:nvSpPr>
-        <p:spPr>
-          <a:xfrm>
-            <a:off x="3566160" y="2980944"/>
-            <a:ext cx="5120640" cy="640080"/>
+          <p:cNvPr id="17" name="Text 12"/>
+          <p:cNvSpPr txBox="1"/>
+          <p:nvPr/>
+        </p:nvSpPr>
+        <p:spPr>
+          <a:xfrm>
+            <a:off x="6263640" y="2606040"/>
+            <a:ext cx="2194560" cy="1188720"/>
+          </a:xfrm>
+          <a:prstGeom prst="rect">
+            <a:avLst/>
+          </a:prstGeom>
+          <a:noFill/>
+          <a:ln/>
+        </p:spPr>
+        <p:txBody>
+          <a:bodyPr wrap="square" lIns="0" tIns="0" rIns="0" bIns="0" rtlCol="0" anchor="t"/>
+          <a:lstStyle/>
+          <a:p>
+            <a:pPr indent="0" marL="0">
+              <a:buNone/>
+            </a:pPr>
+            <a:r>
+              <a:rPr lang="en-US" sz="1200" dirty="0">
+                <a:solidFill>
+                  <a:srgbClr val="5B6866"/>
+                </a:solidFill>
+                <a:latin typeface="Calibri" pitchFamily="34" charset="0"/>
+                <a:ea typeface="Calibri" pitchFamily="34" charset="-122"/>
+                <a:cs typeface="Calibri" pitchFamily="34" charset="-120"/>
+              </a:rPr>
+              <a:t>After the pilot: credits to respond to customer enquiries and owner invitations.</a:t>
+            </a:r>
+            <a:endParaRPr lang="en-US" sz="1200" dirty="0"/>
+          </a:p>
+        </p:txBody>
+      </p:sp>
+      <p:sp>
+        <p:nvSpPr>
+          <p:cNvPr id="18" name="Shape 13"/>
+          <p:cNvSpPr/>
+          <p:nvPr/>
+        </p:nvSpPr>
+        <p:spPr>
+          <a:xfrm>
+            <a:off x="457200" y="4114800"/>
+            <a:ext cx="8229600" cy="594360"/>
+          </a:xfrm>
+          <a:prstGeom prst="roundRect">
+            <a:avLst>
+              <a:gd name="adj" fmla="val 12308"/>
+            </a:avLst>
+          </a:prstGeom>
+          <a:solidFill>
+            <a:srgbClr val="DCEBE8"/>
+          </a:solidFill>
+          <a:ln/>
+        </p:spPr>
+      </p:sp>
+      <p:sp>
+        <p:nvSpPr>
+          <p:cNvPr id="19" name="Text 14"/>
+          <p:cNvSpPr txBox="1"/>
+          <p:nvPr/>
+        </p:nvSpPr>
+        <p:spPr>
+          <a:xfrm>
+            <a:off x="640080" y="4114800"/>
+            <a:ext cx="7863840" cy="594360"/>
           </a:xfrm>
           <a:prstGeom prst="rect">
             <a:avLst/>
@@ -8766,135 +8485,13 @@
             <a:r>
               <a:rPr lang="en-US" sz="1250" dirty="0">
                 <a:solidFill>
-                  <a:srgbClr val="5B6866"/>
-                </a:solidFill>
-                <a:latin typeface="Calibri" pitchFamily="34" charset="0"/>
-                <a:ea typeface="Calibri" pitchFamily="34" charset="-122"/>
-                <a:cs typeface="Calibri" pitchFamily="34" charset="-120"/>
-              </a:rPr>
-              <a:t>DLT sender ID and templates, WhatsApp Business, Google Maps accounts.</a:t>
-            </a:r>
-            <a:endParaRPr lang="en-US" sz="1250" dirty="0"/>
-          </a:p>
-        </p:txBody>
-      </p:sp>
-      <p:sp>
-        <p:nvSpPr>
-          <p:cNvPr id="15" name="Shape 10"/>
-          <p:cNvSpPr/>
-          <p:nvPr/>
-        </p:nvSpPr>
-        <p:spPr>
-          <a:xfrm>
-            <a:off x="457200" y="3922776"/>
-            <a:ext cx="548640" cy="548640"/>
-          </a:xfrm>
-          <a:prstGeom prst="ellipse">
-            <a:avLst/>
-          </a:prstGeom>
-          <a:solidFill>
-            <a:srgbClr val="0E3B43"/>
-          </a:solidFill>
-          <a:ln/>
-        </p:spPr>
-      </p:sp>
-      <p:pic>
-        <p:nvPicPr>
-          <p:cNvPr id="16" name="Image 3" descr="preencoded.png">    </p:cNvPr>
-          <p:cNvPicPr>
-            <a:picLocks noChangeAspect="1"/>
-          </p:cNvPicPr>
-          <p:nvPr/>
-        </p:nvPicPr>
-        <p:blipFill>
-          <a:blip r:embed="rId4"/>
-          <a:stretch>
-            <a:fillRect/>
-          </a:stretch>
-        </p:blipFill>
-        <p:spPr>
-          <a:xfrm>
-            <a:off x="588874" y="4054450"/>
-            <a:ext cx="285293" cy="285293"/>
-          </a:xfrm>
-          <a:prstGeom prst="rect">
-            <a:avLst/>
-          </a:prstGeom>
-        </p:spPr>
-      </p:pic>
-      <p:sp>
-        <p:nvSpPr>
-          <p:cNvPr id="17" name="Text 11"/>
-          <p:cNvSpPr txBox="1"/>
-          <p:nvPr/>
-        </p:nvSpPr>
-        <p:spPr>
-          <a:xfrm>
-            <a:off x="1188720" y="3877056"/>
-            <a:ext cx="2377440" cy="640080"/>
-          </a:xfrm>
-          <a:prstGeom prst="rect">
-            <a:avLst/>
-          </a:prstGeom>
-          <a:noFill/>
-          <a:ln/>
-        </p:spPr>
-        <p:txBody>
-          <a:bodyPr wrap="square" lIns="0" tIns="0" rIns="0" bIns="0" rtlCol="0" anchor="ctr"/>
-          <a:lstStyle/>
-          <a:p>
-            <a:pPr indent="0" marL="0">
-              <a:buNone/>
-            </a:pPr>
-            <a:r>
-              <a:rPr lang="en-US" sz="1500" b="1" dirty="0">
-                <a:solidFill>
-                  <a:srgbClr val="15201F"/>
-                </a:solidFill>
-                <a:latin typeface="Calibri" pitchFamily="34" charset="0"/>
-                <a:ea typeface="Calibri" pitchFamily="34" charset="-122"/>
-                <a:cs typeface="Calibri" pitchFamily="34" charset="-120"/>
-              </a:rPr>
-              <a:t>Measure &amp; price</a:t>
-            </a:r>
-            <a:endParaRPr lang="en-US" sz="1500" dirty="0"/>
-          </a:p>
-        </p:txBody>
-      </p:sp>
-      <p:sp>
-        <p:nvSpPr>
-          <p:cNvPr id="18" name="Text 12"/>
-          <p:cNvSpPr txBox="1"/>
-          <p:nvPr/>
-        </p:nvSpPr>
-        <p:spPr>
-          <a:xfrm>
-            <a:off x="3566160" y="3877056"/>
-            <a:ext cx="5120640" cy="640080"/>
-          </a:xfrm>
-          <a:prstGeom prst="rect">
-            <a:avLst/>
-          </a:prstGeom>
-          <a:noFill/>
-          <a:ln/>
-        </p:spPr>
-        <p:txBody>
-          <a:bodyPr wrap="square" lIns="0" tIns="0" rIns="0" bIns="0" rtlCol="0" anchor="ctr"/>
-          <a:lstStyle/>
-          <a:p>
-            <a:pPr indent="0" marL="0">
-              <a:buNone/>
-            </a:pPr>
-            <a:r>
-              <a:rPr lang="en-US" sz="1250" dirty="0">
-                <a:solidFill>
-                  <a:srgbClr val="5B6866"/>
-                </a:solidFill>
-                <a:latin typeface="Calibri" pitchFamily="34" charset="0"/>
-                <a:ea typeface="Calibri" pitchFamily="34" charset="-122"/>
-                <a:cs typeface="Calibri" pitchFamily="34" charset="-120"/>
-              </a:rPr>
-              <a:t>Time per flat, stale listings, visits per deal, willingness to pay → pricing decision.</a:t>
+                  <a:srgbClr val="0E3B43"/>
+                </a:solidFill>
+                <a:latin typeface="Calibri" pitchFamily="34" charset="0"/>
+                <a:ea typeface="Calibri" pitchFamily="34" charset="-122"/>
+                <a:cs typeface="Calibri" pitchFamily="34" charset="-120"/>
+              </a:rPr>
+              <a:t>Pilot: free for Thane West brokers. We measure time saved per flat, stale-listing rate, visits per customer — and what brokers would pay.</a:t>
             </a:r>
             <a:endParaRPr lang="en-US" sz="1250" dirty="0"/>
           </a:p>
@@ -9578,6 +9175,1486 @@
 <file path=ppt/slides/slide20.xml><?xml version="1.0" encoding="utf-8"?>
 <p:sld xmlns:a="http://schemas.openxmlformats.org/drawingml/2006/main" xmlns:r="http://schemas.openxmlformats.org/officeDocument/2006/relationships" xmlns:p="http://schemas.openxmlformats.org/presentationml/2006/main">
   <p:cSld name="Slide 20">
+    <p:bg>
+      <p:bgPr>
+        <a:solidFill>
+          <a:srgbClr val="F4F6F5"/>
+        </a:solidFill>
+      </p:bgPr>
+    </p:bg>
+    <p:spTree>
+      <p:nvGrpSpPr>
+        <p:cNvPr id="1" name=""/>
+        <p:cNvGrpSpPr/>
+        <p:nvPr/>
+      </p:nvGrpSpPr>
+      <p:grpSpPr>
+        <a:xfrm>
+          <a:off x="0" y="0"/>
+          <a:ext cx="0" cy="0"/>
+          <a:chOff x="0" y="0"/>
+          <a:chExt cx="0" cy="0"/>
+        </a:xfrm>
+      </p:grpSpPr>
+      <p:sp>
+        <p:nvSpPr>
+          <p:cNvPr id="2" name="Text 0"/>
+          <p:cNvSpPr txBox="1"/>
+          <p:nvPr/>
+        </p:nvSpPr>
+        <p:spPr>
+          <a:xfrm>
+            <a:off x="457200" y="292608"/>
+            <a:ext cx="8229600" cy="685800"/>
+          </a:xfrm>
+          <a:prstGeom prst="rect">
+            <a:avLst/>
+          </a:prstGeom>
+          <a:noFill/>
+          <a:ln/>
+        </p:spPr>
+        <p:txBody>
+          <a:bodyPr wrap="square" lIns="0" tIns="0" rIns="0" bIns="0" rtlCol="0" anchor="t"/>
+          <a:lstStyle/>
+          <a:p>
+            <a:pPr indent="0" marL="0">
+              <a:buNone/>
+            </a:pPr>
+            <a:r>
+              <a:rPr lang="en-US" sz="2500" b="1" dirty="0">
+                <a:solidFill>
+                  <a:srgbClr val="15201F"/>
+                </a:solidFill>
+                <a:latin typeface="Cambria" pitchFamily="34" charset="0"/>
+                <a:ea typeface="Cambria" pitchFamily="34" charset="-122"/>
+                <a:cs typeface="Cambria" pitchFamily="34" charset="-120"/>
+              </a:rPr>
+              <a:t>Where we are today</a:t>
+            </a:r>
+            <a:endParaRPr lang="en-US" sz="2500" dirty="0"/>
+          </a:p>
+        </p:txBody>
+      </p:sp>
+      <p:sp>
+        <p:nvSpPr>
+          <p:cNvPr id="3" name="Text 1"/>
+          <p:cNvSpPr txBox="1"/>
+          <p:nvPr/>
+        </p:nvSpPr>
+        <p:spPr>
+          <a:xfrm>
+            <a:off x="457200" y="1143000"/>
+            <a:ext cx="1920240" cy="777240"/>
+          </a:xfrm>
+          <a:prstGeom prst="rect">
+            <a:avLst/>
+          </a:prstGeom>
+          <a:noFill/>
+          <a:ln/>
+        </p:spPr>
+        <p:txBody>
+          <a:bodyPr wrap="square" lIns="0" tIns="0" rIns="0" bIns="0" rtlCol="0" anchor="ctr"/>
+          <a:lstStyle/>
+          <a:p>
+            <a:pPr indent="0" marL="0">
+              <a:buNone/>
+            </a:pPr>
+            <a:r>
+              <a:rPr lang="en-US" sz="4000" b="1" dirty="0">
+                <a:solidFill>
+                  <a:srgbClr val="0E3B43"/>
+                </a:solidFill>
+                <a:latin typeface="Cambria" pitchFamily="34" charset="0"/>
+                <a:ea typeface="Cambria" pitchFamily="34" charset="-122"/>
+                <a:cs typeface="Cambria" pitchFamily="34" charset="-120"/>
+              </a:rPr>
+              <a:t>225+</a:t>
+            </a:r>
+            <a:endParaRPr lang="en-US" sz="4000" dirty="0"/>
+          </a:p>
+        </p:txBody>
+      </p:sp>
+      <p:sp>
+        <p:nvSpPr>
+          <p:cNvPr id="4" name="Text 2"/>
+          <p:cNvSpPr txBox="1"/>
+          <p:nvPr/>
+        </p:nvSpPr>
+        <p:spPr>
+          <a:xfrm>
+            <a:off x="457200" y="1920240"/>
+            <a:ext cx="1920240" cy="502920"/>
+          </a:xfrm>
+          <a:prstGeom prst="rect">
+            <a:avLst/>
+          </a:prstGeom>
+          <a:noFill/>
+          <a:ln/>
+        </p:spPr>
+        <p:txBody>
+          <a:bodyPr wrap="square" lIns="0" tIns="0" rIns="0" bIns="0" rtlCol="0" anchor="t"/>
+          <a:lstStyle/>
+          <a:p>
+            <a:pPr indent="0" marL="0">
+              <a:buNone/>
+            </a:pPr>
+            <a:r>
+              <a:rPr lang="en-US" sz="1200" dirty="0">
+                <a:solidFill>
+                  <a:srgbClr val="5B6866"/>
+                </a:solidFill>
+                <a:latin typeface="Calibri" pitchFamily="34" charset="0"/>
+                <a:ea typeface="Calibri" pitchFamily="34" charset="-122"/>
+                <a:cs typeface="Calibri" pitchFamily="34" charset="-120"/>
+              </a:rPr>
+              <a:t>automated tests, all passing</a:t>
+            </a:r>
+            <a:endParaRPr lang="en-US" sz="1200" dirty="0"/>
+          </a:p>
+        </p:txBody>
+      </p:sp>
+      <p:sp>
+        <p:nvSpPr>
+          <p:cNvPr id="5" name="Text 3"/>
+          <p:cNvSpPr txBox="1"/>
+          <p:nvPr/>
+        </p:nvSpPr>
+        <p:spPr>
+          <a:xfrm>
+            <a:off x="2560320" y="1143000"/>
+            <a:ext cx="1920240" cy="777240"/>
+          </a:xfrm>
+          <a:prstGeom prst="rect">
+            <a:avLst/>
+          </a:prstGeom>
+          <a:noFill/>
+          <a:ln/>
+        </p:spPr>
+        <p:txBody>
+          <a:bodyPr wrap="square" lIns="0" tIns="0" rIns="0" bIns="0" rtlCol="0" anchor="ctr"/>
+          <a:lstStyle/>
+          <a:p>
+            <a:pPr indent="0" marL="0">
+              <a:buNone/>
+            </a:pPr>
+            <a:r>
+              <a:rPr lang="en-US" sz="4000" b="1" dirty="0">
+                <a:solidFill>
+                  <a:srgbClr val="0E3B43"/>
+                </a:solidFill>
+                <a:latin typeface="Cambria" pitchFamily="34" charset="0"/>
+                <a:ea typeface="Cambria" pitchFamily="34" charset="-122"/>
+                <a:cs typeface="Cambria" pitchFamily="34" charset="-120"/>
+              </a:rPr>
+              <a:t>4</a:t>
+            </a:r>
+            <a:endParaRPr lang="en-US" sz="4000" dirty="0"/>
+          </a:p>
+        </p:txBody>
+      </p:sp>
+      <p:sp>
+        <p:nvSpPr>
+          <p:cNvPr id="6" name="Text 4"/>
+          <p:cNvSpPr txBox="1"/>
+          <p:nvPr/>
+        </p:nvSpPr>
+        <p:spPr>
+          <a:xfrm>
+            <a:off x="2560320" y="1920240"/>
+            <a:ext cx="1920240" cy="502920"/>
+          </a:xfrm>
+          <a:prstGeom prst="rect">
+            <a:avLst/>
+          </a:prstGeom>
+          <a:noFill/>
+          <a:ln/>
+        </p:spPr>
+        <p:txBody>
+          <a:bodyPr wrap="square" lIns="0" tIns="0" rIns="0" bIns="0" rtlCol="0" anchor="t"/>
+          <a:lstStyle/>
+          <a:p>
+            <a:pPr indent="0" marL="0">
+              <a:buNone/>
+            </a:pPr>
+            <a:r>
+              <a:rPr lang="en-US" sz="1200" dirty="0">
+                <a:solidFill>
+                  <a:srgbClr val="5B6866"/>
+                </a:solidFill>
+                <a:latin typeface="Calibri" pitchFamily="34" charset="0"/>
+                <a:ea typeface="Calibri" pitchFamily="34" charset="-122"/>
+                <a:cs typeface="Calibri" pitchFamily="34" charset="-120"/>
+              </a:rPr>
+              <a:t>app modes: broker, field staff, owner, customer</a:t>
+            </a:r>
+            <a:endParaRPr lang="en-US" sz="1200" dirty="0"/>
+          </a:p>
+        </p:txBody>
+      </p:sp>
+      <p:sp>
+        <p:nvSpPr>
+          <p:cNvPr id="7" name="Text 5"/>
+          <p:cNvSpPr txBox="1"/>
+          <p:nvPr/>
+        </p:nvSpPr>
+        <p:spPr>
+          <a:xfrm>
+            <a:off x="4663440" y="1143000"/>
+            <a:ext cx="1920240" cy="777240"/>
+          </a:xfrm>
+          <a:prstGeom prst="rect">
+            <a:avLst/>
+          </a:prstGeom>
+          <a:noFill/>
+          <a:ln/>
+        </p:spPr>
+        <p:txBody>
+          <a:bodyPr wrap="square" lIns="0" tIns="0" rIns="0" bIns="0" rtlCol="0" anchor="ctr"/>
+          <a:lstStyle/>
+          <a:p>
+            <a:pPr indent="0" marL="0">
+              <a:buNone/>
+            </a:pPr>
+            <a:r>
+              <a:rPr lang="en-US" sz="4000" b="1" dirty="0">
+                <a:solidFill>
+                  <a:srgbClr val="0E3B43"/>
+                </a:solidFill>
+                <a:latin typeface="Cambria" pitchFamily="34" charset="0"/>
+                <a:ea typeface="Cambria" pitchFamily="34" charset="-122"/>
+                <a:cs typeface="Cambria" pitchFamily="34" charset="-120"/>
+              </a:rPr>
+              <a:t>200</a:t>
+            </a:r>
+            <a:endParaRPr lang="en-US" sz="4000" dirty="0"/>
+          </a:p>
+        </p:txBody>
+      </p:sp>
+      <p:sp>
+        <p:nvSpPr>
+          <p:cNvPr id="8" name="Text 6"/>
+          <p:cNvSpPr txBox="1"/>
+          <p:nvPr/>
+        </p:nvSpPr>
+        <p:spPr>
+          <a:xfrm>
+            <a:off x="4663440" y="1920240"/>
+            <a:ext cx="1920240" cy="502920"/>
+          </a:xfrm>
+          <a:prstGeom prst="rect">
+            <a:avLst/>
+          </a:prstGeom>
+          <a:noFill/>
+          <a:ln/>
+        </p:spPr>
+        <p:txBody>
+          <a:bodyPr wrap="square" lIns="0" tIns="0" rIns="0" bIns="0" rtlCol="0" anchor="t"/>
+          <a:lstStyle/>
+          <a:p>
+            <a:pPr indent="0" marL="0">
+              <a:buNone/>
+            </a:pPr>
+            <a:r>
+              <a:rPr lang="en-US" sz="1200" dirty="0">
+                <a:solidFill>
+                  <a:srgbClr val="5B6866"/>
+                </a:solidFill>
+                <a:latin typeface="Calibri" pitchFamily="34" charset="0"/>
+                <a:ea typeface="Calibri" pitchFamily="34" charset="-122"/>
+                <a:cs typeface="Calibri" pitchFamily="34" charset="-120"/>
+              </a:rPr>
+              <a:t>flat attributes — only 17 essential</a:t>
+            </a:r>
+            <a:endParaRPr lang="en-US" sz="1200" dirty="0"/>
+          </a:p>
+        </p:txBody>
+      </p:sp>
+      <p:sp>
+        <p:nvSpPr>
+          <p:cNvPr id="9" name="Text 7"/>
+          <p:cNvSpPr txBox="1"/>
+          <p:nvPr/>
+        </p:nvSpPr>
+        <p:spPr>
+          <a:xfrm>
+            <a:off x="6766560" y="1143000"/>
+            <a:ext cx="1920240" cy="777240"/>
+          </a:xfrm>
+          <a:prstGeom prst="rect">
+            <a:avLst/>
+          </a:prstGeom>
+          <a:noFill/>
+          <a:ln/>
+        </p:spPr>
+        <p:txBody>
+          <a:bodyPr wrap="square" lIns="0" tIns="0" rIns="0" bIns="0" rtlCol="0" anchor="ctr"/>
+          <a:lstStyle/>
+          <a:p>
+            <a:pPr indent="0" marL="0">
+              <a:buNone/>
+            </a:pPr>
+            <a:r>
+              <a:rPr lang="en-US" sz="4000" b="1" dirty="0">
+                <a:solidFill>
+                  <a:srgbClr val="0E3B43"/>
+                </a:solidFill>
+                <a:latin typeface="Cambria" pitchFamily="34" charset="0"/>
+                <a:ea typeface="Cambria" pitchFamily="34" charset="-122"/>
+                <a:cs typeface="Cambria" pitchFamily="34" charset="-120"/>
+              </a:rPr>
+              <a:t>Live</a:t>
+            </a:r>
+            <a:endParaRPr lang="en-US" sz="4000" dirty="0"/>
+          </a:p>
+        </p:txBody>
+      </p:sp>
+      <p:sp>
+        <p:nvSpPr>
+          <p:cNvPr id="10" name="Text 8"/>
+          <p:cNvSpPr txBox="1"/>
+          <p:nvPr/>
+        </p:nvSpPr>
+        <p:spPr>
+          <a:xfrm>
+            <a:off x="6766560" y="1920240"/>
+            <a:ext cx="1920240" cy="502920"/>
+          </a:xfrm>
+          <a:prstGeom prst="rect">
+            <a:avLst/>
+          </a:prstGeom>
+          <a:noFill/>
+          <a:ln/>
+        </p:spPr>
+        <p:txBody>
+          <a:bodyPr wrap="square" lIns="0" tIns="0" rIns="0" bIns="0" rtlCol="0" anchor="t"/>
+          <a:lstStyle/>
+          <a:p>
+            <a:pPr indent="0" marL="0">
+              <a:buNone/>
+            </a:pPr>
+            <a:r>
+              <a:rPr lang="en-US" sz="1200" dirty="0">
+                <a:solidFill>
+                  <a:srgbClr val="5B6866"/>
+                </a:solidFill>
+                <a:latin typeface="Calibri" pitchFamily="34" charset="0"/>
+                <a:ea typeface="Calibri" pitchFamily="34" charset="-122"/>
+                <a:cs typeface="Calibri" pitchFamily="34" charset="-120"/>
+              </a:rPr>
+              <a:t>Android test app &amp; online demo</a:t>
+            </a:r>
+            <a:endParaRPr lang="en-US" sz="1200" dirty="0"/>
+          </a:p>
+        </p:txBody>
+      </p:sp>
+      <p:sp>
+        <p:nvSpPr>
+          <p:cNvPr id="11" name="Shape 9"/>
+          <p:cNvSpPr/>
+          <p:nvPr/>
+        </p:nvSpPr>
+        <p:spPr>
+          <a:xfrm>
+            <a:off x="731520" y="3246120"/>
+            <a:ext cx="7680960" cy="0"/>
+          </a:xfrm>
+          <a:prstGeom prst="line">
+            <a:avLst/>
+          </a:prstGeom>
+          <a:noFill/>
+          <a:ln w="25400">
+            <a:solidFill>
+              <a:srgbClr val="C9D2CF"/>
+            </a:solidFill>
+            <a:prstDash val="solid"/>
+          </a:ln>
+        </p:spPr>
+      </p:sp>
+      <p:sp>
+        <p:nvSpPr>
+          <p:cNvPr id="12" name="Shape 10"/>
+          <p:cNvSpPr/>
+          <p:nvPr/>
+        </p:nvSpPr>
+        <p:spPr>
+          <a:xfrm>
+            <a:off x="594360" y="3108960"/>
+            <a:ext cx="274320" cy="274320"/>
+          </a:xfrm>
+          <a:prstGeom prst="ellipse">
+            <a:avLst/>
+          </a:prstGeom>
+          <a:solidFill>
+            <a:srgbClr val="1E7A46"/>
+          </a:solidFill>
+          <a:ln w="25400">
+            <a:solidFill>
+              <a:srgbClr val="FFFFFF"/>
+            </a:solidFill>
+            <a:prstDash val="solid"/>
+          </a:ln>
+        </p:spPr>
+      </p:sp>
+      <p:sp>
+        <p:nvSpPr>
+          <p:cNvPr id="13" name="Text 11"/>
+          <p:cNvSpPr txBox="1"/>
+          <p:nvPr/>
+        </p:nvSpPr>
+        <p:spPr>
+          <a:xfrm>
+            <a:off x="457200" y="3474720"/>
+            <a:ext cx="1554480" cy="274320"/>
+          </a:xfrm>
+          <a:prstGeom prst="rect">
+            <a:avLst/>
+          </a:prstGeom>
+          <a:noFill/>
+          <a:ln/>
+        </p:spPr>
+        <p:txBody>
+          <a:bodyPr wrap="square" lIns="0" tIns="0" rIns="0" bIns="0" rtlCol="0" anchor="ctr"/>
+          <a:lstStyle/>
+          <a:p>
+            <a:pPr indent="0" marL="0">
+              <a:buNone/>
+            </a:pPr>
+            <a:r>
+              <a:rPr lang="en-US" sz="1100" b="1" dirty="0">
+                <a:solidFill>
+                  <a:srgbClr val="1E7A46"/>
+                </a:solidFill>
+                <a:latin typeface="Calibri" pitchFamily="34" charset="0"/>
+                <a:ea typeface="Calibri" pitchFamily="34" charset="-122"/>
+                <a:cs typeface="Calibri" pitchFamily="34" charset="-120"/>
+              </a:rPr>
+              <a:t>Done</a:t>
+            </a:r>
+            <a:endParaRPr lang="en-US" sz="1100" dirty="0"/>
+          </a:p>
+        </p:txBody>
+      </p:sp>
+      <p:sp>
+        <p:nvSpPr>
+          <p:cNvPr id="14" name="Text 12"/>
+          <p:cNvSpPr txBox="1"/>
+          <p:nvPr/>
+        </p:nvSpPr>
+        <p:spPr>
+          <a:xfrm>
+            <a:off x="457200" y="3749040"/>
+            <a:ext cx="1554480" cy="731520"/>
+          </a:xfrm>
+          <a:prstGeom prst="rect">
+            <a:avLst/>
+          </a:prstGeom>
+          <a:noFill/>
+          <a:ln/>
+        </p:spPr>
+        <p:txBody>
+          <a:bodyPr wrap="square" lIns="0" tIns="0" rIns="0" bIns="0" rtlCol="0" anchor="t"/>
+          <a:lstStyle/>
+          <a:p>
+            <a:pPr indent="0" marL="0">
+              <a:buNone/>
+            </a:pPr>
+            <a:r>
+              <a:rPr lang="en-US" sz="1250" dirty="0">
+                <a:solidFill>
+                  <a:srgbClr val="15201F"/>
+                </a:solidFill>
+                <a:latin typeface="Calibri" pitchFamily="34" charset="0"/>
+                <a:ea typeface="Calibri" pitchFamily="34" charset="-122"/>
+                <a:cs typeface="Calibri" pitchFamily="34" charset="-120"/>
+              </a:rPr>
+              <a:t>Build the core</a:t>
+            </a:r>
+            <a:endParaRPr lang="en-US" sz="1250" dirty="0"/>
+          </a:p>
+        </p:txBody>
+      </p:sp>
+      <p:sp>
+        <p:nvSpPr>
+          <p:cNvPr id="15" name="Shape 13"/>
+          <p:cNvSpPr/>
+          <p:nvPr/>
+        </p:nvSpPr>
+        <p:spPr>
+          <a:xfrm>
+            <a:off x="2240280" y="3108960"/>
+            <a:ext cx="274320" cy="274320"/>
+          </a:xfrm>
+          <a:prstGeom prst="ellipse">
+            <a:avLst/>
+          </a:prstGeom>
+          <a:solidFill>
+            <a:srgbClr val="E8A33D"/>
+          </a:solidFill>
+          <a:ln w="25400">
+            <a:solidFill>
+              <a:srgbClr val="FFFFFF"/>
+            </a:solidFill>
+            <a:prstDash val="solid"/>
+          </a:ln>
+        </p:spPr>
+      </p:sp>
+      <p:sp>
+        <p:nvSpPr>
+          <p:cNvPr id="16" name="Text 14"/>
+          <p:cNvSpPr txBox="1"/>
+          <p:nvPr/>
+        </p:nvSpPr>
+        <p:spPr>
+          <a:xfrm>
+            <a:off x="2103120" y="3474720"/>
+            <a:ext cx="1554480" cy="274320"/>
+          </a:xfrm>
+          <a:prstGeom prst="rect">
+            <a:avLst/>
+          </a:prstGeom>
+          <a:noFill/>
+          <a:ln/>
+        </p:spPr>
+        <p:txBody>
+          <a:bodyPr wrap="square" lIns="0" tIns="0" rIns="0" bIns="0" rtlCol="0" anchor="ctr"/>
+          <a:lstStyle/>
+          <a:p>
+            <a:pPr indent="0" marL="0">
+              <a:buNone/>
+            </a:pPr>
+            <a:r>
+              <a:rPr lang="en-US" sz="1100" b="1" dirty="0">
+                <a:solidFill>
+                  <a:srgbClr val="E8A33D"/>
+                </a:solidFill>
+                <a:latin typeface="Calibri" pitchFamily="34" charset="0"/>
+                <a:ea typeface="Calibri" pitchFamily="34" charset="-122"/>
+                <a:cs typeface="Calibri" pitchFamily="34" charset="-120"/>
+              </a:rPr>
+              <a:t>Now</a:t>
+            </a:r>
+            <a:endParaRPr lang="en-US" sz="1100" dirty="0"/>
+          </a:p>
+        </p:txBody>
+      </p:sp>
+      <p:sp>
+        <p:nvSpPr>
+          <p:cNvPr id="17" name="Text 15"/>
+          <p:cNvSpPr txBox="1"/>
+          <p:nvPr/>
+        </p:nvSpPr>
+        <p:spPr>
+          <a:xfrm>
+            <a:off x="2103120" y="3749040"/>
+            <a:ext cx="1554480" cy="731520"/>
+          </a:xfrm>
+          <a:prstGeom prst="rect">
+            <a:avLst/>
+          </a:prstGeom>
+          <a:noFill/>
+          <a:ln/>
+        </p:spPr>
+        <p:txBody>
+          <a:bodyPr wrap="square" lIns="0" tIns="0" rIns="0" bIns="0" rtlCol="0" anchor="t"/>
+          <a:lstStyle/>
+          <a:p>
+            <a:pPr indent="0" marL="0">
+              <a:buNone/>
+            </a:pPr>
+            <a:r>
+              <a:rPr lang="en-US" sz="1250" dirty="0">
+                <a:solidFill>
+                  <a:srgbClr val="15201F"/>
+                </a:solidFill>
+                <a:latin typeface="Calibri" pitchFamily="34" charset="0"/>
+                <a:ea typeface="Calibri" pitchFamily="34" charset="-122"/>
+                <a:cs typeface="Calibri" pitchFamily="34" charset="-120"/>
+              </a:rPr>
+              <a:t>Clean Thane West data</a:t>
+            </a:r>
+            <a:endParaRPr lang="en-US" sz="1250" dirty="0"/>
+          </a:p>
+        </p:txBody>
+      </p:sp>
+      <p:sp>
+        <p:nvSpPr>
+          <p:cNvPr id="18" name="Shape 16"/>
+          <p:cNvSpPr/>
+          <p:nvPr/>
+        </p:nvSpPr>
+        <p:spPr>
+          <a:xfrm>
+            <a:off x="3886200" y="3108960"/>
+            <a:ext cx="274320" cy="274320"/>
+          </a:xfrm>
+          <a:prstGeom prst="ellipse">
+            <a:avLst/>
+          </a:prstGeom>
+          <a:solidFill>
+            <a:srgbClr val="0E3B43"/>
+          </a:solidFill>
+          <a:ln w="25400">
+            <a:solidFill>
+              <a:srgbClr val="FFFFFF"/>
+            </a:solidFill>
+            <a:prstDash val="solid"/>
+          </a:ln>
+        </p:spPr>
+      </p:sp>
+      <p:sp>
+        <p:nvSpPr>
+          <p:cNvPr id="19" name="Text 17"/>
+          <p:cNvSpPr txBox="1"/>
+          <p:nvPr/>
+        </p:nvSpPr>
+        <p:spPr>
+          <a:xfrm>
+            <a:off x="3749040" y="3474720"/>
+            <a:ext cx="1554480" cy="274320"/>
+          </a:xfrm>
+          <a:prstGeom prst="rect">
+            <a:avLst/>
+          </a:prstGeom>
+          <a:noFill/>
+          <a:ln/>
+        </p:spPr>
+        <p:txBody>
+          <a:bodyPr wrap="square" lIns="0" tIns="0" rIns="0" bIns="0" rtlCol="0" anchor="ctr"/>
+          <a:lstStyle/>
+          <a:p>
+            <a:pPr indent="0" marL="0">
+              <a:buNone/>
+            </a:pPr>
+            <a:r>
+              <a:rPr lang="en-US" sz="1100" b="1" dirty="0">
+                <a:solidFill>
+                  <a:srgbClr val="0E3B43"/>
+                </a:solidFill>
+                <a:latin typeface="Calibri" pitchFamily="34" charset="0"/>
+                <a:ea typeface="Calibri" pitchFamily="34" charset="-122"/>
+                <a:cs typeface="Calibri" pitchFamily="34" charset="-120"/>
+              </a:rPr>
+              <a:t>Next</a:t>
+            </a:r>
+            <a:endParaRPr lang="en-US" sz="1100" dirty="0"/>
+          </a:p>
+        </p:txBody>
+      </p:sp>
+      <p:sp>
+        <p:nvSpPr>
+          <p:cNvPr id="20" name="Text 18"/>
+          <p:cNvSpPr txBox="1"/>
+          <p:nvPr/>
+        </p:nvSpPr>
+        <p:spPr>
+          <a:xfrm>
+            <a:off x="3749040" y="3749040"/>
+            <a:ext cx="1554480" cy="731520"/>
+          </a:xfrm>
+          <a:prstGeom prst="rect">
+            <a:avLst/>
+          </a:prstGeom>
+          <a:noFill/>
+          <a:ln/>
+        </p:spPr>
+        <p:txBody>
+          <a:bodyPr wrap="square" lIns="0" tIns="0" rIns="0" bIns="0" rtlCol="0" anchor="t"/>
+          <a:lstStyle/>
+          <a:p>
+            <a:pPr indent="0" marL="0">
+              <a:buNone/>
+            </a:pPr>
+            <a:r>
+              <a:rPr lang="en-US" sz="1250" dirty="0">
+                <a:solidFill>
+                  <a:srgbClr val="15201F"/>
+                </a:solidFill>
+                <a:latin typeface="Calibri" pitchFamily="34" charset="0"/>
+                <a:ea typeface="Calibri" pitchFamily="34" charset="-122"/>
+                <a:cs typeface="Calibri" pitchFamily="34" charset="-120"/>
+              </a:rPr>
+              <a:t>Pilot broker on the real app</a:t>
+            </a:r>
+            <a:endParaRPr lang="en-US" sz="1250" dirty="0"/>
+          </a:p>
+        </p:txBody>
+      </p:sp>
+      <p:sp>
+        <p:nvSpPr>
+          <p:cNvPr id="21" name="Shape 19"/>
+          <p:cNvSpPr/>
+          <p:nvPr/>
+        </p:nvSpPr>
+        <p:spPr>
+          <a:xfrm>
+            <a:off x="5532120" y="3108960"/>
+            <a:ext cx="274320" cy="274320"/>
+          </a:xfrm>
+          <a:prstGeom prst="ellipse">
+            <a:avLst/>
+          </a:prstGeom>
+          <a:solidFill>
+            <a:srgbClr val="5B6866"/>
+          </a:solidFill>
+          <a:ln w="25400">
+            <a:solidFill>
+              <a:srgbClr val="FFFFFF"/>
+            </a:solidFill>
+            <a:prstDash val="solid"/>
+          </a:ln>
+        </p:spPr>
+      </p:sp>
+      <p:sp>
+        <p:nvSpPr>
+          <p:cNvPr id="22" name="Text 20"/>
+          <p:cNvSpPr txBox="1"/>
+          <p:nvPr/>
+        </p:nvSpPr>
+        <p:spPr>
+          <a:xfrm>
+            <a:off x="5394960" y="3474720"/>
+            <a:ext cx="1554480" cy="274320"/>
+          </a:xfrm>
+          <a:prstGeom prst="rect">
+            <a:avLst/>
+          </a:prstGeom>
+          <a:noFill/>
+          <a:ln/>
+        </p:spPr>
+        <p:txBody>
+          <a:bodyPr wrap="square" lIns="0" tIns="0" rIns="0" bIns="0" rtlCol="0" anchor="ctr"/>
+          <a:lstStyle/>
+          <a:p>
+            <a:pPr indent="0" marL="0">
+              <a:buNone/>
+            </a:pPr>
+            <a:r>
+              <a:rPr lang="en-US" sz="1100" b="1" dirty="0">
+                <a:solidFill>
+                  <a:srgbClr val="5B6866"/>
+                </a:solidFill>
+                <a:latin typeface="Calibri" pitchFamily="34" charset="0"/>
+                <a:ea typeface="Calibri" pitchFamily="34" charset="-122"/>
+                <a:cs typeface="Calibri" pitchFamily="34" charset="-120"/>
+              </a:rPr>
+              <a:t>Then</a:t>
+            </a:r>
+            <a:endParaRPr lang="en-US" sz="1100" dirty="0"/>
+          </a:p>
+        </p:txBody>
+      </p:sp>
+      <p:sp>
+        <p:nvSpPr>
+          <p:cNvPr id="23" name="Text 21"/>
+          <p:cNvSpPr txBox="1"/>
+          <p:nvPr/>
+        </p:nvSpPr>
+        <p:spPr>
+          <a:xfrm>
+            <a:off x="5394960" y="3749040"/>
+            <a:ext cx="1554480" cy="731520"/>
+          </a:xfrm>
+          <a:prstGeom prst="rect">
+            <a:avLst/>
+          </a:prstGeom>
+          <a:noFill/>
+          <a:ln/>
+        </p:spPr>
+        <p:txBody>
+          <a:bodyPr wrap="square" lIns="0" tIns="0" rIns="0" bIns="0" rtlCol="0" anchor="t"/>
+          <a:lstStyle/>
+          <a:p>
+            <a:pPr indent="0" marL="0">
+              <a:buNone/>
+            </a:pPr>
+            <a:r>
+              <a:rPr lang="en-US" sz="1250" dirty="0">
+                <a:solidFill>
+                  <a:srgbClr val="15201F"/>
+                </a:solidFill>
+                <a:latin typeface="Calibri" pitchFamily="34" charset="0"/>
+                <a:ea typeface="Calibri" pitchFamily="34" charset="-122"/>
+                <a:cs typeface="Calibri" pitchFamily="34" charset="-120"/>
+              </a:rPr>
+              <a:t>Measure the pilot</a:t>
+            </a:r>
+            <a:endParaRPr lang="en-US" sz="1250" dirty="0"/>
+          </a:p>
+        </p:txBody>
+      </p:sp>
+      <p:sp>
+        <p:nvSpPr>
+          <p:cNvPr id="24" name="Shape 22"/>
+          <p:cNvSpPr/>
+          <p:nvPr/>
+        </p:nvSpPr>
+        <p:spPr>
+          <a:xfrm>
+            <a:off x="7178040" y="3108960"/>
+            <a:ext cx="274320" cy="274320"/>
+          </a:xfrm>
+          <a:prstGeom prst="ellipse">
+            <a:avLst/>
+          </a:prstGeom>
+          <a:solidFill>
+            <a:srgbClr val="5B6866"/>
+          </a:solidFill>
+          <a:ln w="25400">
+            <a:solidFill>
+              <a:srgbClr val="FFFFFF"/>
+            </a:solidFill>
+            <a:prstDash val="solid"/>
+          </a:ln>
+        </p:spPr>
+      </p:sp>
+      <p:sp>
+        <p:nvSpPr>
+          <p:cNvPr id="25" name="Text 23"/>
+          <p:cNvSpPr txBox="1"/>
+          <p:nvPr/>
+        </p:nvSpPr>
+        <p:spPr>
+          <a:xfrm>
+            <a:off x="7040880" y="3474720"/>
+            <a:ext cx="1554480" cy="274320"/>
+          </a:xfrm>
+          <a:prstGeom prst="rect">
+            <a:avLst/>
+          </a:prstGeom>
+          <a:noFill/>
+          <a:ln/>
+        </p:spPr>
+        <p:txBody>
+          <a:bodyPr wrap="square" lIns="0" tIns="0" rIns="0" bIns="0" rtlCol="0" anchor="ctr"/>
+          <a:lstStyle/>
+          <a:p>
+            <a:pPr indent="0" marL="0">
+              <a:buNone/>
+            </a:pPr>
+            <a:r>
+              <a:rPr lang="en-US" sz="1100" b="1" dirty="0">
+                <a:solidFill>
+                  <a:srgbClr val="5B6866"/>
+                </a:solidFill>
+                <a:latin typeface="Calibri" pitchFamily="34" charset="0"/>
+                <a:ea typeface="Calibri" pitchFamily="34" charset="-122"/>
+                <a:cs typeface="Calibri" pitchFamily="34" charset="-120"/>
+              </a:rPr>
+              <a:t>Later</a:t>
+            </a:r>
+            <a:endParaRPr lang="en-US" sz="1100" dirty="0"/>
+          </a:p>
+        </p:txBody>
+      </p:sp>
+      <p:sp>
+        <p:nvSpPr>
+          <p:cNvPr id="26" name="Text 24"/>
+          <p:cNvSpPr txBox="1"/>
+          <p:nvPr/>
+        </p:nvSpPr>
+        <p:spPr>
+          <a:xfrm>
+            <a:off x="7040880" y="3749040"/>
+            <a:ext cx="1554480" cy="731520"/>
+          </a:xfrm>
+          <a:prstGeom prst="rect">
+            <a:avLst/>
+          </a:prstGeom>
+          <a:noFill/>
+          <a:ln/>
+        </p:spPr>
+        <p:txBody>
+          <a:bodyPr wrap="square" lIns="0" tIns="0" rIns="0" bIns="0" rtlCol="0" anchor="t"/>
+          <a:lstStyle/>
+          <a:p>
+            <a:pPr indent="0" marL="0">
+              <a:buNone/>
+            </a:pPr>
+            <a:r>
+              <a:rPr lang="en-US" sz="1250" dirty="0">
+                <a:solidFill>
+                  <a:srgbClr val="15201F"/>
+                </a:solidFill>
+                <a:latin typeface="Calibri" pitchFamily="34" charset="0"/>
+                <a:ea typeface="Calibri" pitchFamily="34" charset="-122"/>
+                <a:cs typeface="Calibri" pitchFamily="34" charset="-120"/>
+              </a:rPr>
+              <a:t>More brokers → marketplace</a:t>
+            </a:r>
+            <a:endParaRPr lang="en-US" sz="1250" dirty="0"/>
+          </a:p>
+        </p:txBody>
+      </p:sp>
+    </p:spTree>
+  </p:cSld>
+  <p:clrMapOvr>
+    <a:masterClrMapping/>
+  </p:clrMapOvr>
+</p:sld>
+</file>
+
+<file path=ppt/slides/slide21.xml><?xml version="1.0" encoding="utf-8"?>
+<p:sld xmlns:a="http://schemas.openxmlformats.org/drawingml/2006/main" xmlns:r="http://schemas.openxmlformats.org/officeDocument/2006/relationships" xmlns:p="http://schemas.openxmlformats.org/presentationml/2006/main">
+  <p:cSld name="Slide 21">
+    <p:bg>
+      <p:bgPr>
+        <a:solidFill>
+          <a:srgbClr val="F4F6F5"/>
+        </a:solidFill>
+      </p:bgPr>
+    </p:bg>
+    <p:spTree>
+      <p:nvGrpSpPr>
+        <p:cNvPr id="1" name=""/>
+        <p:cNvGrpSpPr/>
+        <p:nvPr/>
+      </p:nvGrpSpPr>
+      <p:grpSpPr>
+        <a:xfrm>
+          <a:off x="0" y="0"/>
+          <a:ext cx="0" cy="0"/>
+          <a:chOff x="0" y="0"/>
+          <a:chExt cx="0" cy="0"/>
+        </a:xfrm>
+      </p:grpSpPr>
+      <p:sp>
+        <p:nvSpPr>
+          <p:cNvPr id="2" name="Text 0"/>
+          <p:cNvSpPr txBox="1"/>
+          <p:nvPr/>
+        </p:nvSpPr>
+        <p:spPr>
+          <a:xfrm>
+            <a:off x="457200" y="292608"/>
+            <a:ext cx="8229600" cy="685800"/>
+          </a:xfrm>
+          <a:prstGeom prst="rect">
+            <a:avLst/>
+          </a:prstGeom>
+          <a:noFill/>
+          <a:ln/>
+        </p:spPr>
+        <p:txBody>
+          <a:bodyPr wrap="square" lIns="0" tIns="0" rIns="0" bIns="0" rtlCol="0" anchor="t"/>
+          <a:lstStyle/>
+          <a:p>
+            <a:pPr indent="0" marL="0">
+              <a:buNone/>
+            </a:pPr>
+            <a:r>
+              <a:rPr lang="en-US" sz="2500" b="1" dirty="0">
+                <a:solidFill>
+                  <a:srgbClr val="15201F"/>
+                </a:solidFill>
+                <a:latin typeface="Cambria" pitchFamily="34" charset="0"/>
+                <a:ea typeface="Cambria" pitchFamily="34" charset="-122"/>
+                <a:cs typeface="Cambria" pitchFamily="34" charset="-120"/>
+              </a:rPr>
+              <a:t>Next 90 days</a:t>
+            </a:r>
+            <a:endParaRPr lang="en-US" sz="2500" dirty="0"/>
+          </a:p>
+        </p:txBody>
+      </p:sp>
+      <p:sp>
+        <p:nvSpPr>
+          <p:cNvPr id="3" name="Shape 1"/>
+          <p:cNvSpPr/>
+          <p:nvPr/>
+        </p:nvSpPr>
+        <p:spPr>
+          <a:xfrm>
+            <a:off x="457200" y="1234440"/>
+            <a:ext cx="548640" cy="548640"/>
+          </a:xfrm>
+          <a:prstGeom prst="ellipse">
+            <a:avLst/>
+          </a:prstGeom>
+          <a:solidFill>
+            <a:srgbClr val="0E3B43"/>
+          </a:solidFill>
+          <a:ln/>
+        </p:spPr>
+      </p:sp>
+      <p:pic>
+        <p:nvPicPr>
+          <p:cNvPr id="4" name="Image 0" descr="preencoded.png">    </p:cNvPr>
+          <p:cNvPicPr>
+            <a:picLocks noChangeAspect="1"/>
+          </p:cNvPicPr>
+          <p:nvPr/>
+        </p:nvPicPr>
+        <p:blipFill>
+          <a:blip r:embed="rId1"/>
+          <a:stretch>
+            <a:fillRect/>
+          </a:stretch>
+        </p:blipFill>
+        <p:spPr>
+          <a:xfrm>
+            <a:off x="588874" y="1366114"/>
+            <a:ext cx="285293" cy="285293"/>
+          </a:xfrm>
+          <a:prstGeom prst="rect">
+            <a:avLst/>
+          </a:prstGeom>
+        </p:spPr>
+      </p:pic>
+      <p:sp>
+        <p:nvSpPr>
+          <p:cNvPr id="5" name="Text 2"/>
+          <p:cNvSpPr txBox="1"/>
+          <p:nvPr/>
+        </p:nvSpPr>
+        <p:spPr>
+          <a:xfrm>
+            <a:off x="1188720" y="1188720"/>
+            <a:ext cx="2377440" cy="640080"/>
+          </a:xfrm>
+          <a:prstGeom prst="rect">
+            <a:avLst/>
+          </a:prstGeom>
+          <a:noFill/>
+          <a:ln/>
+        </p:spPr>
+        <p:txBody>
+          <a:bodyPr wrap="square" lIns="0" tIns="0" rIns="0" bIns="0" rtlCol="0" anchor="ctr"/>
+          <a:lstStyle/>
+          <a:p>
+            <a:pPr indent="0" marL="0">
+              <a:buNone/>
+            </a:pPr>
+            <a:r>
+              <a:rPr lang="en-US" sz="1500" b="1" dirty="0">
+                <a:solidFill>
+                  <a:srgbClr val="15201F"/>
+                </a:solidFill>
+                <a:latin typeface="Calibri" pitchFamily="34" charset="0"/>
+                <a:ea typeface="Calibri" pitchFamily="34" charset="-122"/>
+                <a:cs typeface="Calibri" pitchFamily="34" charset="-120"/>
+              </a:rPr>
+              <a:t>Thane West data</a:t>
+            </a:r>
+            <a:endParaRPr lang="en-US" sz="1500" dirty="0"/>
+          </a:p>
+        </p:txBody>
+      </p:sp>
+      <p:sp>
+        <p:nvSpPr>
+          <p:cNvPr id="6" name="Text 3"/>
+          <p:cNvSpPr txBox="1"/>
+          <p:nvPr/>
+        </p:nvSpPr>
+        <p:spPr>
+          <a:xfrm>
+            <a:off x="3566160" y="1188720"/>
+            <a:ext cx="5120640" cy="640080"/>
+          </a:xfrm>
+          <a:prstGeom prst="rect">
+            <a:avLst/>
+          </a:prstGeom>
+          <a:noFill/>
+          <a:ln/>
+        </p:spPr>
+        <p:txBody>
+          <a:bodyPr wrap="square" lIns="0" tIns="0" rIns="0" bIns="0" rtlCol="0" anchor="ctr"/>
+          <a:lstStyle/>
+          <a:p>
+            <a:pPr indent="0" marL="0">
+              <a:buNone/>
+            </a:pPr>
+            <a:r>
+              <a:rPr lang="en-US" sz="1250" dirty="0">
+                <a:solidFill>
+                  <a:srgbClr val="5B6866"/>
+                </a:solidFill>
+                <a:latin typeface="Calibri" pitchFamily="34" charset="0"/>
+                <a:ea typeface="Calibri" pitchFamily="34" charset="-122"/>
+                <a:cs typeface="Calibri" pitchFamily="34" charset="-120"/>
+              </a:rPr>
+              <a:t>Pilot broker confirms map pins; official flat lists loaded — TMC register request (RTI), MahaRERA for newer towers.</a:t>
+            </a:r>
+            <a:endParaRPr lang="en-US" sz="1250" dirty="0"/>
+          </a:p>
+        </p:txBody>
+      </p:sp>
+      <p:sp>
+        <p:nvSpPr>
+          <p:cNvPr id="7" name="Shape 4"/>
+          <p:cNvSpPr/>
+          <p:nvPr/>
+        </p:nvSpPr>
+        <p:spPr>
+          <a:xfrm>
+            <a:off x="457200" y="2130552"/>
+            <a:ext cx="548640" cy="548640"/>
+          </a:xfrm>
+          <a:prstGeom prst="ellipse">
+            <a:avLst/>
+          </a:prstGeom>
+          <a:solidFill>
+            <a:srgbClr val="0E3B43"/>
+          </a:solidFill>
+          <a:ln/>
+        </p:spPr>
+      </p:sp>
+      <p:pic>
+        <p:nvPicPr>
+          <p:cNvPr id="8" name="Image 1" descr="preencoded.png">    </p:cNvPr>
+          <p:cNvPicPr>
+            <a:picLocks noChangeAspect="1"/>
+          </p:cNvPicPr>
+          <p:nvPr/>
+        </p:nvPicPr>
+        <p:blipFill>
+          <a:blip r:embed="rId2"/>
+          <a:stretch>
+            <a:fillRect/>
+          </a:stretch>
+        </p:blipFill>
+        <p:spPr>
+          <a:xfrm>
+            <a:off x="588874" y="2262226"/>
+            <a:ext cx="285293" cy="285293"/>
+          </a:xfrm>
+          <a:prstGeom prst="rect">
+            <a:avLst/>
+          </a:prstGeom>
+        </p:spPr>
+      </p:pic>
+      <p:sp>
+        <p:nvSpPr>
+          <p:cNvPr id="9" name="Text 5"/>
+          <p:cNvSpPr txBox="1"/>
+          <p:nvPr/>
+        </p:nvSpPr>
+        <p:spPr>
+          <a:xfrm>
+            <a:off x="1188720" y="2084832"/>
+            <a:ext cx="2377440" cy="640080"/>
+          </a:xfrm>
+          <a:prstGeom prst="rect">
+            <a:avLst/>
+          </a:prstGeom>
+          <a:noFill/>
+          <a:ln/>
+        </p:spPr>
+        <p:txBody>
+          <a:bodyPr wrap="square" lIns="0" tIns="0" rIns="0" bIns="0" rtlCol="0" anchor="ctr"/>
+          <a:lstStyle/>
+          <a:p>
+            <a:pPr indent="0" marL="0">
+              <a:buNone/>
+            </a:pPr>
+            <a:r>
+              <a:rPr lang="en-US" sz="1500" b="1" dirty="0">
+                <a:solidFill>
+                  <a:srgbClr val="15201F"/>
+                </a:solidFill>
+                <a:latin typeface="Calibri" pitchFamily="34" charset="0"/>
+                <a:ea typeface="Calibri" pitchFamily="34" charset="-122"/>
+                <a:cs typeface="Calibri" pitchFamily="34" charset="-120"/>
+              </a:rPr>
+              <a:t>Pilot broker live</a:t>
+            </a:r>
+            <a:endParaRPr lang="en-US" sz="1500" dirty="0"/>
+          </a:p>
+        </p:txBody>
+      </p:sp>
+      <p:sp>
+        <p:nvSpPr>
+          <p:cNvPr id="10" name="Text 6"/>
+          <p:cNvSpPr txBox="1"/>
+          <p:nvPr/>
+        </p:nvSpPr>
+        <p:spPr>
+          <a:xfrm>
+            <a:off x="3566160" y="2084832"/>
+            <a:ext cx="5120640" cy="640080"/>
+          </a:xfrm>
+          <a:prstGeom prst="rect">
+            <a:avLst/>
+          </a:prstGeom>
+          <a:noFill/>
+          <a:ln/>
+        </p:spPr>
+        <p:txBody>
+          <a:bodyPr wrap="square" lIns="0" tIns="0" rIns="0" bIns="0" rtlCol="0" anchor="ctr"/>
+          <a:lstStyle/>
+          <a:p>
+            <a:pPr indent="0" marL="0">
+              <a:buNone/>
+            </a:pPr>
+            <a:r>
+              <a:rPr lang="en-US" sz="1250" dirty="0">
+                <a:solidFill>
+                  <a:srgbClr val="5B6866"/>
+                </a:solidFill>
+                <a:latin typeface="Calibri" pitchFamily="34" charset="0"/>
+                <a:ea typeface="Calibri" pitchFamily="34" charset="-122"/>
+                <a:cs typeface="Calibri" pitchFamily="34" charset="-120"/>
+              </a:rPr>
+              <a:t>Server in the cloud, real logins, Android app; iPhone via TestFlight.</a:t>
+            </a:r>
+            <a:endParaRPr lang="en-US" sz="1250" dirty="0"/>
+          </a:p>
+        </p:txBody>
+      </p:sp>
+      <p:sp>
+        <p:nvSpPr>
+          <p:cNvPr id="11" name="Shape 7"/>
+          <p:cNvSpPr/>
+          <p:nvPr/>
+        </p:nvSpPr>
+        <p:spPr>
+          <a:xfrm>
+            <a:off x="457200" y="3026664"/>
+            <a:ext cx="548640" cy="548640"/>
+          </a:xfrm>
+          <a:prstGeom prst="ellipse">
+            <a:avLst/>
+          </a:prstGeom>
+          <a:solidFill>
+            <a:srgbClr val="0E3B43"/>
+          </a:solidFill>
+          <a:ln/>
+        </p:spPr>
+      </p:sp>
+      <p:pic>
+        <p:nvPicPr>
+          <p:cNvPr id="12" name="Image 2" descr="preencoded.png">    </p:cNvPr>
+          <p:cNvPicPr>
+            <a:picLocks noChangeAspect="1"/>
+          </p:cNvPicPr>
+          <p:nvPr/>
+        </p:nvPicPr>
+        <p:blipFill>
+          <a:blip r:embed="rId3"/>
+          <a:stretch>
+            <a:fillRect/>
+          </a:stretch>
+        </p:blipFill>
+        <p:spPr>
+          <a:xfrm>
+            <a:off x="588874" y="3158338"/>
+            <a:ext cx="285293" cy="285293"/>
+          </a:xfrm>
+          <a:prstGeom prst="rect">
+            <a:avLst/>
+          </a:prstGeom>
+        </p:spPr>
+      </p:pic>
+      <p:sp>
+        <p:nvSpPr>
+          <p:cNvPr id="13" name="Text 8"/>
+          <p:cNvSpPr txBox="1"/>
+          <p:nvPr/>
+        </p:nvSpPr>
+        <p:spPr>
+          <a:xfrm>
+            <a:off x="1188720" y="2980944"/>
+            <a:ext cx="2377440" cy="640080"/>
+          </a:xfrm>
+          <a:prstGeom prst="rect">
+            <a:avLst/>
+          </a:prstGeom>
+          <a:noFill/>
+          <a:ln/>
+        </p:spPr>
+        <p:txBody>
+          <a:bodyPr wrap="square" lIns="0" tIns="0" rIns="0" bIns="0" rtlCol="0" anchor="ctr"/>
+          <a:lstStyle/>
+          <a:p>
+            <a:pPr indent="0" marL="0">
+              <a:buNone/>
+            </a:pPr>
+            <a:r>
+              <a:rPr lang="en-US" sz="1500" b="1" dirty="0">
+                <a:solidFill>
+                  <a:srgbClr val="15201F"/>
+                </a:solidFill>
+                <a:latin typeface="Calibri" pitchFamily="34" charset="0"/>
+                <a:ea typeface="Calibri" pitchFamily="34" charset="-122"/>
+                <a:cs typeface="Calibri" pitchFamily="34" charset="-120"/>
+              </a:rPr>
+              <a:t>Real messages</a:t>
+            </a:r>
+            <a:endParaRPr lang="en-US" sz="1500" dirty="0"/>
+          </a:p>
+        </p:txBody>
+      </p:sp>
+      <p:sp>
+        <p:nvSpPr>
+          <p:cNvPr id="14" name="Text 9"/>
+          <p:cNvSpPr txBox="1"/>
+          <p:nvPr/>
+        </p:nvSpPr>
+        <p:spPr>
+          <a:xfrm>
+            <a:off x="3566160" y="2980944"/>
+            <a:ext cx="5120640" cy="640080"/>
+          </a:xfrm>
+          <a:prstGeom prst="rect">
+            <a:avLst/>
+          </a:prstGeom>
+          <a:noFill/>
+          <a:ln/>
+        </p:spPr>
+        <p:txBody>
+          <a:bodyPr wrap="square" lIns="0" tIns="0" rIns="0" bIns="0" rtlCol="0" anchor="ctr"/>
+          <a:lstStyle/>
+          <a:p>
+            <a:pPr indent="0" marL="0">
+              <a:buNone/>
+            </a:pPr>
+            <a:r>
+              <a:rPr lang="en-US" sz="1250" dirty="0">
+                <a:solidFill>
+                  <a:srgbClr val="5B6866"/>
+                </a:solidFill>
+                <a:latin typeface="Calibri" pitchFamily="34" charset="0"/>
+                <a:ea typeface="Calibri" pitchFamily="34" charset="-122"/>
+                <a:cs typeface="Calibri" pitchFamily="34" charset="-120"/>
+              </a:rPr>
+              <a:t>DLT sender ID and templates, WhatsApp Business, Google Maps accounts.</a:t>
+            </a:r>
+            <a:endParaRPr lang="en-US" sz="1250" dirty="0"/>
+          </a:p>
+        </p:txBody>
+      </p:sp>
+      <p:sp>
+        <p:nvSpPr>
+          <p:cNvPr id="15" name="Shape 10"/>
+          <p:cNvSpPr/>
+          <p:nvPr/>
+        </p:nvSpPr>
+        <p:spPr>
+          <a:xfrm>
+            <a:off x="457200" y="3922776"/>
+            <a:ext cx="548640" cy="548640"/>
+          </a:xfrm>
+          <a:prstGeom prst="ellipse">
+            <a:avLst/>
+          </a:prstGeom>
+          <a:solidFill>
+            <a:srgbClr val="0E3B43"/>
+          </a:solidFill>
+          <a:ln/>
+        </p:spPr>
+      </p:sp>
+      <p:pic>
+        <p:nvPicPr>
+          <p:cNvPr id="16" name="Image 3" descr="preencoded.png">    </p:cNvPr>
+          <p:cNvPicPr>
+            <a:picLocks noChangeAspect="1"/>
+          </p:cNvPicPr>
+          <p:nvPr/>
+        </p:nvPicPr>
+        <p:blipFill>
+          <a:blip r:embed="rId4"/>
+          <a:stretch>
+            <a:fillRect/>
+          </a:stretch>
+        </p:blipFill>
+        <p:spPr>
+          <a:xfrm>
+            <a:off x="588874" y="4054450"/>
+            <a:ext cx="285293" cy="285293"/>
+          </a:xfrm>
+          <a:prstGeom prst="rect">
+            <a:avLst/>
+          </a:prstGeom>
+        </p:spPr>
+      </p:pic>
+      <p:sp>
+        <p:nvSpPr>
+          <p:cNvPr id="17" name="Text 11"/>
+          <p:cNvSpPr txBox="1"/>
+          <p:nvPr/>
+        </p:nvSpPr>
+        <p:spPr>
+          <a:xfrm>
+            <a:off x="1188720" y="3877056"/>
+            <a:ext cx="2377440" cy="640080"/>
+          </a:xfrm>
+          <a:prstGeom prst="rect">
+            <a:avLst/>
+          </a:prstGeom>
+          <a:noFill/>
+          <a:ln/>
+        </p:spPr>
+        <p:txBody>
+          <a:bodyPr wrap="square" lIns="0" tIns="0" rIns="0" bIns="0" rtlCol="0" anchor="ctr"/>
+          <a:lstStyle/>
+          <a:p>
+            <a:pPr indent="0" marL="0">
+              <a:buNone/>
+            </a:pPr>
+            <a:r>
+              <a:rPr lang="en-US" sz="1500" b="1" dirty="0">
+                <a:solidFill>
+                  <a:srgbClr val="15201F"/>
+                </a:solidFill>
+                <a:latin typeface="Calibri" pitchFamily="34" charset="0"/>
+                <a:ea typeface="Calibri" pitchFamily="34" charset="-122"/>
+                <a:cs typeface="Calibri" pitchFamily="34" charset="-120"/>
+              </a:rPr>
+              <a:t>Measure &amp; price</a:t>
+            </a:r>
+            <a:endParaRPr lang="en-US" sz="1500" dirty="0"/>
+          </a:p>
+        </p:txBody>
+      </p:sp>
+      <p:sp>
+        <p:nvSpPr>
+          <p:cNvPr id="18" name="Text 12"/>
+          <p:cNvSpPr txBox="1"/>
+          <p:nvPr/>
+        </p:nvSpPr>
+        <p:spPr>
+          <a:xfrm>
+            <a:off x="3566160" y="3877056"/>
+            <a:ext cx="5120640" cy="640080"/>
+          </a:xfrm>
+          <a:prstGeom prst="rect">
+            <a:avLst/>
+          </a:prstGeom>
+          <a:noFill/>
+          <a:ln/>
+        </p:spPr>
+        <p:txBody>
+          <a:bodyPr wrap="square" lIns="0" tIns="0" rIns="0" bIns="0" rtlCol="0" anchor="ctr"/>
+          <a:lstStyle/>
+          <a:p>
+            <a:pPr indent="0" marL="0">
+              <a:buNone/>
+            </a:pPr>
+            <a:r>
+              <a:rPr lang="en-US" sz="1250" dirty="0">
+                <a:solidFill>
+                  <a:srgbClr val="5B6866"/>
+                </a:solidFill>
+                <a:latin typeface="Calibri" pitchFamily="34" charset="0"/>
+                <a:ea typeface="Calibri" pitchFamily="34" charset="-122"/>
+                <a:cs typeface="Calibri" pitchFamily="34" charset="-120"/>
+              </a:rPr>
+              <a:t>Time per flat, stale listings, visits per deal, willingness to pay → pricing decision.</a:t>
+            </a:r>
+            <a:endParaRPr lang="en-US" sz="1250" dirty="0"/>
+          </a:p>
+        </p:txBody>
+      </p:sp>
+    </p:spTree>
+  </p:cSld>
+  <p:clrMapOvr>
+    <a:masterClrMapping/>
+  </p:clrMapOvr>
+</p:sld>
+</file>
+
+<file path=ppt/slides/slide22.xml><?xml version="1.0" encoding="utf-8"?>
+<p:sld xmlns:a="http://schemas.openxmlformats.org/drawingml/2006/main" xmlns:r="http://schemas.openxmlformats.org/officeDocument/2006/relationships" xmlns:p="http://schemas.openxmlformats.org/presentationml/2006/main">
+  <p:cSld name="Slide 22">
     <p:bg>
       <p:bgPr>
         <a:solidFill>
